--- a/doc-mk/Requirements/requirements-overview.pptx
+++ b/doc-mk/Requirements/requirements-overview.pptx
@@ -5269,42 +5269,7 @@
       </p:sp>
       <p:sp>
         <p:nvSpPr>
-          <p:cNvPr id="15" name="TextBox 14"/>
-          <p:cNvSpPr txBox="1"/>
-          <p:nvPr/>
-        </p:nvSpPr>
-        <p:spPr>
-          <a:xfrm>
-            <a:off x="1307592" y="2606039"/>
-            <a:ext cx="-265176" cy="585216"/>
-          </a:xfrm>
-          <a:prstGeom prst="rect">
-            <a:avLst/>
-          </a:prstGeom>
-          <a:noFill/>
-        </p:spPr>
-        <p:txBody>
-          <a:bodyPr wrap="square" lIns="36576" tIns="18288" rIns="36576" bIns="18288" anchor="ctr">
-            <a:spAutoFit/>
-          </a:bodyPr>
-          <a:lstStyle/>
-          <a:p>
-            <a:pPr algn="l"/>
-            <a:r>
-              <a:rPr sz="1000" b="1" i="0">
-                <a:solidFill>
-                  <a:srgbClr val="000000"/>
-                </a:solidFill>
-                <a:latin typeface="맑은 고딕"/>
-              </a:rPr>
-              <a:t/>
-            </a:r>
-          </a:p>
-        </p:txBody>
-      </p:sp>
-      <p:sp>
-        <p:nvSpPr>
-          <p:cNvPr id="16" name="Rectangle 15"/>
+          <p:cNvPr id="15" name="Rectangle 14"/>
           <p:cNvSpPr/>
           <p:nvPr/>
         </p:nvSpPr>
@@ -5357,7 +5322,7 @@
       </p:sp>
       <p:sp>
         <p:nvSpPr>
-          <p:cNvPr id="17" name="Rectangle 16"/>
+          <p:cNvPr id="16" name="Rectangle 15"/>
           <p:cNvSpPr/>
           <p:nvPr/>
         </p:nvSpPr>
@@ -5410,7 +5375,7 @@
       </p:sp>
       <p:sp>
         <p:nvSpPr>
-          <p:cNvPr id="18" name="Rectangle 17"/>
+          <p:cNvPr id="17" name="Rectangle 16"/>
           <p:cNvSpPr/>
           <p:nvPr/>
         </p:nvSpPr>
@@ -5463,7 +5428,7 @@
       </p:sp>
       <p:sp>
         <p:nvSpPr>
-          <p:cNvPr id="19" name="Rectangle 18"/>
+          <p:cNvPr id="18" name="Rectangle 17"/>
           <p:cNvSpPr/>
           <p:nvPr/>
         </p:nvSpPr>
@@ -5516,7 +5481,7 @@
       </p:sp>
       <p:sp>
         <p:nvSpPr>
-          <p:cNvPr id="20" name="Rectangle 19"/>
+          <p:cNvPr id="19" name="Rectangle 18"/>
           <p:cNvSpPr/>
           <p:nvPr/>
         </p:nvSpPr>
@@ -5560,7 +5525,7 @@
       </p:sp>
       <p:sp>
         <p:nvSpPr>
-          <p:cNvPr id="21" name="Rectangle 20"/>
+          <p:cNvPr id="20" name="Rectangle 19"/>
           <p:cNvSpPr/>
           <p:nvPr/>
         </p:nvSpPr>
@@ -5604,7 +5569,7 @@
       </p:sp>
       <p:sp>
         <p:nvSpPr>
-          <p:cNvPr id="22" name="Rectangle 21"/>
+          <p:cNvPr id="21" name="Rectangle 20"/>
           <p:cNvSpPr/>
           <p:nvPr/>
         </p:nvSpPr>
@@ -5650,7 +5615,7 @@
       </p:sp>
       <p:sp>
         <p:nvSpPr>
-          <p:cNvPr id="23" name="Rectangle 22"/>
+          <p:cNvPr id="22" name="Rectangle 21"/>
           <p:cNvSpPr/>
           <p:nvPr/>
         </p:nvSpPr>
@@ -5694,7 +5659,7 @@
       </p:sp>
       <p:sp>
         <p:nvSpPr>
-          <p:cNvPr id="24" name="Oval 23"/>
+          <p:cNvPr id="23" name="Oval 22"/>
           <p:cNvSpPr/>
           <p:nvPr/>
         </p:nvSpPr>
@@ -5747,42 +5712,7 @@
       </p:sp>
       <p:sp>
         <p:nvSpPr>
-          <p:cNvPr id="25" name="TextBox 24"/>
-          <p:cNvSpPr txBox="1"/>
-          <p:nvPr/>
-        </p:nvSpPr>
-        <p:spPr>
-          <a:xfrm>
-            <a:off x="1307592" y="3264407"/>
-            <a:ext cx="-265176" cy="585216"/>
-          </a:xfrm>
-          <a:prstGeom prst="rect">
-            <a:avLst/>
-          </a:prstGeom>
-          <a:noFill/>
-        </p:spPr>
-        <p:txBody>
-          <a:bodyPr wrap="square" lIns="36576" tIns="18288" rIns="36576" bIns="18288" anchor="ctr">
-            <a:spAutoFit/>
-          </a:bodyPr>
-          <a:lstStyle/>
-          <a:p>
-            <a:pPr algn="l"/>
-            <a:r>
-              <a:rPr sz="1000" b="1" i="0">
-                <a:solidFill>
-                  <a:srgbClr val="000000"/>
-                </a:solidFill>
-                <a:latin typeface="맑은 고딕"/>
-              </a:rPr>
-              <a:t/>
-            </a:r>
-          </a:p>
-        </p:txBody>
-      </p:sp>
-      <p:sp>
-        <p:nvSpPr>
-          <p:cNvPr id="26" name="Rectangle 25"/>
+          <p:cNvPr id="24" name="Rectangle 23"/>
           <p:cNvSpPr/>
           <p:nvPr/>
         </p:nvSpPr>
@@ -5835,7 +5765,7 @@
       </p:sp>
       <p:sp>
         <p:nvSpPr>
-          <p:cNvPr id="27" name="Rectangle 26"/>
+          <p:cNvPr id="25" name="Rectangle 24"/>
           <p:cNvSpPr/>
           <p:nvPr/>
         </p:nvSpPr>
@@ -5888,7 +5818,7 @@
       </p:sp>
       <p:sp>
         <p:nvSpPr>
-          <p:cNvPr id="28" name="Rectangle 27"/>
+          <p:cNvPr id="26" name="Rectangle 25"/>
           <p:cNvSpPr/>
           <p:nvPr/>
         </p:nvSpPr>
@@ -5941,7 +5871,7 @@
       </p:sp>
       <p:sp>
         <p:nvSpPr>
-          <p:cNvPr id="29" name="Rectangle 28"/>
+          <p:cNvPr id="27" name="Rectangle 26"/>
           <p:cNvSpPr/>
           <p:nvPr/>
         </p:nvSpPr>
@@ -5994,7 +5924,7 @@
       </p:sp>
       <p:sp>
         <p:nvSpPr>
-          <p:cNvPr id="30" name="Rectangle 29"/>
+          <p:cNvPr id="28" name="Rectangle 27"/>
           <p:cNvSpPr/>
           <p:nvPr/>
         </p:nvSpPr>
@@ -6038,7 +5968,7 @@
       </p:sp>
       <p:sp>
         <p:nvSpPr>
-          <p:cNvPr id="31" name="Rectangle 30"/>
+          <p:cNvPr id="29" name="Rectangle 28"/>
           <p:cNvSpPr/>
           <p:nvPr/>
         </p:nvSpPr>
@@ -6082,7 +6012,7 @@
       </p:sp>
       <p:sp>
         <p:nvSpPr>
-          <p:cNvPr id="32" name="Rectangle 31"/>
+          <p:cNvPr id="30" name="Rectangle 29"/>
           <p:cNvSpPr/>
           <p:nvPr/>
         </p:nvSpPr>
@@ -6128,7 +6058,7 @@
       </p:sp>
       <p:sp>
         <p:nvSpPr>
-          <p:cNvPr id="33" name="Rectangle 32"/>
+          <p:cNvPr id="31" name="Rectangle 30"/>
           <p:cNvSpPr/>
           <p:nvPr/>
         </p:nvSpPr>
@@ -6172,7 +6102,7 @@
       </p:sp>
       <p:sp>
         <p:nvSpPr>
-          <p:cNvPr id="34" name="Oval 33"/>
+          <p:cNvPr id="32" name="Oval 31"/>
           <p:cNvSpPr/>
           <p:nvPr/>
         </p:nvSpPr>
@@ -6225,42 +6155,7 @@
       </p:sp>
       <p:sp>
         <p:nvSpPr>
-          <p:cNvPr id="35" name="TextBox 34"/>
-          <p:cNvSpPr txBox="1"/>
-          <p:nvPr/>
-        </p:nvSpPr>
-        <p:spPr>
-          <a:xfrm>
-            <a:off x="1307592" y="3922775"/>
-            <a:ext cx="-265176" cy="585216"/>
-          </a:xfrm>
-          <a:prstGeom prst="rect">
-            <a:avLst/>
-          </a:prstGeom>
-          <a:noFill/>
-        </p:spPr>
-        <p:txBody>
-          <a:bodyPr wrap="square" lIns="36576" tIns="18288" rIns="36576" bIns="18288" anchor="ctr">
-            <a:spAutoFit/>
-          </a:bodyPr>
-          <a:lstStyle/>
-          <a:p>
-            <a:pPr algn="l"/>
-            <a:r>
-              <a:rPr sz="1000" b="1" i="0">
-                <a:solidFill>
-                  <a:srgbClr val="000000"/>
-                </a:solidFill>
-                <a:latin typeface="맑은 고딕"/>
-              </a:rPr>
-              <a:t/>
-            </a:r>
-          </a:p>
-        </p:txBody>
-      </p:sp>
-      <p:sp>
-        <p:nvSpPr>
-          <p:cNvPr id="36" name="Rectangle 35"/>
+          <p:cNvPr id="33" name="Rectangle 32"/>
           <p:cNvSpPr/>
           <p:nvPr/>
         </p:nvSpPr>
@@ -6313,7 +6208,7 @@
       </p:sp>
       <p:sp>
         <p:nvSpPr>
-          <p:cNvPr id="37" name="Rectangle 36"/>
+          <p:cNvPr id="34" name="Rectangle 33"/>
           <p:cNvSpPr/>
           <p:nvPr/>
         </p:nvSpPr>
@@ -6366,7 +6261,7 @@
       </p:sp>
       <p:sp>
         <p:nvSpPr>
-          <p:cNvPr id="38" name="Rectangle 37"/>
+          <p:cNvPr id="35" name="Rectangle 34"/>
           <p:cNvSpPr/>
           <p:nvPr/>
         </p:nvSpPr>
@@ -6419,7 +6314,7 @@
       </p:sp>
       <p:sp>
         <p:nvSpPr>
-          <p:cNvPr id="39" name="Rectangle 38"/>
+          <p:cNvPr id="36" name="Rectangle 35"/>
           <p:cNvSpPr/>
           <p:nvPr/>
         </p:nvSpPr>
@@ -6472,7 +6367,7 @@
       </p:sp>
       <p:sp>
         <p:nvSpPr>
-          <p:cNvPr id="40" name="Rectangle 39"/>
+          <p:cNvPr id="37" name="Rectangle 36"/>
           <p:cNvSpPr/>
           <p:nvPr/>
         </p:nvSpPr>
@@ -6516,7 +6411,7 @@
       </p:sp>
       <p:sp>
         <p:nvSpPr>
-          <p:cNvPr id="41" name="Rectangle 40"/>
+          <p:cNvPr id="38" name="Rectangle 37"/>
           <p:cNvSpPr/>
           <p:nvPr/>
         </p:nvSpPr>
@@ -6560,7 +6455,7 @@
       </p:sp>
       <p:sp>
         <p:nvSpPr>
-          <p:cNvPr id="42" name="Rectangle 41"/>
+          <p:cNvPr id="39" name="Rectangle 38"/>
           <p:cNvSpPr/>
           <p:nvPr/>
         </p:nvSpPr>
@@ -6606,7 +6501,7 @@
       </p:sp>
       <p:sp>
         <p:nvSpPr>
-          <p:cNvPr id="43" name="Rectangle 42"/>
+          <p:cNvPr id="40" name="Rectangle 39"/>
           <p:cNvSpPr/>
           <p:nvPr/>
         </p:nvSpPr>
@@ -6650,7 +6545,7 @@
       </p:sp>
       <p:sp>
         <p:nvSpPr>
-          <p:cNvPr id="44" name="Oval 43"/>
+          <p:cNvPr id="41" name="Oval 40"/>
           <p:cNvSpPr/>
           <p:nvPr/>
         </p:nvSpPr>
@@ -6703,42 +6598,7 @@
       </p:sp>
       <p:sp>
         <p:nvSpPr>
-          <p:cNvPr id="45" name="TextBox 44"/>
-          <p:cNvSpPr txBox="1"/>
-          <p:nvPr/>
-        </p:nvSpPr>
-        <p:spPr>
-          <a:xfrm>
-            <a:off x="1307592" y="4581144"/>
-            <a:ext cx="-265176" cy="585216"/>
-          </a:xfrm>
-          <a:prstGeom prst="rect">
-            <a:avLst/>
-          </a:prstGeom>
-          <a:noFill/>
-        </p:spPr>
-        <p:txBody>
-          <a:bodyPr wrap="square" lIns="36576" tIns="18288" rIns="36576" bIns="18288" anchor="ctr">
-            <a:spAutoFit/>
-          </a:bodyPr>
-          <a:lstStyle/>
-          <a:p>
-            <a:pPr algn="l"/>
-            <a:r>
-              <a:rPr sz="1000" b="1" i="0">
-                <a:solidFill>
-                  <a:srgbClr val="000000"/>
-                </a:solidFill>
-                <a:latin typeface="맑은 고딕"/>
-              </a:rPr>
-              <a:t/>
-            </a:r>
-          </a:p>
-        </p:txBody>
-      </p:sp>
-      <p:sp>
-        <p:nvSpPr>
-          <p:cNvPr id="46" name="Rectangle 45"/>
+          <p:cNvPr id="42" name="Rectangle 41"/>
           <p:cNvSpPr/>
           <p:nvPr/>
         </p:nvSpPr>
@@ -6791,7 +6651,7 @@
       </p:sp>
       <p:sp>
         <p:nvSpPr>
-          <p:cNvPr id="47" name="Rectangle 46"/>
+          <p:cNvPr id="43" name="Rectangle 42"/>
           <p:cNvSpPr/>
           <p:nvPr/>
         </p:nvSpPr>
@@ -6844,7 +6704,7 @@
       </p:sp>
       <p:sp>
         <p:nvSpPr>
-          <p:cNvPr id="48" name="Rectangle 47"/>
+          <p:cNvPr id="44" name="Rectangle 43"/>
           <p:cNvSpPr/>
           <p:nvPr/>
         </p:nvSpPr>
@@ -6897,7 +6757,7 @@
       </p:sp>
       <p:sp>
         <p:nvSpPr>
-          <p:cNvPr id="49" name="Rectangle 48"/>
+          <p:cNvPr id="45" name="Rectangle 44"/>
           <p:cNvSpPr/>
           <p:nvPr/>
         </p:nvSpPr>
@@ -6950,7 +6810,7 @@
       </p:sp>
       <p:sp>
         <p:nvSpPr>
-          <p:cNvPr id="50" name="Rectangle 49"/>
+          <p:cNvPr id="46" name="Rectangle 45"/>
           <p:cNvSpPr/>
           <p:nvPr/>
         </p:nvSpPr>
@@ -6994,7 +6854,7 @@
       </p:sp>
       <p:sp>
         <p:nvSpPr>
-          <p:cNvPr id="51" name="Rectangle 50"/>
+          <p:cNvPr id="47" name="Rectangle 46"/>
           <p:cNvSpPr/>
           <p:nvPr/>
         </p:nvSpPr>
@@ -7038,7 +6898,7 @@
       </p:sp>
       <p:sp>
         <p:nvSpPr>
-          <p:cNvPr id="52" name="Rectangle 51"/>
+          <p:cNvPr id="48" name="Rectangle 47"/>
           <p:cNvSpPr/>
           <p:nvPr/>
         </p:nvSpPr>
@@ -7084,7 +6944,7 @@
       </p:sp>
       <p:sp>
         <p:nvSpPr>
-          <p:cNvPr id="53" name="Rectangle 52"/>
+          <p:cNvPr id="49" name="Rectangle 48"/>
           <p:cNvSpPr/>
           <p:nvPr/>
         </p:nvSpPr>
@@ -7128,7 +6988,7 @@
       </p:sp>
       <p:sp>
         <p:nvSpPr>
-          <p:cNvPr id="54" name="Oval 53"/>
+          <p:cNvPr id="50" name="Oval 49"/>
           <p:cNvSpPr/>
           <p:nvPr/>
         </p:nvSpPr>
@@ -7181,42 +7041,7 @@
       </p:sp>
       <p:sp>
         <p:nvSpPr>
-          <p:cNvPr id="55" name="TextBox 54"/>
-          <p:cNvSpPr txBox="1"/>
-          <p:nvPr/>
-        </p:nvSpPr>
-        <p:spPr>
-          <a:xfrm>
-            <a:off x="1307592" y="5239512"/>
-            <a:ext cx="-265176" cy="585216"/>
-          </a:xfrm>
-          <a:prstGeom prst="rect">
-            <a:avLst/>
-          </a:prstGeom>
-          <a:noFill/>
-        </p:spPr>
-        <p:txBody>
-          <a:bodyPr wrap="square" lIns="36576" tIns="18288" rIns="36576" bIns="18288" anchor="ctr">
-            <a:spAutoFit/>
-          </a:bodyPr>
-          <a:lstStyle/>
-          <a:p>
-            <a:pPr algn="l"/>
-            <a:r>
-              <a:rPr sz="1000" b="1" i="0">
-                <a:solidFill>
-                  <a:srgbClr val="000000"/>
-                </a:solidFill>
-                <a:latin typeface="맑은 고딕"/>
-              </a:rPr>
-              <a:t/>
-            </a:r>
-          </a:p>
-        </p:txBody>
-      </p:sp>
-      <p:sp>
-        <p:nvSpPr>
-          <p:cNvPr id="56" name="Rectangle 55"/>
+          <p:cNvPr id="51" name="Rectangle 50"/>
           <p:cNvSpPr/>
           <p:nvPr/>
         </p:nvSpPr>
@@ -7269,7 +7094,7 @@
       </p:sp>
       <p:sp>
         <p:nvSpPr>
-          <p:cNvPr id="57" name="Rectangle 56"/>
+          <p:cNvPr id="52" name="Rectangle 51"/>
           <p:cNvSpPr/>
           <p:nvPr/>
         </p:nvSpPr>
@@ -7322,7 +7147,7 @@
       </p:sp>
       <p:sp>
         <p:nvSpPr>
-          <p:cNvPr id="58" name="Rectangle 57"/>
+          <p:cNvPr id="53" name="Rectangle 52"/>
           <p:cNvSpPr/>
           <p:nvPr/>
         </p:nvSpPr>
@@ -7375,7 +7200,7 @@
       </p:sp>
       <p:sp>
         <p:nvSpPr>
-          <p:cNvPr id="59" name="Rectangle 58"/>
+          <p:cNvPr id="54" name="Rectangle 53"/>
           <p:cNvSpPr/>
           <p:nvPr/>
         </p:nvSpPr>
@@ -7428,7 +7253,7 @@
       </p:sp>
       <p:sp>
         <p:nvSpPr>
-          <p:cNvPr id="60" name="Rectangle 59"/>
+          <p:cNvPr id="55" name="Rectangle 54"/>
           <p:cNvSpPr/>
           <p:nvPr/>
         </p:nvSpPr>
@@ -7472,7 +7297,7 @@
       </p:sp>
       <p:sp>
         <p:nvSpPr>
-          <p:cNvPr id="61" name="Rectangle 60"/>
+          <p:cNvPr id="56" name="Rectangle 55"/>
           <p:cNvSpPr/>
           <p:nvPr/>
         </p:nvSpPr>
@@ -7516,7 +7341,7 @@
       </p:sp>
       <p:sp>
         <p:nvSpPr>
-          <p:cNvPr id="62" name="Rectangle 61"/>
+          <p:cNvPr id="57" name="Rectangle 56"/>
           <p:cNvSpPr/>
           <p:nvPr/>
         </p:nvSpPr>
@@ -7562,7 +7387,7 @@
       </p:sp>
       <p:sp>
         <p:nvSpPr>
-          <p:cNvPr id="63" name="Rectangle 62"/>
+          <p:cNvPr id="58" name="Rectangle 57"/>
           <p:cNvSpPr/>
           <p:nvPr/>
         </p:nvSpPr>
@@ -7606,7 +7431,7 @@
       </p:sp>
       <p:sp>
         <p:nvSpPr>
-          <p:cNvPr id="64" name="Oval 63"/>
+          <p:cNvPr id="59" name="Oval 58"/>
           <p:cNvSpPr/>
           <p:nvPr/>
         </p:nvSpPr>
@@ -7659,42 +7484,7 @@
       </p:sp>
       <p:sp>
         <p:nvSpPr>
-          <p:cNvPr id="65" name="TextBox 64"/>
-          <p:cNvSpPr txBox="1"/>
-          <p:nvPr/>
-        </p:nvSpPr>
-        <p:spPr>
-          <a:xfrm>
-            <a:off x="1307592" y="5897879"/>
-            <a:ext cx="-265176" cy="585216"/>
-          </a:xfrm>
-          <a:prstGeom prst="rect">
-            <a:avLst/>
-          </a:prstGeom>
-          <a:noFill/>
-        </p:spPr>
-        <p:txBody>
-          <a:bodyPr wrap="square" lIns="36576" tIns="18288" rIns="36576" bIns="18288" anchor="ctr">
-            <a:spAutoFit/>
-          </a:bodyPr>
-          <a:lstStyle/>
-          <a:p>
-            <a:pPr algn="l"/>
-            <a:r>
-              <a:rPr sz="1000" b="1" i="0">
-                <a:solidFill>
-                  <a:srgbClr val="000000"/>
-                </a:solidFill>
-                <a:latin typeface="맑은 고딕"/>
-              </a:rPr>
-              <a:t/>
-            </a:r>
-          </a:p>
-        </p:txBody>
-      </p:sp>
-      <p:sp>
-        <p:nvSpPr>
-          <p:cNvPr id="66" name="Rectangle 65"/>
+          <p:cNvPr id="60" name="Rectangle 59"/>
           <p:cNvSpPr/>
           <p:nvPr/>
         </p:nvSpPr>
@@ -7747,7 +7537,7 @@
       </p:sp>
       <p:sp>
         <p:nvSpPr>
-          <p:cNvPr id="67" name="Rectangle 66"/>
+          <p:cNvPr id="61" name="Rectangle 60"/>
           <p:cNvSpPr/>
           <p:nvPr/>
         </p:nvSpPr>
@@ -7800,7 +7590,7 @@
       </p:sp>
       <p:sp>
         <p:nvSpPr>
-          <p:cNvPr id="68" name="Rectangle 67"/>
+          <p:cNvPr id="62" name="Rectangle 61"/>
           <p:cNvSpPr/>
           <p:nvPr/>
         </p:nvSpPr>
@@ -7853,7 +7643,7 @@
       </p:sp>
       <p:sp>
         <p:nvSpPr>
-          <p:cNvPr id="69" name="Rectangle 68"/>
+          <p:cNvPr id="63" name="Rectangle 62"/>
           <p:cNvSpPr/>
           <p:nvPr/>
         </p:nvSpPr>
@@ -7906,7 +7696,7 @@
       </p:sp>
       <p:sp>
         <p:nvSpPr>
-          <p:cNvPr id="70" name="Rectangle 69"/>
+          <p:cNvPr id="64" name="Rectangle 63"/>
           <p:cNvSpPr/>
           <p:nvPr/>
         </p:nvSpPr>
@@ -7950,7 +7740,7 @@
       </p:sp>
       <p:sp>
         <p:nvSpPr>
-          <p:cNvPr id="71" name="Rectangle 70"/>
+          <p:cNvPr id="65" name="Rectangle 64"/>
           <p:cNvSpPr/>
           <p:nvPr/>
         </p:nvSpPr>
@@ -15255,41 +15045,6 @@
         </p:nvSpPr>
         <p:spPr>
           <a:xfrm>
-            <a:off x="1133856" y="1051560"/>
-            <a:ext cx="1700784" cy="402336"/>
-          </a:xfrm>
-          <a:prstGeom prst="rect">
-            <a:avLst/>
-          </a:prstGeom>
-          <a:noFill/>
-        </p:spPr>
-        <p:txBody>
-          <a:bodyPr wrap="square" lIns="36576" tIns="18288" rIns="36576" bIns="18288" anchor="ctr">
-            <a:spAutoFit/>
-          </a:bodyPr>
-          <a:lstStyle/>
-          <a:p>
-            <a:pPr algn="l"/>
-            <a:r>
-              <a:rPr sz="1000" b="1" i="0">
-                <a:solidFill>
-                  <a:srgbClr val="000000"/>
-                </a:solidFill>
-                <a:latin typeface="맑은 고딕"/>
-              </a:rPr>
-              <a:t/>
-            </a:r>
-          </a:p>
-        </p:txBody>
-      </p:sp>
-      <p:sp>
-        <p:nvSpPr>
-          <p:cNvPr id="12" name="TextBox 11"/>
-          <p:cNvSpPr txBox="1"/>
-          <p:nvPr/>
-        </p:nvSpPr>
-        <p:spPr>
-          <a:xfrm>
             <a:off x="1143000" y="1051560"/>
             <a:ext cx="1783080" cy="402336"/>
           </a:xfrm>
@@ -15319,7 +15074,7 @@
       </p:sp>
       <p:sp>
         <p:nvSpPr>
-          <p:cNvPr id="13" name="Rectangle 12"/>
+          <p:cNvPr id="12" name="Rectangle 11"/>
           <p:cNvSpPr/>
           <p:nvPr/>
         </p:nvSpPr>
@@ -15365,7 +15120,7 @@
       </p:sp>
       <p:sp>
         <p:nvSpPr>
-          <p:cNvPr id="14" name="Rectangle 13"/>
+          <p:cNvPr id="13" name="Rectangle 12"/>
           <p:cNvSpPr/>
           <p:nvPr/>
         </p:nvSpPr>
@@ -15409,7 +15164,7 @@
       </p:sp>
       <p:sp>
         <p:nvSpPr>
-          <p:cNvPr id="15" name="Oval 14"/>
+          <p:cNvPr id="14" name="Oval 13"/>
           <p:cNvSpPr/>
           <p:nvPr/>
         </p:nvSpPr>
@@ -15462,42 +15217,7 @@
       </p:sp>
       <p:sp>
         <p:nvSpPr>
-          <p:cNvPr id="16" name="TextBox 15"/>
-          <p:cNvSpPr txBox="1"/>
-          <p:nvPr/>
-        </p:nvSpPr>
-        <p:spPr>
-          <a:xfrm>
-            <a:off x="3877056" y="1051560"/>
-            <a:ext cx="1700784" cy="402336"/>
-          </a:xfrm>
-          <a:prstGeom prst="rect">
-            <a:avLst/>
-          </a:prstGeom>
-          <a:noFill/>
-        </p:spPr>
-        <p:txBody>
-          <a:bodyPr wrap="square" lIns="36576" tIns="18288" rIns="36576" bIns="18288" anchor="ctr">
-            <a:spAutoFit/>
-          </a:bodyPr>
-          <a:lstStyle/>
-          <a:p>
-            <a:pPr algn="l"/>
-            <a:r>
-              <a:rPr sz="1000" b="1" i="0">
-                <a:solidFill>
-                  <a:srgbClr val="000000"/>
-                </a:solidFill>
-                <a:latin typeface="맑은 고딕"/>
-              </a:rPr>
-              <a:t/>
-            </a:r>
-          </a:p>
-        </p:txBody>
-      </p:sp>
-      <p:sp>
-        <p:nvSpPr>
-          <p:cNvPr id="17" name="TextBox 16"/>
+          <p:cNvPr id="15" name="TextBox 14"/>
           <p:cNvSpPr txBox="1"/>
           <p:nvPr/>
         </p:nvSpPr>
@@ -15532,7 +15252,7 @@
       </p:sp>
       <p:sp>
         <p:nvSpPr>
-          <p:cNvPr id="18" name="Rectangle 17"/>
+          <p:cNvPr id="16" name="Rectangle 15"/>
           <p:cNvSpPr/>
           <p:nvPr/>
         </p:nvSpPr>
@@ -15578,7 +15298,7 @@
       </p:sp>
       <p:sp>
         <p:nvSpPr>
-          <p:cNvPr id="19" name="Rectangle 18"/>
+          <p:cNvPr id="17" name="Rectangle 16"/>
           <p:cNvSpPr/>
           <p:nvPr/>
         </p:nvSpPr>
@@ -15622,7 +15342,7 @@
       </p:sp>
       <p:sp>
         <p:nvSpPr>
-          <p:cNvPr id="20" name="Oval 19"/>
+          <p:cNvPr id="18" name="Oval 17"/>
           <p:cNvSpPr/>
           <p:nvPr/>
         </p:nvSpPr>
@@ -15675,42 +15395,7 @@
       </p:sp>
       <p:sp>
         <p:nvSpPr>
-          <p:cNvPr id="21" name="TextBox 20"/>
-          <p:cNvSpPr txBox="1"/>
-          <p:nvPr/>
-        </p:nvSpPr>
-        <p:spPr>
-          <a:xfrm>
-            <a:off x="1133856" y="1527048"/>
-            <a:ext cx="1700784" cy="402336"/>
-          </a:xfrm>
-          <a:prstGeom prst="rect">
-            <a:avLst/>
-          </a:prstGeom>
-          <a:noFill/>
-        </p:spPr>
-        <p:txBody>
-          <a:bodyPr wrap="square" lIns="36576" tIns="18288" rIns="36576" bIns="18288" anchor="ctr">
-            <a:spAutoFit/>
-          </a:bodyPr>
-          <a:lstStyle/>
-          <a:p>
-            <a:pPr algn="l"/>
-            <a:r>
-              <a:rPr sz="1000" b="1" i="0">
-                <a:solidFill>
-                  <a:srgbClr val="000000"/>
-                </a:solidFill>
-                <a:latin typeface="맑은 고딕"/>
-              </a:rPr>
-              <a:t/>
-            </a:r>
-          </a:p>
-        </p:txBody>
-      </p:sp>
-      <p:sp>
-        <p:nvSpPr>
-          <p:cNvPr id="22" name="TextBox 21"/>
+          <p:cNvPr id="19" name="TextBox 18"/>
           <p:cNvSpPr txBox="1"/>
           <p:nvPr/>
         </p:nvSpPr>
@@ -15745,7 +15430,7 @@
       </p:sp>
       <p:sp>
         <p:nvSpPr>
-          <p:cNvPr id="23" name="Rectangle 22"/>
+          <p:cNvPr id="20" name="Rectangle 19"/>
           <p:cNvSpPr/>
           <p:nvPr/>
         </p:nvSpPr>
@@ -15791,7 +15476,7 @@
       </p:sp>
       <p:sp>
         <p:nvSpPr>
-          <p:cNvPr id="24" name="Rectangle 23"/>
+          <p:cNvPr id="21" name="Rectangle 20"/>
           <p:cNvSpPr/>
           <p:nvPr/>
         </p:nvSpPr>
@@ -15835,7 +15520,7 @@
       </p:sp>
       <p:sp>
         <p:nvSpPr>
-          <p:cNvPr id="25" name="Oval 24"/>
+          <p:cNvPr id="22" name="Oval 21"/>
           <p:cNvSpPr/>
           <p:nvPr/>
         </p:nvSpPr>
@@ -15888,42 +15573,7 @@
       </p:sp>
       <p:sp>
         <p:nvSpPr>
-          <p:cNvPr id="26" name="TextBox 25"/>
-          <p:cNvSpPr txBox="1"/>
-          <p:nvPr/>
-        </p:nvSpPr>
-        <p:spPr>
-          <a:xfrm>
-            <a:off x="3877056" y="1527048"/>
-            <a:ext cx="1700784" cy="402336"/>
-          </a:xfrm>
-          <a:prstGeom prst="rect">
-            <a:avLst/>
-          </a:prstGeom>
-          <a:noFill/>
-        </p:spPr>
-        <p:txBody>
-          <a:bodyPr wrap="square" lIns="36576" tIns="18288" rIns="36576" bIns="18288" anchor="ctr">
-            <a:spAutoFit/>
-          </a:bodyPr>
-          <a:lstStyle/>
-          <a:p>
-            <a:pPr algn="l"/>
-            <a:r>
-              <a:rPr sz="1000" b="1" i="0">
-                <a:solidFill>
-                  <a:srgbClr val="000000"/>
-                </a:solidFill>
-                <a:latin typeface="맑은 고딕"/>
-              </a:rPr>
-              <a:t/>
-            </a:r>
-          </a:p>
-        </p:txBody>
-      </p:sp>
-      <p:sp>
-        <p:nvSpPr>
-          <p:cNvPr id="27" name="TextBox 26"/>
+          <p:cNvPr id="23" name="TextBox 22"/>
           <p:cNvSpPr txBox="1"/>
           <p:nvPr/>
         </p:nvSpPr>
@@ -15958,7 +15608,7 @@
       </p:sp>
       <p:sp>
         <p:nvSpPr>
-          <p:cNvPr id="28" name="Rectangle 27"/>
+          <p:cNvPr id="24" name="Rectangle 23"/>
           <p:cNvSpPr/>
           <p:nvPr/>
         </p:nvSpPr>
@@ -16004,7 +15654,7 @@
       </p:sp>
       <p:sp>
         <p:nvSpPr>
-          <p:cNvPr id="29" name="Rectangle 28"/>
+          <p:cNvPr id="25" name="Rectangle 24"/>
           <p:cNvSpPr/>
           <p:nvPr/>
         </p:nvSpPr>
@@ -16048,7 +15698,7 @@
       </p:sp>
       <p:sp>
         <p:nvSpPr>
-          <p:cNvPr id="30" name="Oval 29"/>
+          <p:cNvPr id="26" name="Oval 25"/>
           <p:cNvSpPr/>
           <p:nvPr/>
         </p:nvSpPr>
@@ -16101,42 +15751,7 @@
       </p:sp>
       <p:sp>
         <p:nvSpPr>
-          <p:cNvPr id="31" name="TextBox 30"/>
-          <p:cNvSpPr txBox="1"/>
-          <p:nvPr/>
-        </p:nvSpPr>
-        <p:spPr>
-          <a:xfrm>
-            <a:off x="1133856" y="2002536"/>
-            <a:ext cx="1700784" cy="402336"/>
-          </a:xfrm>
-          <a:prstGeom prst="rect">
-            <a:avLst/>
-          </a:prstGeom>
-          <a:noFill/>
-        </p:spPr>
-        <p:txBody>
-          <a:bodyPr wrap="square" lIns="36576" tIns="18288" rIns="36576" bIns="18288" anchor="ctr">
-            <a:spAutoFit/>
-          </a:bodyPr>
-          <a:lstStyle/>
-          <a:p>
-            <a:pPr algn="l"/>
-            <a:r>
-              <a:rPr sz="1000" b="1" i="0">
-                <a:solidFill>
-                  <a:srgbClr val="000000"/>
-                </a:solidFill>
-                <a:latin typeface="맑은 고딕"/>
-              </a:rPr>
-              <a:t/>
-            </a:r>
-          </a:p>
-        </p:txBody>
-      </p:sp>
-      <p:sp>
-        <p:nvSpPr>
-          <p:cNvPr id="32" name="TextBox 31"/>
+          <p:cNvPr id="27" name="TextBox 26"/>
           <p:cNvSpPr txBox="1"/>
           <p:nvPr/>
         </p:nvSpPr>
@@ -16171,7 +15786,7 @@
       </p:sp>
       <p:sp>
         <p:nvSpPr>
-          <p:cNvPr id="33" name="Rectangle 32"/>
+          <p:cNvPr id="28" name="Rectangle 27"/>
           <p:cNvSpPr/>
           <p:nvPr/>
         </p:nvSpPr>
@@ -16217,7 +15832,7 @@
       </p:sp>
       <p:sp>
         <p:nvSpPr>
-          <p:cNvPr id="34" name="Rectangle 33"/>
+          <p:cNvPr id="29" name="Rectangle 28"/>
           <p:cNvSpPr/>
           <p:nvPr/>
         </p:nvSpPr>
@@ -16261,7 +15876,7 @@
       </p:sp>
       <p:sp>
         <p:nvSpPr>
-          <p:cNvPr id="35" name="Oval 34"/>
+          <p:cNvPr id="30" name="Oval 29"/>
           <p:cNvSpPr/>
           <p:nvPr/>
         </p:nvSpPr>
@@ -16314,42 +15929,7 @@
       </p:sp>
       <p:sp>
         <p:nvSpPr>
-          <p:cNvPr id="36" name="TextBox 35"/>
-          <p:cNvSpPr txBox="1"/>
-          <p:nvPr/>
-        </p:nvSpPr>
-        <p:spPr>
-          <a:xfrm>
-            <a:off x="3877056" y="2002536"/>
-            <a:ext cx="1700784" cy="402336"/>
-          </a:xfrm>
-          <a:prstGeom prst="rect">
-            <a:avLst/>
-          </a:prstGeom>
-          <a:noFill/>
-        </p:spPr>
-        <p:txBody>
-          <a:bodyPr wrap="square" lIns="36576" tIns="18288" rIns="36576" bIns="18288" anchor="ctr">
-            <a:spAutoFit/>
-          </a:bodyPr>
-          <a:lstStyle/>
-          <a:p>
-            <a:pPr algn="l"/>
-            <a:r>
-              <a:rPr sz="1000" b="1" i="0">
-                <a:solidFill>
-                  <a:srgbClr val="000000"/>
-                </a:solidFill>
-                <a:latin typeface="맑은 고딕"/>
-              </a:rPr>
-              <a:t/>
-            </a:r>
-          </a:p>
-        </p:txBody>
-      </p:sp>
-      <p:sp>
-        <p:nvSpPr>
-          <p:cNvPr id="37" name="TextBox 36"/>
+          <p:cNvPr id="31" name="TextBox 30"/>
           <p:cNvSpPr txBox="1"/>
           <p:nvPr/>
         </p:nvSpPr>
@@ -16384,7 +15964,7 @@
       </p:sp>
       <p:sp>
         <p:nvSpPr>
-          <p:cNvPr id="38" name="Rectangle 37"/>
+          <p:cNvPr id="32" name="Rectangle 31"/>
           <p:cNvSpPr/>
           <p:nvPr/>
         </p:nvSpPr>
@@ -16430,7 +16010,7 @@
       </p:sp>
       <p:sp>
         <p:nvSpPr>
-          <p:cNvPr id="39" name="Rectangle 38"/>
+          <p:cNvPr id="33" name="Rectangle 32"/>
           <p:cNvSpPr/>
           <p:nvPr/>
         </p:nvSpPr>
@@ -16474,7 +16054,7 @@
       </p:sp>
       <p:sp>
         <p:nvSpPr>
-          <p:cNvPr id="40" name="Oval 39"/>
+          <p:cNvPr id="34" name="Oval 33"/>
           <p:cNvSpPr/>
           <p:nvPr/>
         </p:nvSpPr>
@@ -16527,42 +16107,7 @@
       </p:sp>
       <p:sp>
         <p:nvSpPr>
-          <p:cNvPr id="41" name="TextBox 40"/>
-          <p:cNvSpPr txBox="1"/>
-          <p:nvPr/>
-        </p:nvSpPr>
-        <p:spPr>
-          <a:xfrm>
-            <a:off x="1133856" y="2478024"/>
-            <a:ext cx="1700784" cy="402336"/>
-          </a:xfrm>
-          <a:prstGeom prst="rect">
-            <a:avLst/>
-          </a:prstGeom>
-          <a:noFill/>
-        </p:spPr>
-        <p:txBody>
-          <a:bodyPr wrap="square" lIns="36576" tIns="18288" rIns="36576" bIns="18288" anchor="ctr">
-            <a:spAutoFit/>
-          </a:bodyPr>
-          <a:lstStyle/>
-          <a:p>
-            <a:pPr algn="l"/>
-            <a:r>
-              <a:rPr sz="1000" b="1" i="0">
-                <a:solidFill>
-                  <a:srgbClr val="000000"/>
-                </a:solidFill>
-                <a:latin typeface="맑은 고딕"/>
-              </a:rPr>
-              <a:t/>
-            </a:r>
-          </a:p>
-        </p:txBody>
-      </p:sp>
-      <p:sp>
-        <p:nvSpPr>
-          <p:cNvPr id="42" name="TextBox 41"/>
+          <p:cNvPr id="35" name="TextBox 34"/>
           <p:cNvSpPr txBox="1"/>
           <p:nvPr/>
         </p:nvSpPr>
@@ -16597,7 +16142,7 @@
       </p:sp>
       <p:sp>
         <p:nvSpPr>
-          <p:cNvPr id="43" name="Rectangle 42"/>
+          <p:cNvPr id="36" name="Rectangle 35"/>
           <p:cNvSpPr/>
           <p:nvPr/>
         </p:nvSpPr>
@@ -16643,7 +16188,7 @@
       </p:sp>
       <p:sp>
         <p:nvSpPr>
-          <p:cNvPr id="44" name="Rectangle 43"/>
+          <p:cNvPr id="37" name="Rectangle 36"/>
           <p:cNvSpPr/>
           <p:nvPr/>
         </p:nvSpPr>
@@ -16687,7 +16232,7 @@
       </p:sp>
       <p:sp>
         <p:nvSpPr>
-          <p:cNvPr id="45" name="Oval 44"/>
+          <p:cNvPr id="38" name="Oval 37"/>
           <p:cNvSpPr/>
           <p:nvPr/>
         </p:nvSpPr>
@@ -16740,42 +16285,7 @@
       </p:sp>
       <p:sp>
         <p:nvSpPr>
-          <p:cNvPr id="46" name="TextBox 45"/>
-          <p:cNvSpPr txBox="1"/>
-          <p:nvPr/>
-        </p:nvSpPr>
-        <p:spPr>
-          <a:xfrm>
-            <a:off x="3877056" y="2478024"/>
-            <a:ext cx="1700784" cy="402336"/>
-          </a:xfrm>
-          <a:prstGeom prst="rect">
-            <a:avLst/>
-          </a:prstGeom>
-          <a:noFill/>
-        </p:spPr>
-        <p:txBody>
-          <a:bodyPr wrap="square" lIns="36576" tIns="18288" rIns="36576" bIns="18288" anchor="ctr">
-            <a:spAutoFit/>
-          </a:bodyPr>
-          <a:lstStyle/>
-          <a:p>
-            <a:pPr algn="l"/>
-            <a:r>
-              <a:rPr sz="1000" b="1" i="0">
-                <a:solidFill>
-                  <a:srgbClr val="000000"/>
-                </a:solidFill>
-                <a:latin typeface="맑은 고딕"/>
-              </a:rPr>
-              <a:t/>
-            </a:r>
-          </a:p>
-        </p:txBody>
-      </p:sp>
-      <p:sp>
-        <p:nvSpPr>
-          <p:cNvPr id="47" name="TextBox 46"/>
+          <p:cNvPr id="39" name="TextBox 38"/>
           <p:cNvSpPr txBox="1"/>
           <p:nvPr/>
         </p:nvSpPr>
@@ -16810,7 +16320,7 @@
       </p:sp>
       <p:sp>
         <p:nvSpPr>
-          <p:cNvPr id="48" name="Rectangle 47"/>
+          <p:cNvPr id="40" name="Rectangle 39"/>
           <p:cNvSpPr/>
           <p:nvPr/>
         </p:nvSpPr>
@@ -16856,7 +16366,7 @@
       </p:sp>
       <p:sp>
         <p:nvSpPr>
-          <p:cNvPr id="49" name="Rectangle 48"/>
+          <p:cNvPr id="41" name="Rectangle 40"/>
           <p:cNvSpPr/>
           <p:nvPr/>
         </p:nvSpPr>
@@ -16900,7 +16410,7 @@
       </p:sp>
       <p:sp>
         <p:nvSpPr>
-          <p:cNvPr id="50" name="Oval 49"/>
+          <p:cNvPr id="42" name="Oval 41"/>
           <p:cNvSpPr/>
           <p:nvPr/>
         </p:nvSpPr>
@@ -16953,42 +16463,7 @@
       </p:sp>
       <p:sp>
         <p:nvSpPr>
-          <p:cNvPr id="51" name="TextBox 50"/>
-          <p:cNvSpPr txBox="1"/>
-          <p:nvPr/>
-        </p:nvSpPr>
-        <p:spPr>
-          <a:xfrm>
-            <a:off x="1133856" y="2953512"/>
-            <a:ext cx="1700784" cy="402336"/>
-          </a:xfrm>
-          <a:prstGeom prst="rect">
-            <a:avLst/>
-          </a:prstGeom>
-          <a:noFill/>
-        </p:spPr>
-        <p:txBody>
-          <a:bodyPr wrap="square" lIns="36576" tIns="18288" rIns="36576" bIns="18288" anchor="ctr">
-            <a:spAutoFit/>
-          </a:bodyPr>
-          <a:lstStyle/>
-          <a:p>
-            <a:pPr algn="l"/>
-            <a:r>
-              <a:rPr sz="1000" b="1" i="0">
-                <a:solidFill>
-                  <a:srgbClr val="000000"/>
-                </a:solidFill>
-                <a:latin typeface="맑은 고딕"/>
-              </a:rPr>
-              <a:t/>
-            </a:r>
-          </a:p>
-        </p:txBody>
-      </p:sp>
-      <p:sp>
-        <p:nvSpPr>
-          <p:cNvPr id="52" name="TextBox 51"/>
+          <p:cNvPr id="43" name="TextBox 42"/>
           <p:cNvSpPr txBox="1"/>
           <p:nvPr/>
         </p:nvSpPr>
@@ -17023,7 +16498,7 @@
       </p:sp>
       <p:sp>
         <p:nvSpPr>
-          <p:cNvPr id="53" name="Rectangle 52"/>
+          <p:cNvPr id="44" name="Rectangle 43"/>
           <p:cNvSpPr/>
           <p:nvPr/>
         </p:nvSpPr>
@@ -17069,7 +16544,7 @@
       </p:sp>
       <p:sp>
         <p:nvSpPr>
-          <p:cNvPr id="54" name="Rectangle 53"/>
+          <p:cNvPr id="45" name="Rectangle 44"/>
           <p:cNvSpPr/>
           <p:nvPr/>
         </p:nvSpPr>
@@ -17113,7 +16588,7 @@
       </p:sp>
       <p:sp>
         <p:nvSpPr>
-          <p:cNvPr id="55" name="Oval 54"/>
+          <p:cNvPr id="46" name="Oval 45"/>
           <p:cNvSpPr/>
           <p:nvPr/>
         </p:nvSpPr>
@@ -17166,42 +16641,7 @@
       </p:sp>
       <p:sp>
         <p:nvSpPr>
-          <p:cNvPr id="56" name="TextBox 55"/>
-          <p:cNvSpPr txBox="1"/>
-          <p:nvPr/>
-        </p:nvSpPr>
-        <p:spPr>
-          <a:xfrm>
-            <a:off x="3877056" y="2953512"/>
-            <a:ext cx="1700784" cy="402336"/>
-          </a:xfrm>
-          <a:prstGeom prst="rect">
-            <a:avLst/>
-          </a:prstGeom>
-          <a:noFill/>
-        </p:spPr>
-        <p:txBody>
-          <a:bodyPr wrap="square" lIns="36576" tIns="18288" rIns="36576" bIns="18288" anchor="ctr">
-            <a:spAutoFit/>
-          </a:bodyPr>
-          <a:lstStyle/>
-          <a:p>
-            <a:pPr algn="l"/>
-            <a:r>
-              <a:rPr sz="1000" b="1" i="0">
-                <a:solidFill>
-                  <a:srgbClr val="000000"/>
-                </a:solidFill>
-                <a:latin typeface="맑은 고딕"/>
-              </a:rPr>
-              <a:t/>
-            </a:r>
-          </a:p>
-        </p:txBody>
-      </p:sp>
-      <p:sp>
-        <p:nvSpPr>
-          <p:cNvPr id="57" name="TextBox 56"/>
+          <p:cNvPr id="47" name="TextBox 46"/>
           <p:cNvSpPr txBox="1"/>
           <p:nvPr/>
         </p:nvSpPr>
@@ -17236,7 +16676,7 @@
       </p:sp>
       <p:sp>
         <p:nvSpPr>
-          <p:cNvPr id="58" name="Rectangle 57"/>
+          <p:cNvPr id="48" name="Rectangle 47"/>
           <p:cNvSpPr/>
           <p:nvPr/>
         </p:nvSpPr>
@@ -17282,7 +16722,7 @@
       </p:sp>
       <p:sp>
         <p:nvSpPr>
-          <p:cNvPr id="59" name="Rectangle 58"/>
+          <p:cNvPr id="49" name="Rectangle 48"/>
           <p:cNvSpPr/>
           <p:nvPr/>
         </p:nvSpPr>
@@ -17326,7 +16766,7 @@
       </p:sp>
       <p:sp>
         <p:nvSpPr>
-          <p:cNvPr id="60" name="Oval 59"/>
+          <p:cNvPr id="50" name="Oval 49"/>
           <p:cNvSpPr/>
           <p:nvPr/>
         </p:nvSpPr>
@@ -17379,42 +16819,7 @@
       </p:sp>
       <p:sp>
         <p:nvSpPr>
-          <p:cNvPr id="61" name="TextBox 60"/>
-          <p:cNvSpPr txBox="1"/>
-          <p:nvPr/>
-        </p:nvSpPr>
-        <p:spPr>
-          <a:xfrm>
-            <a:off x="9363456" y="1051560"/>
-            <a:ext cx="2478024" cy="402336"/>
-          </a:xfrm>
-          <a:prstGeom prst="rect">
-            <a:avLst/>
-          </a:prstGeom>
-          <a:noFill/>
-        </p:spPr>
-        <p:txBody>
-          <a:bodyPr wrap="square" lIns="36576" tIns="18288" rIns="36576" bIns="18288" anchor="ctr">
-            <a:spAutoFit/>
-          </a:bodyPr>
-          <a:lstStyle/>
-          <a:p>
-            <a:pPr algn="l"/>
-            <a:r>
-              <a:rPr sz="1000" b="1" i="0">
-                <a:solidFill>
-                  <a:srgbClr val="000000"/>
-                </a:solidFill>
-                <a:latin typeface="맑은 고딕"/>
-              </a:rPr>
-              <a:t/>
-            </a:r>
-          </a:p>
-        </p:txBody>
-      </p:sp>
-      <p:sp>
-        <p:nvSpPr>
-          <p:cNvPr id="62" name="TextBox 61"/>
+          <p:cNvPr id="51" name="TextBox 50"/>
           <p:cNvSpPr txBox="1"/>
           <p:nvPr/>
         </p:nvSpPr>
@@ -17449,7 +16854,7 @@
       </p:sp>
       <p:sp>
         <p:nvSpPr>
-          <p:cNvPr id="63" name="Rectangle 62"/>
+          <p:cNvPr id="52" name="Rectangle 51"/>
           <p:cNvSpPr/>
           <p:nvPr/>
         </p:nvSpPr>
@@ -17495,7 +16900,7 @@
       </p:sp>
       <p:sp>
         <p:nvSpPr>
-          <p:cNvPr id="64" name="Rectangle 63"/>
+          <p:cNvPr id="53" name="Rectangle 52"/>
           <p:cNvSpPr/>
           <p:nvPr/>
         </p:nvSpPr>
@@ -17539,7 +16944,7 @@
       </p:sp>
       <p:sp>
         <p:nvSpPr>
-          <p:cNvPr id="65" name="Oval 64"/>
+          <p:cNvPr id="54" name="Oval 53"/>
           <p:cNvSpPr/>
           <p:nvPr/>
         </p:nvSpPr>
@@ -17592,42 +16997,7 @@
       </p:sp>
       <p:sp>
         <p:nvSpPr>
-          <p:cNvPr id="66" name="TextBox 65"/>
-          <p:cNvSpPr txBox="1"/>
-          <p:nvPr/>
-        </p:nvSpPr>
-        <p:spPr>
-          <a:xfrm>
-            <a:off x="9363456" y="1527048"/>
-            <a:ext cx="2478024" cy="402336"/>
-          </a:xfrm>
-          <a:prstGeom prst="rect">
-            <a:avLst/>
-          </a:prstGeom>
-          <a:noFill/>
-        </p:spPr>
-        <p:txBody>
-          <a:bodyPr wrap="square" lIns="36576" tIns="18288" rIns="36576" bIns="18288" anchor="ctr">
-            <a:spAutoFit/>
-          </a:bodyPr>
-          <a:lstStyle/>
-          <a:p>
-            <a:pPr algn="l"/>
-            <a:r>
-              <a:rPr sz="1000" b="1" i="0">
-                <a:solidFill>
-                  <a:srgbClr val="000000"/>
-                </a:solidFill>
-                <a:latin typeface="맑은 고딕"/>
-              </a:rPr>
-              <a:t/>
-            </a:r>
-          </a:p>
-        </p:txBody>
-      </p:sp>
-      <p:sp>
-        <p:nvSpPr>
-          <p:cNvPr id="67" name="TextBox 66"/>
+          <p:cNvPr id="55" name="TextBox 54"/>
           <p:cNvSpPr txBox="1"/>
           <p:nvPr/>
         </p:nvSpPr>
@@ -17662,7 +17032,7 @@
       </p:sp>
       <p:sp>
         <p:nvSpPr>
-          <p:cNvPr id="68" name="Rectangle 67"/>
+          <p:cNvPr id="56" name="Rectangle 55"/>
           <p:cNvSpPr/>
           <p:nvPr/>
         </p:nvSpPr>
@@ -17708,7 +17078,7 @@
       </p:sp>
       <p:sp>
         <p:nvSpPr>
-          <p:cNvPr id="69" name="Rectangle 68"/>
+          <p:cNvPr id="57" name="Rectangle 56"/>
           <p:cNvSpPr/>
           <p:nvPr/>
         </p:nvSpPr>
@@ -17752,7 +17122,7 @@
       </p:sp>
       <p:sp>
         <p:nvSpPr>
-          <p:cNvPr id="70" name="Oval 69"/>
+          <p:cNvPr id="58" name="Oval 57"/>
           <p:cNvSpPr/>
           <p:nvPr/>
         </p:nvSpPr>
@@ -17805,42 +17175,7 @@
       </p:sp>
       <p:sp>
         <p:nvSpPr>
-          <p:cNvPr id="71" name="TextBox 70"/>
-          <p:cNvSpPr txBox="1"/>
-          <p:nvPr/>
-        </p:nvSpPr>
-        <p:spPr>
-          <a:xfrm>
-            <a:off x="9363456" y="2002536"/>
-            <a:ext cx="2478024" cy="402336"/>
-          </a:xfrm>
-          <a:prstGeom prst="rect">
-            <a:avLst/>
-          </a:prstGeom>
-          <a:noFill/>
-        </p:spPr>
-        <p:txBody>
-          <a:bodyPr wrap="square" lIns="36576" tIns="18288" rIns="36576" bIns="18288" anchor="ctr">
-            <a:spAutoFit/>
-          </a:bodyPr>
-          <a:lstStyle/>
-          <a:p>
-            <a:pPr algn="l"/>
-            <a:r>
-              <a:rPr sz="1000" b="1" i="0">
-                <a:solidFill>
-                  <a:srgbClr val="000000"/>
-                </a:solidFill>
-                <a:latin typeface="맑은 고딕"/>
-              </a:rPr>
-              <a:t/>
-            </a:r>
-          </a:p>
-        </p:txBody>
-      </p:sp>
-      <p:sp>
-        <p:nvSpPr>
-          <p:cNvPr id="72" name="TextBox 71"/>
+          <p:cNvPr id="59" name="TextBox 58"/>
           <p:cNvSpPr txBox="1"/>
           <p:nvPr/>
         </p:nvSpPr>
@@ -17875,7 +17210,7 @@
       </p:sp>
       <p:sp>
         <p:nvSpPr>
-          <p:cNvPr id="73" name="Rectangle 72"/>
+          <p:cNvPr id="60" name="Rectangle 59"/>
           <p:cNvSpPr/>
           <p:nvPr/>
         </p:nvSpPr>
@@ -17921,7 +17256,7 @@
       </p:sp>
       <p:sp>
         <p:nvSpPr>
-          <p:cNvPr id="74" name="Rectangle 73"/>
+          <p:cNvPr id="61" name="Rectangle 60"/>
           <p:cNvSpPr/>
           <p:nvPr/>
         </p:nvSpPr>
@@ -17965,7 +17300,7 @@
       </p:sp>
       <p:sp>
         <p:nvSpPr>
-          <p:cNvPr id="75" name="Oval 74"/>
+          <p:cNvPr id="62" name="Oval 61"/>
           <p:cNvSpPr/>
           <p:nvPr/>
         </p:nvSpPr>
@@ -18018,42 +17353,7 @@
       </p:sp>
       <p:sp>
         <p:nvSpPr>
-          <p:cNvPr id="76" name="TextBox 75"/>
-          <p:cNvSpPr txBox="1"/>
-          <p:nvPr/>
-        </p:nvSpPr>
-        <p:spPr>
-          <a:xfrm>
-            <a:off x="9363456" y="2478024"/>
-            <a:ext cx="2478024" cy="402336"/>
-          </a:xfrm>
-          <a:prstGeom prst="rect">
-            <a:avLst/>
-          </a:prstGeom>
-          <a:noFill/>
-        </p:spPr>
-        <p:txBody>
-          <a:bodyPr wrap="square" lIns="36576" tIns="18288" rIns="36576" bIns="18288" anchor="ctr">
-            <a:spAutoFit/>
-          </a:bodyPr>
-          <a:lstStyle/>
-          <a:p>
-            <a:pPr algn="l"/>
-            <a:r>
-              <a:rPr sz="1000" b="1" i="0">
-                <a:solidFill>
-                  <a:srgbClr val="000000"/>
-                </a:solidFill>
-                <a:latin typeface="맑은 고딕"/>
-              </a:rPr>
-              <a:t/>
-            </a:r>
-          </a:p>
-        </p:txBody>
-      </p:sp>
-      <p:sp>
-        <p:nvSpPr>
-          <p:cNvPr id="77" name="TextBox 76"/>
+          <p:cNvPr id="63" name="TextBox 62"/>
           <p:cNvSpPr txBox="1"/>
           <p:nvPr/>
         </p:nvSpPr>
@@ -18088,7 +17388,7 @@
       </p:sp>
       <p:sp>
         <p:nvSpPr>
-          <p:cNvPr id="78" name="Rectangle 77"/>
+          <p:cNvPr id="64" name="Rectangle 63"/>
           <p:cNvSpPr/>
           <p:nvPr/>
         </p:nvSpPr>
@@ -18134,7 +17434,7 @@
       </p:sp>
       <p:sp>
         <p:nvSpPr>
-          <p:cNvPr id="79" name="Rectangle 78"/>
+          <p:cNvPr id="65" name="Rectangle 64"/>
           <p:cNvSpPr/>
           <p:nvPr/>
         </p:nvSpPr>
@@ -18178,7 +17478,7 @@
       </p:sp>
       <p:sp>
         <p:nvSpPr>
-          <p:cNvPr id="80" name="Oval 79"/>
+          <p:cNvPr id="66" name="Oval 65"/>
           <p:cNvSpPr/>
           <p:nvPr/>
         </p:nvSpPr>
@@ -18231,42 +17531,7 @@
       </p:sp>
       <p:sp>
         <p:nvSpPr>
-          <p:cNvPr id="81" name="TextBox 80"/>
-          <p:cNvSpPr txBox="1"/>
-          <p:nvPr/>
-        </p:nvSpPr>
-        <p:spPr>
-          <a:xfrm>
-            <a:off x="9363456" y="2953512"/>
-            <a:ext cx="2478024" cy="402336"/>
-          </a:xfrm>
-          <a:prstGeom prst="rect">
-            <a:avLst/>
-          </a:prstGeom>
-          <a:noFill/>
-        </p:spPr>
-        <p:txBody>
-          <a:bodyPr wrap="square" lIns="36576" tIns="18288" rIns="36576" bIns="18288" anchor="ctr">
-            <a:spAutoFit/>
-          </a:bodyPr>
-          <a:lstStyle/>
-          <a:p>
-            <a:pPr algn="l"/>
-            <a:r>
-              <a:rPr sz="1000" b="1" i="0">
-                <a:solidFill>
-                  <a:srgbClr val="000000"/>
-                </a:solidFill>
-                <a:latin typeface="맑은 고딕"/>
-              </a:rPr>
-              <a:t/>
-            </a:r>
-          </a:p>
-        </p:txBody>
-      </p:sp>
-      <p:sp>
-        <p:nvSpPr>
-          <p:cNvPr id="82" name="TextBox 81"/>
+          <p:cNvPr id="67" name="TextBox 66"/>
           <p:cNvSpPr txBox="1"/>
           <p:nvPr/>
         </p:nvSpPr>
@@ -18301,7 +17566,7 @@
       </p:sp>
       <p:sp>
         <p:nvSpPr>
-          <p:cNvPr id="83" name="Rectangle 82"/>
+          <p:cNvPr id="68" name="Rectangle 67"/>
           <p:cNvSpPr/>
           <p:nvPr/>
         </p:nvSpPr>
@@ -18347,7 +17612,7 @@
       </p:sp>
       <p:sp>
         <p:nvSpPr>
-          <p:cNvPr id="84" name="Rectangle 83"/>
+          <p:cNvPr id="69" name="Rectangle 68"/>
           <p:cNvSpPr/>
           <p:nvPr/>
         </p:nvSpPr>
@@ -18391,7 +17656,7 @@
       </p:sp>
       <p:sp>
         <p:nvSpPr>
-          <p:cNvPr id="85" name="Oval 84"/>
+          <p:cNvPr id="70" name="Oval 69"/>
           <p:cNvSpPr/>
           <p:nvPr/>
         </p:nvSpPr>
@@ -18444,42 +17709,7 @@
       </p:sp>
       <p:sp>
         <p:nvSpPr>
-          <p:cNvPr id="86" name="TextBox 85"/>
-          <p:cNvSpPr txBox="1"/>
-          <p:nvPr/>
-        </p:nvSpPr>
-        <p:spPr>
-          <a:xfrm>
-            <a:off x="9363456" y="3429000"/>
-            <a:ext cx="2478024" cy="402336"/>
-          </a:xfrm>
-          <a:prstGeom prst="rect">
-            <a:avLst/>
-          </a:prstGeom>
-          <a:noFill/>
-        </p:spPr>
-        <p:txBody>
-          <a:bodyPr wrap="square" lIns="36576" tIns="18288" rIns="36576" bIns="18288" anchor="ctr">
-            <a:spAutoFit/>
-          </a:bodyPr>
-          <a:lstStyle/>
-          <a:p>
-            <a:pPr algn="l"/>
-            <a:r>
-              <a:rPr sz="1000" b="1" i="0">
-                <a:solidFill>
-                  <a:srgbClr val="000000"/>
-                </a:solidFill>
-                <a:latin typeface="맑은 고딕"/>
-              </a:rPr>
-              <a:t/>
-            </a:r>
-          </a:p>
-        </p:txBody>
-      </p:sp>
-      <p:sp>
-        <p:nvSpPr>
-          <p:cNvPr id="87" name="TextBox 86"/>
+          <p:cNvPr id="71" name="TextBox 70"/>
           <p:cNvSpPr txBox="1"/>
           <p:nvPr/>
         </p:nvSpPr>
@@ -18514,7 +17744,7 @@
       </p:sp>
       <p:sp>
         <p:nvSpPr>
-          <p:cNvPr id="88" name="Rectangle 87"/>
+          <p:cNvPr id="72" name="Rectangle 71"/>
           <p:cNvSpPr/>
           <p:nvPr/>
         </p:nvSpPr>
@@ -18560,7 +17790,7 @@
       </p:sp>
       <p:sp>
         <p:nvSpPr>
-          <p:cNvPr id="89" name="Rectangle 88"/>
+          <p:cNvPr id="73" name="Rectangle 72"/>
           <p:cNvSpPr/>
           <p:nvPr/>
         </p:nvSpPr>
@@ -18604,7 +17834,7 @@
       </p:sp>
       <p:sp>
         <p:nvSpPr>
-          <p:cNvPr id="90" name="Oval 89"/>
+          <p:cNvPr id="74" name="Oval 73"/>
           <p:cNvSpPr/>
           <p:nvPr/>
         </p:nvSpPr>
@@ -18657,42 +17887,7 @@
       </p:sp>
       <p:sp>
         <p:nvSpPr>
-          <p:cNvPr id="91" name="TextBox 90"/>
-          <p:cNvSpPr txBox="1"/>
-          <p:nvPr/>
-        </p:nvSpPr>
-        <p:spPr>
-          <a:xfrm>
-            <a:off x="9363456" y="3904487"/>
-            <a:ext cx="2478024" cy="402336"/>
-          </a:xfrm>
-          <a:prstGeom prst="rect">
-            <a:avLst/>
-          </a:prstGeom>
-          <a:noFill/>
-        </p:spPr>
-        <p:txBody>
-          <a:bodyPr wrap="square" lIns="36576" tIns="18288" rIns="36576" bIns="18288" anchor="ctr">
-            <a:spAutoFit/>
-          </a:bodyPr>
-          <a:lstStyle/>
-          <a:p>
-            <a:pPr algn="l"/>
-            <a:r>
-              <a:rPr sz="1000" b="1" i="0">
-                <a:solidFill>
-                  <a:srgbClr val="000000"/>
-                </a:solidFill>
-                <a:latin typeface="맑은 고딕"/>
-              </a:rPr>
-              <a:t/>
-            </a:r>
-          </a:p>
-        </p:txBody>
-      </p:sp>
-      <p:sp>
-        <p:nvSpPr>
-          <p:cNvPr id="92" name="TextBox 91"/>
+          <p:cNvPr id="75" name="TextBox 74"/>
           <p:cNvSpPr txBox="1"/>
           <p:nvPr/>
         </p:nvSpPr>
@@ -18727,7 +17922,7 @@
       </p:sp>
       <p:sp>
         <p:nvSpPr>
-          <p:cNvPr id="93" name="Rectangle 92"/>
+          <p:cNvPr id="76" name="Rectangle 75"/>
           <p:cNvSpPr/>
           <p:nvPr/>
         </p:nvSpPr>
@@ -18773,7 +17968,7 @@
       </p:sp>
       <p:sp>
         <p:nvSpPr>
-          <p:cNvPr id="94" name="Rectangle 93"/>
+          <p:cNvPr id="77" name="Rectangle 76"/>
           <p:cNvSpPr/>
           <p:nvPr/>
         </p:nvSpPr>
@@ -18817,7 +18012,7 @@
       </p:sp>
       <p:sp>
         <p:nvSpPr>
-          <p:cNvPr id="95" name="Oval 94"/>
+          <p:cNvPr id="78" name="Oval 77"/>
           <p:cNvSpPr/>
           <p:nvPr/>
         </p:nvSpPr>
@@ -18870,42 +18065,7 @@
       </p:sp>
       <p:sp>
         <p:nvSpPr>
-          <p:cNvPr id="96" name="TextBox 95"/>
-          <p:cNvSpPr txBox="1"/>
-          <p:nvPr/>
-        </p:nvSpPr>
-        <p:spPr>
-          <a:xfrm>
-            <a:off x="1234440" y="5029200"/>
-            <a:ext cx="2697479" cy="502920"/>
-          </a:xfrm>
-          <a:prstGeom prst="rect">
-            <a:avLst/>
-          </a:prstGeom>
-          <a:noFill/>
-        </p:spPr>
-        <p:txBody>
-          <a:bodyPr wrap="square" lIns="36576" tIns="18288" rIns="36576" bIns="18288" anchor="ctr">
-            <a:spAutoFit/>
-          </a:bodyPr>
-          <a:lstStyle/>
-          <a:p>
-            <a:pPr algn="l"/>
-            <a:r>
-              <a:rPr sz="1000" b="1" i="0">
-                <a:solidFill>
-                  <a:srgbClr val="000000"/>
-                </a:solidFill>
-                <a:latin typeface="맑은 고딕"/>
-              </a:rPr>
-              <a:t/>
-            </a:r>
-          </a:p>
-        </p:txBody>
-      </p:sp>
-      <p:sp>
-        <p:nvSpPr>
-          <p:cNvPr id="97" name="TextBox 96"/>
+          <p:cNvPr id="79" name="TextBox 78"/>
           <p:cNvSpPr txBox="1"/>
           <p:nvPr/>
         </p:nvSpPr>
@@ -18940,7 +18100,7 @@
       </p:sp>
       <p:sp>
         <p:nvSpPr>
-          <p:cNvPr id="98" name="Rectangle 97"/>
+          <p:cNvPr id="80" name="Rectangle 79"/>
           <p:cNvSpPr/>
           <p:nvPr/>
         </p:nvSpPr>
@@ -18986,7 +18146,7 @@
       </p:sp>
       <p:sp>
         <p:nvSpPr>
-          <p:cNvPr id="99" name="Rectangle 98"/>
+          <p:cNvPr id="81" name="Rectangle 80"/>
           <p:cNvSpPr/>
           <p:nvPr/>
         </p:nvSpPr>
@@ -19030,7 +18190,7 @@
       </p:sp>
       <p:sp>
         <p:nvSpPr>
-          <p:cNvPr id="100" name="Oval 99"/>
+          <p:cNvPr id="82" name="Oval 81"/>
           <p:cNvSpPr/>
           <p:nvPr/>
         </p:nvSpPr>
@@ -19083,42 +18243,7 @@
       </p:sp>
       <p:sp>
         <p:nvSpPr>
-          <p:cNvPr id="101" name="TextBox 100"/>
-          <p:cNvSpPr txBox="1"/>
-          <p:nvPr/>
-        </p:nvSpPr>
-        <p:spPr>
-          <a:xfrm>
-            <a:off x="5166359" y="5029200"/>
-            <a:ext cx="2697479" cy="502920"/>
-          </a:xfrm>
-          <a:prstGeom prst="rect">
-            <a:avLst/>
-          </a:prstGeom>
-          <a:noFill/>
-        </p:spPr>
-        <p:txBody>
-          <a:bodyPr wrap="square" lIns="36576" tIns="18288" rIns="36576" bIns="18288" anchor="ctr">
-            <a:spAutoFit/>
-          </a:bodyPr>
-          <a:lstStyle/>
-          <a:p>
-            <a:pPr algn="l"/>
-            <a:r>
-              <a:rPr sz="1000" b="1" i="0">
-                <a:solidFill>
-                  <a:srgbClr val="000000"/>
-                </a:solidFill>
-                <a:latin typeface="맑은 고딕"/>
-              </a:rPr>
-              <a:t/>
-            </a:r>
-          </a:p>
-        </p:txBody>
-      </p:sp>
-      <p:sp>
-        <p:nvSpPr>
-          <p:cNvPr id="102" name="TextBox 101"/>
+          <p:cNvPr id="83" name="TextBox 82"/>
           <p:cNvSpPr txBox="1"/>
           <p:nvPr/>
         </p:nvSpPr>
@@ -19153,7 +18278,7 @@
       </p:sp>
       <p:sp>
         <p:nvSpPr>
-          <p:cNvPr id="103" name="Rectangle 102"/>
+          <p:cNvPr id="84" name="Rectangle 83"/>
           <p:cNvSpPr/>
           <p:nvPr/>
         </p:nvSpPr>
@@ -19199,7 +18324,7 @@
       </p:sp>
       <p:sp>
         <p:nvSpPr>
-          <p:cNvPr id="104" name="Rectangle 103"/>
+          <p:cNvPr id="85" name="Rectangle 84"/>
           <p:cNvSpPr/>
           <p:nvPr/>
         </p:nvSpPr>
@@ -19243,7 +18368,7 @@
       </p:sp>
       <p:sp>
         <p:nvSpPr>
-          <p:cNvPr id="105" name="Oval 104"/>
+          <p:cNvPr id="86" name="Oval 85"/>
           <p:cNvSpPr/>
           <p:nvPr/>
         </p:nvSpPr>
@@ -19296,42 +18421,7 @@
       </p:sp>
       <p:sp>
         <p:nvSpPr>
-          <p:cNvPr id="106" name="TextBox 105"/>
-          <p:cNvSpPr txBox="1"/>
-          <p:nvPr/>
-        </p:nvSpPr>
-        <p:spPr>
-          <a:xfrm>
-            <a:off x="9098280" y="5029200"/>
-            <a:ext cx="2697479" cy="502920"/>
-          </a:xfrm>
-          <a:prstGeom prst="rect">
-            <a:avLst/>
-          </a:prstGeom>
-          <a:noFill/>
-        </p:spPr>
-        <p:txBody>
-          <a:bodyPr wrap="square" lIns="36576" tIns="18288" rIns="36576" bIns="18288" anchor="ctr">
-            <a:spAutoFit/>
-          </a:bodyPr>
-          <a:lstStyle/>
-          <a:p>
-            <a:pPr algn="l"/>
-            <a:r>
-              <a:rPr sz="1000" b="1" i="0">
-                <a:solidFill>
-                  <a:srgbClr val="000000"/>
-                </a:solidFill>
-                <a:latin typeface="맑은 고딕"/>
-              </a:rPr>
-              <a:t/>
-            </a:r>
-          </a:p>
-        </p:txBody>
-      </p:sp>
-      <p:sp>
-        <p:nvSpPr>
-          <p:cNvPr id="107" name="TextBox 106"/>
+          <p:cNvPr id="87" name="TextBox 86"/>
           <p:cNvSpPr txBox="1"/>
           <p:nvPr/>
         </p:nvSpPr>
@@ -19366,7 +18456,7 @@
       </p:sp>
       <p:sp>
         <p:nvSpPr>
-          <p:cNvPr id="108" name="Rectangle 107"/>
+          <p:cNvPr id="88" name="Rectangle 87"/>
           <p:cNvSpPr/>
           <p:nvPr/>
         </p:nvSpPr>
@@ -19412,7 +18502,7 @@
       </p:sp>
       <p:sp>
         <p:nvSpPr>
-          <p:cNvPr id="109" name="Rectangle 108"/>
+          <p:cNvPr id="89" name="Rectangle 88"/>
           <p:cNvSpPr/>
           <p:nvPr/>
         </p:nvSpPr>
@@ -19456,7 +18546,7 @@
       </p:sp>
       <p:sp>
         <p:nvSpPr>
-          <p:cNvPr id="110" name="Oval 109"/>
+          <p:cNvPr id="90" name="Oval 89"/>
           <p:cNvSpPr/>
           <p:nvPr/>
         </p:nvSpPr>
@@ -19509,42 +18599,7 @@
       </p:sp>
       <p:sp>
         <p:nvSpPr>
-          <p:cNvPr id="111" name="TextBox 110"/>
-          <p:cNvSpPr txBox="1"/>
-          <p:nvPr/>
-        </p:nvSpPr>
-        <p:spPr>
-          <a:xfrm>
-            <a:off x="1234440" y="5669280"/>
-            <a:ext cx="2697479" cy="502920"/>
-          </a:xfrm>
-          <a:prstGeom prst="rect">
-            <a:avLst/>
-          </a:prstGeom>
-          <a:noFill/>
-        </p:spPr>
-        <p:txBody>
-          <a:bodyPr wrap="square" lIns="36576" tIns="18288" rIns="36576" bIns="18288" anchor="ctr">
-            <a:spAutoFit/>
-          </a:bodyPr>
-          <a:lstStyle/>
-          <a:p>
-            <a:pPr algn="l"/>
-            <a:r>
-              <a:rPr sz="1000" b="1" i="0">
-                <a:solidFill>
-                  <a:srgbClr val="000000"/>
-                </a:solidFill>
-                <a:latin typeface="맑은 고딕"/>
-              </a:rPr>
-              <a:t/>
-            </a:r>
-          </a:p>
-        </p:txBody>
-      </p:sp>
-      <p:sp>
-        <p:nvSpPr>
-          <p:cNvPr id="112" name="TextBox 111"/>
+          <p:cNvPr id="91" name="TextBox 90"/>
           <p:cNvSpPr txBox="1"/>
           <p:nvPr/>
         </p:nvSpPr>
@@ -19579,7 +18634,7 @@
       </p:sp>
       <p:sp>
         <p:nvSpPr>
-          <p:cNvPr id="113" name="Rectangle 112"/>
+          <p:cNvPr id="92" name="Rectangle 91"/>
           <p:cNvSpPr/>
           <p:nvPr/>
         </p:nvSpPr>
@@ -19625,7 +18680,7 @@
       </p:sp>
       <p:sp>
         <p:nvSpPr>
-          <p:cNvPr id="114" name="Rectangle 113"/>
+          <p:cNvPr id="93" name="Rectangle 92"/>
           <p:cNvSpPr/>
           <p:nvPr/>
         </p:nvSpPr>
@@ -19669,7 +18724,7 @@
       </p:sp>
       <p:sp>
         <p:nvSpPr>
-          <p:cNvPr id="115" name="Oval 114"/>
+          <p:cNvPr id="94" name="Oval 93"/>
           <p:cNvSpPr/>
           <p:nvPr/>
         </p:nvSpPr>
@@ -19722,42 +18777,7 @@
       </p:sp>
       <p:sp>
         <p:nvSpPr>
-          <p:cNvPr id="116" name="TextBox 115"/>
-          <p:cNvSpPr txBox="1"/>
-          <p:nvPr/>
-        </p:nvSpPr>
-        <p:spPr>
-          <a:xfrm>
-            <a:off x="5166359" y="5669280"/>
-            <a:ext cx="2697479" cy="502920"/>
-          </a:xfrm>
-          <a:prstGeom prst="rect">
-            <a:avLst/>
-          </a:prstGeom>
-          <a:noFill/>
-        </p:spPr>
-        <p:txBody>
-          <a:bodyPr wrap="square" lIns="36576" tIns="18288" rIns="36576" bIns="18288" anchor="ctr">
-            <a:spAutoFit/>
-          </a:bodyPr>
-          <a:lstStyle/>
-          <a:p>
-            <a:pPr algn="l"/>
-            <a:r>
-              <a:rPr sz="1000" b="1" i="0">
-                <a:solidFill>
-                  <a:srgbClr val="000000"/>
-                </a:solidFill>
-                <a:latin typeface="맑은 고딕"/>
-              </a:rPr>
-              <a:t/>
-            </a:r>
-          </a:p>
-        </p:txBody>
-      </p:sp>
-      <p:sp>
-        <p:nvSpPr>
-          <p:cNvPr id="117" name="TextBox 116"/>
+          <p:cNvPr id="95" name="TextBox 94"/>
           <p:cNvSpPr txBox="1"/>
           <p:nvPr/>
         </p:nvSpPr>
@@ -19792,7 +18812,7 @@
       </p:sp>
       <p:sp>
         <p:nvSpPr>
-          <p:cNvPr id="118" name="Rectangle 117"/>
+          <p:cNvPr id="96" name="Rectangle 95"/>
           <p:cNvSpPr/>
           <p:nvPr/>
         </p:nvSpPr>
@@ -19838,7 +18858,7 @@
       </p:sp>
       <p:sp>
         <p:nvSpPr>
-          <p:cNvPr id="119" name="Rectangle 118"/>
+          <p:cNvPr id="97" name="Rectangle 96"/>
           <p:cNvSpPr/>
           <p:nvPr/>
         </p:nvSpPr>
@@ -19882,7 +18902,7 @@
       </p:sp>
       <p:sp>
         <p:nvSpPr>
-          <p:cNvPr id="120" name="Oval 119"/>
+          <p:cNvPr id="98" name="Oval 97"/>
           <p:cNvSpPr/>
           <p:nvPr/>
         </p:nvSpPr>
@@ -19935,42 +18955,7 @@
       </p:sp>
       <p:sp>
         <p:nvSpPr>
-          <p:cNvPr id="121" name="TextBox 120"/>
-          <p:cNvSpPr txBox="1"/>
-          <p:nvPr/>
-        </p:nvSpPr>
-        <p:spPr>
-          <a:xfrm>
-            <a:off x="9098280" y="5669280"/>
-            <a:ext cx="2697479" cy="502920"/>
-          </a:xfrm>
-          <a:prstGeom prst="rect">
-            <a:avLst/>
-          </a:prstGeom>
-          <a:noFill/>
-        </p:spPr>
-        <p:txBody>
-          <a:bodyPr wrap="square" lIns="36576" tIns="18288" rIns="36576" bIns="18288" anchor="ctr">
-            <a:spAutoFit/>
-          </a:bodyPr>
-          <a:lstStyle/>
-          <a:p>
-            <a:pPr algn="l"/>
-            <a:r>
-              <a:rPr sz="1000" b="1" i="0">
-                <a:solidFill>
-                  <a:srgbClr val="000000"/>
-                </a:solidFill>
-                <a:latin typeface="맑은 고딕"/>
-              </a:rPr>
-              <a:t/>
-            </a:r>
-          </a:p>
-        </p:txBody>
-      </p:sp>
-      <p:sp>
-        <p:nvSpPr>
-          <p:cNvPr id="122" name="TextBox 121"/>
+          <p:cNvPr id="99" name="TextBox 98"/>
           <p:cNvSpPr txBox="1"/>
           <p:nvPr/>
         </p:nvSpPr>
@@ -20005,7 +18990,7 @@
       </p:sp>
       <p:sp>
         <p:nvSpPr>
-          <p:cNvPr id="123" name="TextBox 122"/>
+          <p:cNvPr id="100" name="TextBox 99"/>
           <p:cNvSpPr txBox="1"/>
           <p:nvPr/>
         </p:nvSpPr>

--- a/doc-mk/Requirements/requirements-overview.pptx
+++ b/doc-mk/Requirements/requirements-overview.pptx
@@ -23,7 +23,6 @@
     <p:sldId id="271" r:id="rId22"/>
     <p:sldId id="272" r:id="rId23"/>
     <p:sldId id="273" r:id="rId24"/>
-    <p:sldId id="274" r:id="rId25"/>
   </p:sldIdLst>
   <p:sldSz cx="12191695" cy="6858000" type="screen4x3"/>
   <p:notesSz cx="6858000" cy="9144000"/>
@@ -6408,7 +6407,7 @@
         </p:nvGraphicFramePr>
         <p:xfrm>
           <a:off x="128016" y="731520"/>
-          <a:ext cx="11795760" cy="3657600"/>
+          <a:ext cx="11795760" cy="4206240"/>
         </p:xfrm>
         <a:graphic>
           <a:graphicData uri="http://schemas.openxmlformats.org/drawingml/2006/table">
@@ -7422,6 +7421,149 @@
                   </a:tcPr>
                 </a:tc>
               </a:tr>
+              <a:tr h="548640">
+                <a:tc>
+                  <a:txBody>
+                    <a:bodyPr wrap="square"/>
+                    <a:lstStyle/>
+                    <a:p>
+                      <a:pPr algn="ctr"/>
+                      <a:r>
+                        <a:rPr sz="1100" b="0">
+                          <a:solidFill>
+                            <a:srgbClr val="000000"/>
+                          </a:solidFill>
+                          <a:latin typeface="맑은 고딕"/>
+                        </a:rPr>
+                        <a:t>RQ-SYS-07</a:t>
+                      </a:r>
+                    </a:p>
+                  </a:txBody>
+                  <a:tcPr marL="45720" marR="45720" marT="22860" marB="22860" anchor="ctr">
+                    <a:lnL w="9525" cap="flat" cmpd="sng" algn="ctr">
+                      <a:solidFill>
+                        <a:srgbClr val="000000"/>
+                      </a:solidFill>
+                      <a:prstDash val="solid"/>
+                    </a:lnL>
+                    <a:lnR w="9525" cap="flat" cmpd="sng" algn="ctr">
+                      <a:solidFill>
+                        <a:srgbClr val="000000"/>
+                      </a:solidFill>
+                      <a:prstDash val="solid"/>
+                    </a:lnR>
+                    <a:lnT w="9525" cap="flat" cmpd="sng" algn="ctr">
+                      <a:solidFill>
+                        <a:srgbClr val="000000"/>
+                      </a:solidFill>
+                      <a:prstDash val="solid"/>
+                    </a:lnT>
+                    <a:lnB w="9525" cap="flat" cmpd="sng" algn="ctr">
+                      <a:solidFill>
+                        <a:srgbClr val="000000"/>
+                      </a:solidFill>
+                      <a:prstDash val="solid"/>
+                    </a:lnB>
+                    <a:solidFill>
+                      <a:srgbClr val="FFFFFF"/>
+                    </a:solidFill>
+                  </a:tcPr>
+                </a:tc>
+                <a:tc>
+                  <a:txBody>
+                    <a:bodyPr wrap="square"/>
+                    <a:lstStyle/>
+                    <a:p>
+                      <a:pPr algn="l"/>
+                      <a:r>
+                        <a:rPr sz="1100" b="0">
+                          <a:solidFill>
+                            <a:srgbClr val="000000"/>
+                          </a:solidFill>
+                          <a:latin typeface="맑은 고딕"/>
+                        </a:rPr>
+                        <a:t>메모리 배치와 연산 실행 위치·시점·순서를 서빙 중 동적으로 정한다</a:t>
+                      </a:r>
+                    </a:p>
+                  </a:txBody>
+                  <a:tcPr marL="45720" marR="45720" marT="22860" marB="22860" anchor="ctr">
+                    <a:lnL w="9525" cap="flat" cmpd="sng" algn="ctr">
+                      <a:solidFill>
+                        <a:srgbClr val="000000"/>
+                      </a:solidFill>
+                      <a:prstDash val="solid"/>
+                    </a:lnL>
+                    <a:lnR w="9525" cap="flat" cmpd="sng" algn="ctr">
+                      <a:solidFill>
+                        <a:srgbClr val="000000"/>
+                      </a:solidFill>
+                      <a:prstDash val="solid"/>
+                    </a:lnR>
+                    <a:lnT w="9525" cap="flat" cmpd="sng" algn="ctr">
+                      <a:solidFill>
+                        <a:srgbClr val="000000"/>
+                      </a:solidFill>
+                      <a:prstDash val="solid"/>
+                    </a:lnT>
+                    <a:lnB w="9525" cap="flat" cmpd="sng" algn="ctr">
+                      <a:solidFill>
+                        <a:srgbClr val="000000"/>
+                      </a:solidFill>
+                      <a:prstDash val="solid"/>
+                    </a:lnB>
+                    <a:solidFill>
+                      <a:srgbClr val="FFFFFF"/>
+                    </a:solidFill>
+                  </a:tcPr>
+                </a:tc>
+                <a:tc>
+                  <a:txBody>
+                    <a:bodyPr wrap="square"/>
+                    <a:lstStyle/>
+                    <a:p>
+                      <a:pPr algn="l"/>
+                      <a:r>
+                        <a:rPr sz="1100" b="0">
+                          <a:solidFill>
+                            <a:srgbClr val="000000"/>
+                          </a:solidFill>
+                          <a:latin typeface="맑은 고딕"/>
+                        </a:rPr>
+                        <a:t>FR-26</a:t>
+                      </a:r>
+                    </a:p>
+                  </a:txBody>
+                  <a:tcPr marL="45720" marR="45720" marT="22860" marB="22860" anchor="ctr">
+                    <a:lnL w="9525" cap="flat" cmpd="sng" algn="ctr">
+                      <a:solidFill>
+                        <a:srgbClr val="000000"/>
+                      </a:solidFill>
+                      <a:prstDash val="solid"/>
+                    </a:lnL>
+                    <a:lnR w="9525" cap="flat" cmpd="sng" algn="ctr">
+                      <a:solidFill>
+                        <a:srgbClr val="000000"/>
+                      </a:solidFill>
+                      <a:prstDash val="solid"/>
+                    </a:lnR>
+                    <a:lnT w="9525" cap="flat" cmpd="sng" algn="ctr">
+                      <a:solidFill>
+                        <a:srgbClr val="000000"/>
+                      </a:solidFill>
+                      <a:prstDash val="solid"/>
+                    </a:lnT>
+                    <a:lnB w="9525" cap="flat" cmpd="sng" algn="ctr">
+                      <a:solidFill>
+                        <a:srgbClr val="000000"/>
+                      </a:solidFill>
+                      <a:prstDash val="solid"/>
+                    </a:lnB>
+                    <a:solidFill>
+                      <a:srgbClr val="FFFFFF"/>
+                    </a:solidFill>
+                  </a:tcPr>
+                </a:tc>
+              </a:tr>
             </a:tbl>
           </a:graphicData>
         </a:graphic>
@@ -9558,7 +9700,7 @@
                 </a:solidFill>
                 <a:latin typeface="맑은 고딕"/>
               </a:rPr>
-              <a:t>새 tier·정책·객체 추가 용이성</a:t>
+              <a:t>새 tier·정책·객체 추가 시 토큰 비용·공수·변경 모듈 수</a:t>
             </a:r>
           </a:p>
         </p:txBody>
@@ -13359,7 +13501,7 @@
                 </a:solidFill>
                 <a:latin typeface="맑은 고딕"/>
               </a:rPr>
-              <a:t>요구사항 분석 – 품질 속성 유틸리티 트리 [1/3]</a:t>
+              <a:t>요구사항 분석 – 품질 속성 유틸리티 트리 [1/2]</a:t>
             </a:r>
           </a:p>
         </p:txBody>
@@ -13409,7 +13551,7 @@
         </p:nvGraphicFramePr>
         <p:xfrm>
           <a:off x="265176" y="731520"/>
-          <a:ext cx="10789920" cy="5833872"/>
+          <a:ext cx="11475720" cy="5623560"/>
         </p:xfrm>
         <a:graphic>
           <a:graphicData uri="http://schemas.openxmlformats.org/drawingml/2006/table">
@@ -13418,14 +13560,16 @@
                 <a:tableStyleId>{5C22544A-7EE6-4342-B048-85BDC9FD1C3A}</a:tableStyleId>
               </a:tblPr>
               <a:tblGrid>
+                <a:gridCol w="685800"/>
                 <a:gridCol w="1188720"/>
-                <a:gridCol w="1645920"/>
-                <a:gridCol w="6035040"/>
-                <a:gridCol w="640080"/>
-                <a:gridCol w="640080"/>
-                <a:gridCol w="640080"/>
+                <a:gridCol w="1325880"/>
+                <a:gridCol w="5852160"/>
+                <a:gridCol w="594360"/>
+                <a:gridCol w="594360"/>
+                <a:gridCol w="685800"/>
+                <a:gridCol w="548640"/>
               </a:tblGrid>
-              <a:tr h="347472">
+              <a:tr h="411480">
                 <a:tc>
                   <a:txBody>
                     <a:bodyPr wrap="square"/>
@@ -13439,7 +13583,7 @@
                           </a:solidFill>
                           <a:latin typeface="맑은 고딕"/>
                         </a:rPr>
-                        <a:t>Quality Attribute</a:t>
+                        <a:t>번호</a:t>
                       </a:r>
                     </a:p>
                   </a:txBody>
@@ -13486,7 +13630,54 @@
                           </a:solidFill>
                           <a:latin typeface="맑은 고딕"/>
                         </a:rPr>
-                        <a:t>Attribute Refinement</a:t>
+                        <a:t>QA</a:t>
+                      </a:r>
+                    </a:p>
+                  </a:txBody>
+                  <a:tcPr marL="45720" marR="45720" marT="22860" marB="22860" anchor="ctr">
+                    <a:lnL w="9525" cap="flat" cmpd="sng" algn="ctr">
+                      <a:solidFill>
+                        <a:srgbClr val="000000"/>
+                      </a:solidFill>
+                      <a:prstDash val="solid"/>
+                    </a:lnL>
+                    <a:lnR w="9525" cap="flat" cmpd="sng" algn="ctr">
+                      <a:solidFill>
+                        <a:srgbClr val="000000"/>
+                      </a:solidFill>
+                      <a:prstDash val="solid"/>
+                    </a:lnR>
+                    <a:lnT w="9525" cap="flat" cmpd="sng" algn="ctr">
+                      <a:solidFill>
+                        <a:srgbClr val="000000"/>
+                      </a:solidFill>
+                      <a:prstDash val="solid"/>
+                    </a:lnT>
+                    <a:lnB w="9525" cap="flat" cmpd="sng" algn="ctr">
+                      <a:solidFill>
+                        <a:srgbClr val="000000"/>
+                      </a:solidFill>
+                      <a:prstDash val="solid"/>
+                    </a:lnB>
+                    <a:solidFill>
+                      <a:srgbClr val="833C0B"/>
+                    </a:solidFill>
+                  </a:tcPr>
+                </a:tc>
+                <a:tc>
+                  <a:txBody>
+                    <a:bodyPr wrap="square"/>
+                    <a:lstStyle/>
+                    <a:p>
+                      <a:pPr algn="ctr"/>
+                      <a:r>
+                        <a:rPr sz="1100" b="1">
+                          <a:solidFill>
+                            <a:srgbClr val="FFFFFF"/>
+                          </a:solidFill>
+                          <a:latin typeface="맑은 고딕"/>
+                        </a:rPr>
+                        <a:t>Refinement</a:t>
                       </a:r>
                     </a:p>
                   </a:txBody>
@@ -13674,7 +13865,54 @@
                           </a:solidFill>
                           <a:latin typeface="맑은 고딕"/>
                         </a:rPr>
-                        <a:t>순위</a:t>
+                        <a:t>우선순위</a:t>
+                      </a:r>
+                    </a:p>
+                  </a:txBody>
+                  <a:tcPr marL="45720" marR="45720" marT="22860" marB="22860" anchor="ctr">
+                    <a:lnL w="9525" cap="flat" cmpd="sng" algn="ctr">
+                      <a:solidFill>
+                        <a:srgbClr val="000000"/>
+                      </a:solidFill>
+                      <a:prstDash val="solid"/>
+                    </a:lnL>
+                    <a:lnR w="9525" cap="flat" cmpd="sng" algn="ctr">
+                      <a:solidFill>
+                        <a:srgbClr val="000000"/>
+                      </a:solidFill>
+                      <a:prstDash val="solid"/>
+                    </a:lnR>
+                    <a:lnT w="9525" cap="flat" cmpd="sng" algn="ctr">
+                      <a:solidFill>
+                        <a:srgbClr val="000000"/>
+                      </a:solidFill>
+                      <a:prstDash val="solid"/>
+                    </a:lnT>
+                    <a:lnB w="9525" cap="flat" cmpd="sng" algn="ctr">
+                      <a:solidFill>
+                        <a:srgbClr val="000000"/>
+                      </a:solidFill>
+                      <a:prstDash val="solid"/>
+                    </a:lnB>
+                    <a:solidFill>
+                      <a:srgbClr val="833C0B"/>
+                    </a:solidFill>
+                  </a:tcPr>
+                </a:tc>
+                <a:tc>
+                  <a:txBody>
+                    <a:bodyPr wrap="square"/>
+                    <a:lstStyle/>
+                    <a:p>
+                      <a:pPr algn="ctr"/>
+                      <a:r>
+                        <a:rPr sz="1100" b="1">
+                          <a:solidFill>
+                            <a:srgbClr val="FFFFFF"/>
+                          </a:solidFill>
+                          <a:latin typeface="맑은 고딕"/>
+                        </a:rPr>
+                        <a:t>선정</a:t>
                       </a:r>
                     </a:p>
                   </a:txBody>
@@ -13709,7 +13947,54 @@
                   </a:tcPr>
                 </a:tc>
               </a:tr>
-              <a:tr h="914400">
+              <a:tr h="868680">
+                <a:tc>
+                  <a:txBody>
+                    <a:bodyPr wrap="square"/>
+                    <a:lstStyle/>
+                    <a:p>
+                      <a:pPr algn="ctr"/>
+                      <a:r>
+                        <a:rPr sz="1050" b="0">
+                          <a:solidFill>
+                            <a:srgbClr val="000000"/>
+                          </a:solidFill>
+                          <a:latin typeface="맑은 고딕"/>
+                        </a:rPr>
+                        <a:t>QA-01</a:t>
+                      </a:r>
+                    </a:p>
+                  </a:txBody>
+                  <a:tcPr marL="45720" marR="45720" marT="22860" marB="22860" anchor="ctr">
+                    <a:lnL w="9525" cap="flat" cmpd="sng" algn="ctr">
+                      <a:solidFill>
+                        <a:srgbClr val="000000"/>
+                      </a:solidFill>
+                      <a:prstDash val="solid"/>
+                    </a:lnL>
+                    <a:lnR w="9525" cap="flat" cmpd="sng" algn="ctr">
+                      <a:solidFill>
+                        <a:srgbClr val="000000"/>
+                      </a:solidFill>
+                      <a:prstDash val="solid"/>
+                    </a:lnR>
+                    <a:lnT w="9525" cap="flat" cmpd="sng" algn="ctr">
+                      <a:solidFill>
+                        <a:srgbClr val="000000"/>
+                      </a:solidFill>
+                      <a:prstDash val="solid"/>
+                    </a:lnT>
+                    <a:lnB w="9525" cap="flat" cmpd="sng" algn="ctr">
+                      <a:solidFill>
+                        <a:srgbClr val="000000"/>
+                      </a:solidFill>
+                      <a:prstDash val="solid"/>
+                    </a:lnB>
+                    <a:solidFill>
+                      <a:srgbClr val="FFFFFF"/>
+                    </a:solidFill>
+                  </a:tcPr>
+                </a:tc>
                 <a:tc>
                   <a:txBody>
                     <a:bodyPr wrap="square"/>
@@ -13782,19 +14067,7 @@
                           </a:solidFill>
                           <a:latin typeface="맑은 고딕"/>
                         </a:rPr>
-                        <a:t>Max SLO Goodput</a:t>
-                      </a:r>
-                    </a:p>
-                    <a:p>
-                      <a:pPr algn="ctr"/>
-                      <a:r>
-                        <a:rPr sz="1050" b="0">
-                          <a:solidFill>
-                            <a:srgbClr val="000000"/>
-                          </a:solidFill>
-                          <a:latin typeface="맑은 고딕"/>
-                        </a:rPr>
-                        <a:t>(Agent 대기 KV)</a:t>
+                        <a:t>요청 처리량</a:t>
                       </a:r>
                     </a:p>
                   </a:txBody>
@@ -13841,7 +14114,19 @@
                           </a:solidFill>
                           <a:latin typeface="맑은 고딕"/>
                         </a:rPr>
-                        <a:t>[DP1·3] 출처는 agent 클라이언트이고 요청이 지속 도착한다. 환경은 tool 대기 중인 idle KV가 HBM을 점유한 정상 운영이다. 대상은 이동 결정 스케줄러이고, 응답은 idle KV를 HBM 밖으로 옮겨 다른 요청을 더 처리하는 것이다. 측정은 SLO를 만족하는 Max Goodput이 Baseline 대비 [        ] 이상이다</a:t>
+                        <a:t>다수의 agent 세션이 동시에 요청하는 상황에서, 지정한 SLO(TTFT, TPOT)를 만족하며 처리할 수 있는 최대 요청량이 기준 시스템(Baseline)보다 커야 한다.</a:t>
+                      </a:r>
+                    </a:p>
+                    <a:p>
+                      <a:pPr algn="l"/>
+                      <a:r>
+                        <a:rPr sz="1050" b="0">
+                          <a:solidFill>
+                            <a:srgbClr val="000000"/>
+                          </a:solidFill>
+                          <a:latin typeface="맑은 고딕"/>
+                        </a:rPr>
+                        <a:t>[측정: SLO 만족 Max Goodput ≥ Baseline 대비 [   ] ]</a:t>
                       </a:r>
                     </a:p>
                   </a:txBody>
@@ -13982,268 +14267,7 @@
                           </a:solidFill>
                           <a:latin typeface="맑은 고딕"/>
                         </a:rPr>
-                        <a:t>4</a:t>
-                      </a:r>
-                    </a:p>
-                  </a:txBody>
-                  <a:tcPr marL="45720" marR="45720" marT="22860" marB="22860" anchor="ctr">
-                    <a:lnL w="9525" cap="flat" cmpd="sng" algn="ctr">
-                      <a:solidFill>
-                        <a:srgbClr val="000000"/>
-                      </a:solidFill>
-                      <a:prstDash val="solid"/>
-                    </a:lnL>
-                    <a:lnR w="9525" cap="flat" cmpd="sng" algn="ctr">
-                      <a:solidFill>
-                        <a:srgbClr val="000000"/>
-                      </a:solidFill>
-                      <a:prstDash val="solid"/>
-                    </a:lnR>
-                    <a:lnT w="9525" cap="flat" cmpd="sng" algn="ctr">
-                      <a:solidFill>
-                        <a:srgbClr val="000000"/>
-                      </a:solidFill>
-                      <a:prstDash val="solid"/>
-                    </a:lnT>
-                    <a:lnB w="9525" cap="flat" cmpd="sng" algn="ctr">
-                      <a:solidFill>
-                        <a:srgbClr val="000000"/>
-                      </a:solidFill>
-                      <a:prstDash val="solid"/>
-                    </a:lnB>
-                    <a:solidFill>
-                      <a:srgbClr val="FFFFFF"/>
-                    </a:solidFill>
-                  </a:tcPr>
-                </a:tc>
-              </a:tr>
-              <a:tr h="914400">
-                <a:tc>
-                  <a:txBody>
-                    <a:bodyPr wrap="square"/>
-                    <a:lstStyle/>
-                    <a:p>
-                      <a:pPr algn="ctr"/>
-                      <a:r>
-                        <a:rPr sz="1050" b="0">
-                          <a:solidFill>
-                            <a:srgbClr val="000000"/>
-                          </a:solidFill>
-                          <a:latin typeface="맑은 고딕"/>
-                        </a:rPr>
-                        <a:t>Performance</a:t>
-                      </a:r>
-                    </a:p>
-                    <a:p>
-                      <a:pPr algn="ctr"/>
-                      <a:r>
-                        <a:rPr sz="1050" b="0">
-                          <a:solidFill>
-                            <a:srgbClr val="000000"/>
-                          </a:solidFill>
-                          <a:latin typeface="맑은 고딕"/>
-                        </a:rPr>
-                        <a:t>Throughput</a:t>
-                      </a:r>
-                    </a:p>
-                  </a:txBody>
-                  <a:tcPr marL="45720" marR="45720" marT="22860" marB="22860" anchor="ctr">
-                    <a:lnL w="9525" cap="flat" cmpd="sng" algn="ctr">
-                      <a:solidFill>
-                        <a:srgbClr val="000000"/>
-                      </a:solidFill>
-                      <a:prstDash val="solid"/>
-                    </a:lnL>
-                    <a:lnR w="9525" cap="flat" cmpd="sng" algn="ctr">
-                      <a:solidFill>
-                        <a:srgbClr val="000000"/>
-                      </a:solidFill>
-                      <a:prstDash val="solid"/>
-                    </a:lnR>
-                    <a:lnT w="9525" cap="flat" cmpd="sng" algn="ctr">
-                      <a:solidFill>
-                        <a:srgbClr val="000000"/>
-                      </a:solidFill>
-                      <a:prstDash val="solid"/>
-                    </a:lnT>
-                    <a:lnB w="9525" cap="flat" cmpd="sng" algn="ctr">
-                      <a:solidFill>
-                        <a:srgbClr val="000000"/>
-                      </a:solidFill>
-                      <a:prstDash val="solid"/>
-                    </a:lnB>
-                    <a:solidFill>
-                      <a:srgbClr val="FFFFFF"/>
-                    </a:solidFill>
-                  </a:tcPr>
-                </a:tc>
-                <a:tc>
-                  <a:txBody>
-                    <a:bodyPr wrap="square"/>
-                    <a:lstStyle/>
-                    <a:p>
-                      <a:pPr algn="ctr"/>
-                      <a:r>
-                        <a:rPr sz="1050" b="0">
-                          <a:solidFill>
-                            <a:srgbClr val="000000"/>
-                          </a:solidFill>
-                          <a:latin typeface="맑은 고딕"/>
-                        </a:rPr>
-                        <a:t>Max SLO Goodput</a:t>
-                      </a:r>
-                    </a:p>
-                    <a:p>
-                      <a:pPr algn="ctr"/>
-                      <a:r>
-                        <a:rPr sz="1050" b="0">
-                          <a:solidFill>
-                            <a:srgbClr val="000000"/>
-                          </a:solidFill>
-                          <a:latin typeface="맑은 고딕"/>
-                        </a:rPr>
-                        <a:t>(P/D 실행 위치)</a:t>
-                      </a:r>
-                    </a:p>
-                  </a:txBody>
-                  <a:tcPr marL="45720" marR="45720" marT="22860" marB="22860" anchor="ctr">
-                    <a:lnL w="9525" cap="flat" cmpd="sng" algn="ctr">
-                      <a:solidFill>
-                        <a:srgbClr val="000000"/>
-                      </a:solidFill>
-                      <a:prstDash val="solid"/>
-                    </a:lnL>
-                    <a:lnR w="9525" cap="flat" cmpd="sng" algn="ctr">
-                      <a:solidFill>
-                        <a:srgbClr val="000000"/>
-                      </a:solidFill>
-                      <a:prstDash val="solid"/>
-                    </a:lnR>
-                    <a:lnT w="9525" cap="flat" cmpd="sng" algn="ctr">
-                      <a:solidFill>
-                        <a:srgbClr val="000000"/>
-                      </a:solidFill>
-                      <a:prstDash val="solid"/>
-                    </a:lnT>
-                    <a:lnB w="9525" cap="flat" cmpd="sng" algn="ctr">
-                      <a:solidFill>
-                        <a:srgbClr val="000000"/>
-                      </a:solidFill>
-                      <a:prstDash val="solid"/>
-                    </a:lnB>
-                    <a:solidFill>
-                      <a:srgbClr val="FFFFFF"/>
-                    </a:solidFill>
-                  </a:tcPr>
-                </a:tc>
-                <a:tc>
-                  <a:txBody>
-                    <a:bodyPr wrap="square"/>
-                    <a:lstStyle/>
-                    <a:p>
-                      <a:pPr algn="l"/>
-                      <a:r>
-                        <a:rPr sz="1050" b="0">
-                          <a:solidFill>
-                            <a:srgbClr val="000000"/>
-                          </a:solidFill>
-                          <a:latin typeface="맑은 고딕"/>
-                        </a:rPr>
-                        <a:t>[DP2] Prefill burst와 긴 history가 섞여 도착한다. 대상은 실행 위치 결정 모듈이고, 응답은 요청별 P/D 분리 여부와 (n_p, n_d)를 정하는 것이다. 측정은 SLO를 만족하는 Max Goodput이 Baseline 대비 [        ] 이상이다</a:t>
-                      </a:r>
-                    </a:p>
-                  </a:txBody>
-                  <a:tcPr marL="45720" marR="45720" marT="22860" marB="22860" anchor="ctr">
-                    <a:lnL w="9525" cap="flat" cmpd="sng" algn="ctr">
-                      <a:solidFill>
-                        <a:srgbClr val="000000"/>
-                      </a:solidFill>
-                      <a:prstDash val="solid"/>
-                    </a:lnL>
-                    <a:lnR w="9525" cap="flat" cmpd="sng" algn="ctr">
-                      <a:solidFill>
-                        <a:srgbClr val="000000"/>
-                      </a:solidFill>
-                      <a:prstDash val="solid"/>
-                    </a:lnR>
-                    <a:lnT w="9525" cap="flat" cmpd="sng" algn="ctr">
-                      <a:solidFill>
-                        <a:srgbClr val="000000"/>
-                      </a:solidFill>
-                      <a:prstDash val="solid"/>
-                    </a:lnT>
-                    <a:lnB w="9525" cap="flat" cmpd="sng" algn="ctr">
-                      <a:solidFill>
-                        <a:srgbClr val="000000"/>
-                      </a:solidFill>
-                      <a:prstDash val="solid"/>
-                    </a:lnB>
-                    <a:solidFill>
-                      <a:srgbClr val="FFFFFF"/>
-                    </a:solidFill>
-                  </a:tcPr>
-                </a:tc>
-                <a:tc>
-                  <a:txBody>
-                    <a:bodyPr wrap="square"/>
-                    <a:lstStyle/>
-                    <a:p>
-                      <a:pPr algn="ctr"/>
-                      <a:r>
-                        <a:rPr sz="1050" b="0">
-                          <a:solidFill>
-                            <a:srgbClr val="000000"/>
-                          </a:solidFill>
-                          <a:latin typeface="맑은 고딕"/>
-                        </a:rPr>
-                        <a:t>M</a:t>
-                      </a:r>
-                    </a:p>
-                  </a:txBody>
-                  <a:tcPr marL="45720" marR="45720" marT="22860" marB="22860" anchor="ctr">
-                    <a:lnL w="9525" cap="flat" cmpd="sng" algn="ctr">
-                      <a:solidFill>
-                        <a:srgbClr val="000000"/>
-                      </a:solidFill>
-                      <a:prstDash val="solid"/>
-                    </a:lnL>
-                    <a:lnR w="9525" cap="flat" cmpd="sng" algn="ctr">
-                      <a:solidFill>
-                        <a:srgbClr val="000000"/>
-                      </a:solidFill>
-                      <a:prstDash val="solid"/>
-                    </a:lnR>
-                    <a:lnT w="9525" cap="flat" cmpd="sng" algn="ctr">
-                      <a:solidFill>
-                        <a:srgbClr val="000000"/>
-                      </a:solidFill>
-                      <a:prstDash val="solid"/>
-                    </a:lnT>
-                    <a:lnB w="9525" cap="flat" cmpd="sng" algn="ctr">
-                      <a:solidFill>
-                        <a:srgbClr val="000000"/>
-                      </a:solidFill>
-                      <a:prstDash val="solid"/>
-                    </a:lnB>
-                    <a:solidFill>
-                      <a:srgbClr val="FFFFFF"/>
-                    </a:solidFill>
-                  </a:tcPr>
-                </a:tc>
-                <a:tc>
-                  <a:txBody>
-                    <a:bodyPr wrap="square"/>
-                    <a:lstStyle/>
-                    <a:p>
-                      <a:pPr algn="ctr"/>
-                      <a:r>
-                        <a:rPr sz="1050" b="0">
-                          <a:solidFill>
-                            <a:srgbClr val="000000"/>
-                          </a:solidFill>
-                          <a:latin typeface="맑은 고딕"/>
-                        </a:rPr>
-                        <a:t>H</a:t>
+                        <a:t/>
                       </a:r>
                     </a:p>
                   </a:txBody>
@@ -14325,7 +14349,7 @@
                   </a:tcPr>
                 </a:tc>
               </a:tr>
-              <a:tr h="914400">
+              <a:tr h="868680">
                 <a:tc>
                   <a:txBody>
                     <a:bodyPr wrap="square"/>
@@ -14339,19 +14363,7 @@
                           </a:solidFill>
                           <a:latin typeface="맑은 고딕"/>
                         </a:rPr>
-                        <a:t>Performance</a:t>
-                      </a:r>
-                    </a:p>
-                    <a:p>
-                      <a:pPr algn="ctr"/>
-                      <a:r>
-                        <a:rPr sz="1050" b="0">
-                          <a:solidFill>
-                            <a:srgbClr val="000000"/>
-                          </a:solidFill>
-                          <a:latin typeface="맑은 고딕"/>
-                        </a:rPr>
-                        <a:t>Throughput</a:t>
+                        <a:t>QA-02</a:t>
                       </a:r>
                     </a:p>
                   </a:txBody>
@@ -14385,255 +14397,6 @@
                     </a:solidFill>
                   </a:tcPr>
                 </a:tc>
-                <a:tc>
-                  <a:txBody>
-                    <a:bodyPr wrap="square"/>
-                    <a:lstStyle/>
-                    <a:p>
-                      <a:pPr algn="ctr"/>
-                      <a:r>
-                        <a:rPr sz="1050" b="0">
-                          <a:solidFill>
-                            <a:srgbClr val="000000"/>
-                          </a:solidFill>
-                          <a:latin typeface="맑은 고딕"/>
-                        </a:rPr>
-                        <a:t>Max SLO Goodput</a:t>
-                      </a:r>
-                    </a:p>
-                    <a:p>
-                      <a:pPr algn="ctr"/>
-                      <a:r>
-                        <a:rPr sz="1050" b="0">
-                          <a:solidFill>
-                            <a:srgbClr val="000000"/>
-                          </a:solidFill>
-                          <a:latin typeface="맑은 고딕"/>
-                        </a:rPr>
-                        <a:t>(요청 배분)</a:t>
-                      </a:r>
-                    </a:p>
-                  </a:txBody>
-                  <a:tcPr marL="45720" marR="45720" marT="22860" marB="22860" anchor="ctr">
-                    <a:lnL w="9525" cap="flat" cmpd="sng" algn="ctr">
-                      <a:solidFill>
-                        <a:srgbClr val="000000"/>
-                      </a:solidFill>
-                      <a:prstDash val="solid"/>
-                    </a:lnL>
-                    <a:lnR w="9525" cap="flat" cmpd="sng" algn="ctr">
-                      <a:solidFill>
-                        <a:srgbClr val="000000"/>
-                      </a:solidFill>
-                      <a:prstDash val="solid"/>
-                    </a:lnR>
-                    <a:lnT w="9525" cap="flat" cmpd="sng" algn="ctr">
-                      <a:solidFill>
-                        <a:srgbClr val="000000"/>
-                      </a:solidFill>
-                      <a:prstDash val="solid"/>
-                    </a:lnT>
-                    <a:lnB w="9525" cap="flat" cmpd="sng" algn="ctr">
-                      <a:solidFill>
-                        <a:srgbClr val="000000"/>
-                      </a:solidFill>
-                      <a:prstDash val="solid"/>
-                    </a:lnB>
-                    <a:solidFill>
-                      <a:srgbClr val="FFFFFF"/>
-                    </a:solidFill>
-                  </a:tcPr>
-                </a:tc>
-                <a:tc>
-                  <a:txBody>
-                    <a:bodyPr wrap="square"/>
-                    <a:lstStyle/>
-                    <a:p>
-                      <a:pPr algn="l"/>
-                      <a:r>
-                        <a:rPr sz="1050" b="0">
-                          <a:solidFill>
-                            <a:srgbClr val="000000"/>
-                          </a:solidFill>
-                          <a:latin typeface="맑은 고딕"/>
-                        </a:rPr>
-                        <a:t>[DP4] KV 캐시가 서버별로 분산된 다중 서버에서 같은 prefix 요청이 도착한다. 대상은 orchestrator이고, 응답은 KV 위치를 보고 서버를 고르는 것이다. 측정은 SLO를 만족하는 Max Goodput이 Baseline 대비 [        ] 이상이다</a:t>
-                      </a:r>
-                    </a:p>
-                  </a:txBody>
-                  <a:tcPr marL="45720" marR="45720" marT="22860" marB="22860" anchor="ctr">
-                    <a:lnL w="9525" cap="flat" cmpd="sng" algn="ctr">
-                      <a:solidFill>
-                        <a:srgbClr val="000000"/>
-                      </a:solidFill>
-                      <a:prstDash val="solid"/>
-                    </a:lnL>
-                    <a:lnR w="9525" cap="flat" cmpd="sng" algn="ctr">
-                      <a:solidFill>
-                        <a:srgbClr val="000000"/>
-                      </a:solidFill>
-                      <a:prstDash val="solid"/>
-                    </a:lnR>
-                    <a:lnT w="9525" cap="flat" cmpd="sng" algn="ctr">
-                      <a:solidFill>
-                        <a:srgbClr val="000000"/>
-                      </a:solidFill>
-                      <a:prstDash val="solid"/>
-                    </a:lnT>
-                    <a:lnB w="9525" cap="flat" cmpd="sng" algn="ctr">
-                      <a:solidFill>
-                        <a:srgbClr val="000000"/>
-                      </a:solidFill>
-                      <a:prstDash val="solid"/>
-                    </a:lnB>
-                    <a:solidFill>
-                      <a:srgbClr val="FFFFFF"/>
-                    </a:solidFill>
-                  </a:tcPr>
-                </a:tc>
-                <a:tc>
-                  <a:txBody>
-                    <a:bodyPr wrap="square"/>
-                    <a:lstStyle/>
-                    <a:p>
-                      <a:pPr algn="ctr"/>
-                      <a:r>
-                        <a:rPr sz="1050" b="0">
-                          <a:solidFill>
-                            <a:srgbClr val="000000"/>
-                          </a:solidFill>
-                          <a:latin typeface="맑은 고딕"/>
-                        </a:rPr>
-                        <a:t>M</a:t>
-                      </a:r>
-                    </a:p>
-                  </a:txBody>
-                  <a:tcPr marL="45720" marR="45720" marT="22860" marB="22860" anchor="ctr">
-                    <a:lnL w="9525" cap="flat" cmpd="sng" algn="ctr">
-                      <a:solidFill>
-                        <a:srgbClr val="000000"/>
-                      </a:solidFill>
-                      <a:prstDash val="solid"/>
-                    </a:lnL>
-                    <a:lnR w="9525" cap="flat" cmpd="sng" algn="ctr">
-                      <a:solidFill>
-                        <a:srgbClr val="000000"/>
-                      </a:solidFill>
-                      <a:prstDash val="solid"/>
-                    </a:lnR>
-                    <a:lnT w="9525" cap="flat" cmpd="sng" algn="ctr">
-                      <a:solidFill>
-                        <a:srgbClr val="000000"/>
-                      </a:solidFill>
-                      <a:prstDash val="solid"/>
-                    </a:lnT>
-                    <a:lnB w="9525" cap="flat" cmpd="sng" algn="ctr">
-                      <a:solidFill>
-                        <a:srgbClr val="000000"/>
-                      </a:solidFill>
-                      <a:prstDash val="solid"/>
-                    </a:lnB>
-                    <a:solidFill>
-                      <a:srgbClr val="FFFFFF"/>
-                    </a:solidFill>
-                  </a:tcPr>
-                </a:tc>
-                <a:tc>
-                  <a:txBody>
-                    <a:bodyPr wrap="square"/>
-                    <a:lstStyle/>
-                    <a:p>
-                      <a:pPr algn="ctr"/>
-                      <a:r>
-                        <a:rPr sz="1050" b="0">
-                          <a:solidFill>
-                            <a:srgbClr val="000000"/>
-                          </a:solidFill>
-                          <a:latin typeface="맑은 고딕"/>
-                        </a:rPr>
-                        <a:t>M</a:t>
-                      </a:r>
-                    </a:p>
-                  </a:txBody>
-                  <a:tcPr marL="45720" marR="45720" marT="22860" marB="22860" anchor="ctr">
-                    <a:lnL w="9525" cap="flat" cmpd="sng" algn="ctr">
-                      <a:solidFill>
-                        <a:srgbClr val="000000"/>
-                      </a:solidFill>
-                      <a:prstDash val="solid"/>
-                    </a:lnL>
-                    <a:lnR w="9525" cap="flat" cmpd="sng" algn="ctr">
-                      <a:solidFill>
-                        <a:srgbClr val="000000"/>
-                      </a:solidFill>
-                      <a:prstDash val="solid"/>
-                    </a:lnR>
-                    <a:lnT w="9525" cap="flat" cmpd="sng" algn="ctr">
-                      <a:solidFill>
-                        <a:srgbClr val="000000"/>
-                      </a:solidFill>
-                      <a:prstDash val="solid"/>
-                    </a:lnT>
-                    <a:lnB w="9525" cap="flat" cmpd="sng" algn="ctr">
-                      <a:solidFill>
-                        <a:srgbClr val="000000"/>
-                      </a:solidFill>
-                      <a:prstDash val="solid"/>
-                    </a:lnB>
-                    <a:solidFill>
-                      <a:srgbClr val="FFFFFF"/>
-                    </a:solidFill>
-                  </a:tcPr>
-                </a:tc>
-                <a:tc>
-                  <a:txBody>
-                    <a:bodyPr wrap="square"/>
-                    <a:lstStyle/>
-                    <a:p>
-                      <a:pPr algn="ctr"/>
-                      <a:r>
-                        <a:rPr sz="1050" b="0">
-                          <a:solidFill>
-                            <a:srgbClr val="000000"/>
-                          </a:solidFill>
-                          <a:latin typeface="맑은 고딕"/>
-                        </a:rPr>
-                        <a:t/>
-                      </a:r>
-                    </a:p>
-                  </a:txBody>
-                  <a:tcPr marL="45720" marR="45720" marT="22860" marB="22860" anchor="ctr">
-                    <a:lnL w="9525" cap="flat" cmpd="sng" algn="ctr">
-                      <a:solidFill>
-                        <a:srgbClr val="000000"/>
-                      </a:solidFill>
-                      <a:prstDash val="solid"/>
-                    </a:lnL>
-                    <a:lnR w="9525" cap="flat" cmpd="sng" algn="ctr">
-                      <a:solidFill>
-                        <a:srgbClr val="000000"/>
-                      </a:solidFill>
-                      <a:prstDash val="solid"/>
-                    </a:lnR>
-                    <a:lnT w="9525" cap="flat" cmpd="sng" algn="ctr">
-                      <a:solidFill>
-                        <a:srgbClr val="000000"/>
-                      </a:solidFill>
-                      <a:prstDash val="solid"/>
-                    </a:lnT>
-                    <a:lnB w="9525" cap="flat" cmpd="sng" algn="ctr">
-                      <a:solidFill>
-                        <a:srgbClr val="000000"/>
-                      </a:solidFill>
-                      <a:prstDash val="solid"/>
-                    </a:lnB>
-                    <a:solidFill>
-                      <a:srgbClr val="FFFFFF"/>
-                    </a:solidFill>
-                  </a:tcPr>
-                </a:tc>
-              </a:tr>
-              <a:tr h="914400">
                 <a:tc>
                   <a:txBody>
                     <a:bodyPr wrap="square"/>
@@ -14706,19 +14469,7 @@
                           </a:solidFill>
                           <a:latin typeface="맑은 고딕"/>
                         </a:rPr>
-                        <a:t>TTFT</a:t>
-                      </a:r>
-                    </a:p>
-                    <a:p>
-                      <a:pPr algn="ctr"/>
-                      <a:r>
-                        <a:rPr sz="1050" b="0">
-                          <a:solidFill>
-                            <a:srgbClr val="000000"/>
-                          </a:solidFill>
-                          <a:latin typeface="맑은 고딕"/>
-                        </a:rPr>
-                        <a:t>(재개 / 재사용)</a:t>
+                        <a:t>응답 지연</a:t>
                       </a:r>
                     </a:p>
                   </a:txBody>
@@ -14765,7 +14516,19 @@
                           </a:solidFill>
                           <a:latin typeface="맑은 고딕"/>
                         </a:rPr>
-                        <a:t>[DP1·3·4] 환경은 KV가 HBM 밖 tier에 있고 부하가 고정된 상태이다. 같은 세션의 후속 요청 또는 같은 문서 prefix 요청이 도착하고, 응답은 KV를 찾아 복원하고 재계산을 최소화하는 것이다. 측정은 TTFT(P50, P99)가 Baseline 대비 [        ] 이내이다</a:t>
+                        <a:t>정해진 부하에서 요청의 첫 토큰 응답 시간(TTFT)과 토큰 간 생성 시간(TPOT)이 Baseline보다 크게 늘지 않아야 한다.</a:t>
+                      </a:r>
+                    </a:p>
+                    <a:p>
+                      <a:pPr algn="l"/>
+                      <a:r>
+                        <a:rPr sz="1050" b="0">
+                          <a:solidFill>
+                            <a:srgbClr val="000000"/>
+                          </a:solidFill>
+                          <a:latin typeface="맑은 고딕"/>
+                        </a:rPr>
+                        <a:t>[측정: TTFT, TPOT(P50, P99) &lt; Baseline 대비 [   ] ]</a:t>
                       </a:r>
                     </a:p>
                   </a:txBody>
@@ -14859,7 +14622,7 @@
                           </a:solidFill>
                           <a:latin typeface="맑은 고딕"/>
                         </a:rPr>
-                        <a:t>M</a:t>
+                        <a:t>H</a:t>
                       </a:r>
                     </a:p>
                   </a:txBody>
@@ -14906,7 +14669,54 @@
                           </a:solidFill>
                           <a:latin typeface="맑은 고딕"/>
                         </a:rPr>
-                        <a:t>5</a:t>
+                        <a:t/>
+                      </a:r>
+                    </a:p>
+                  </a:txBody>
+                  <a:tcPr marL="45720" marR="45720" marT="22860" marB="22860" anchor="ctr">
+                    <a:lnL w="9525" cap="flat" cmpd="sng" algn="ctr">
+                      <a:solidFill>
+                        <a:srgbClr val="000000"/>
+                      </a:solidFill>
+                      <a:prstDash val="solid"/>
+                    </a:lnL>
+                    <a:lnR w="9525" cap="flat" cmpd="sng" algn="ctr">
+                      <a:solidFill>
+                        <a:srgbClr val="000000"/>
+                      </a:solidFill>
+                      <a:prstDash val="solid"/>
+                    </a:lnR>
+                    <a:lnT w="9525" cap="flat" cmpd="sng" algn="ctr">
+                      <a:solidFill>
+                        <a:srgbClr val="000000"/>
+                      </a:solidFill>
+                      <a:prstDash val="solid"/>
+                    </a:lnT>
+                    <a:lnB w="9525" cap="flat" cmpd="sng" algn="ctr">
+                      <a:solidFill>
+                        <a:srgbClr val="000000"/>
+                      </a:solidFill>
+                      <a:prstDash val="solid"/>
+                    </a:lnB>
+                    <a:solidFill>
+                      <a:srgbClr val="FFFFFF"/>
+                    </a:solidFill>
+                  </a:tcPr>
+                </a:tc>
+                <a:tc>
+                  <a:txBody>
+                    <a:bodyPr wrap="square"/>
+                    <a:lstStyle/>
+                    <a:p>
+                      <a:pPr algn="ctr"/>
+                      <a:r>
+                        <a:rPr sz="1050" b="0">
+                          <a:solidFill>
+                            <a:srgbClr val="000000"/>
+                          </a:solidFill>
+                          <a:latin typeface="맑은 고딕"/>
+                        </a:rPr>
+                        <a:t/>
                       </a:r>
                     </a:p>
                   </a:txBody>
@@ -14941,7 +14751,54 @@
                   </a:tcPr>
                 </a:tc>
               </a:tr>
-              <a:tr h="914400">
+              <a:tr h="868680">
+                <a:tc>
+                  <a:txBody>
+                    <a:bodyPr wrap="square"/>
+                    <a:lstStyle/>
+                    <a:p>
+                      <a:pPr algn="ctr"/>
+                      <a:r>
+                        <a:rPr sz="1050" b="0">
+                          <a:solidFill>
+                            <a:srgbClr val="000000"/>
+                          </a:solidFill>
+                          <a:latin typeface="맑은 고딕"/>
+                        </a:rPr>
+                        <a:t>QA-03</a:t>
+                      </a:r>
+                    </a:p>
+                  </a:txBody>
+                  <a:tcPr marL="45720" marR="45720" marT="22860" marB="22860" anchor="ctr">
+                    <a:lnL w="9525" cap="flat" cmpd="sng" algn="ctr">
+                      <a:solidFill>
+                        <a:srgbClr val="000000"/>
+                      </a:solidFill>
+                      <a:prstDash val="solid"/>
+                    </a:lnL>
+                    <a:lnR w="9525" cap="flat" cmpd="sng" algn="ctr">
+                      <a:solidFill>
+                        <a:srgbClr val="000000"/>
+                      </a:solidFill>
+                      <a:prstDash val="solid"/>
+                    </a:lnR>
+                    <a:lnT w="9525" cap="flat" cmpd="sng" algn="ctr">
+                      <a:solidFill>
+                        <a:srgbClr val="000000"/>
+                      </a:solidFill>
+                      <a:prstDash val="solid"/>
+                    </a:lnT>
+                    <a:lnB w="9525" cap="flat" cmpd="sng" algn="ctr">
+                      <a:solidFill>
+                        <a:srgbClr val="000000"/>
+                      </a:solidFill>
+                      <a:prstDash val="solid"/>
+                    </a:lnB>
+                    <a:solidFill>
+                      <a:srgbClr val="FFFFFF"/>
+                    </a:solidFill>
+                  </a:tcPr>
+                </a:tc>
                 <a:tc>
                   <a:txBody>
                     <a:bodyPr wrap="square"/>
@@ -14967,7 +14824,7 @@
                           </a:solidFill>
                           <a:latin typeface="맑은 고딕"/>
                         </a:rPr>
-                        <a:t>Latency</a:t>
+                        <a:t>Resource utilization</a:t>
                       </a:r>
                     </a:p>
                   </a:txBody>
@@ -15014,19 +14871,7 @@
                           </a:solidFill>
                           <a:latin typeface="맑은 고딕"/>
                         </a:rPr>
-                        <a:t>TPOT</a:t>
-                      </a:r>
-                    </a:p>
-                    <a:p>
-                      <a:pPr algn="ctr"/>
-                      <a:r>
-                        <a:rPr sz="1050" b="0">
-                          <a:solidFill>
-                            <a:srgbClr val="000000"/>
-                          </a:solidFill>
-                          <a:latin typeface="맑은 고딕"/>
-                        </a:rPr>
-                        <a:t>(다계층 attention)</a:t>
+                        <a:t>HBM 점유율</a:t>
                       </a:r>
                     </a:p>
                   </a:txBody>
@@ -15073,7 +14918,19 @@
                           </a:solidFill>
                           <a:latin typeface="맑은 고딕"/>
                         </a:rPr>
-                        <a:t>[DP1·2·3] 환경은 KV 일부가 느린 tier에 있고 부하가 고정된 상태에서 decode가 진행된다. 응답은 접근 빈도가 높은 KV를 빠른 tier에 두는 것이다. 측정은 TPOT(P50, P99)가 Baseline 대비 [        ] 이내이다</a:t>
+                        <a:t>동일한 부하와 SLO 조건에서 KV·adapter·expert가 차지하는 HBM 점유율이 Baseline보다 낮아야 한다.</a:t>
+                      </a:r>
+                    </a:p>
+                    <a:p>
+                      <a:pPr algn="l"/>
+                      <a:r>
+                        <a:rPr sz="1050" b="0">
+                          <a:solidFill>
+                            <a:srgbClr val="000000"/>
+                          </a:solidFill>
+                          <a:latin typeface="맑은 고딕"/>
+                        </a:rPr>
+                        <a:t>[측정: HBM 점유율(평균, 피크) &lt; Baseline 대비 [   ] ]</a:t>
                       </a:r>
                     </a:p>
                   </a:txBody>
@@ -15167,7 +15024,7 @@
                           </a:solidFill>
                           <a:latin typeface="맑은 고딕"/>
                         </a:rPr>
-                        <a:t>H</a:t>
+                        <a:t>M</a:t>
                       </a:r>
                     </a:p>
                   </a:txBody>
@@ -15214,80 +15071,7 @@
                           </a:solidFill>
                           <a:latin typeface="맑은 고딕"/>
                         </a:rPr>
-                        <a:t>1</a:t>
-                      </a:r>
-                    </a:p>
-                  </a:txBody>
-                  <a:tcPr marL="45720" marR="45720" marT="22860" marB="22860" anchor="ctr">
-                    <a:lnL w="9525" cap="flat" cmpd="sng" algn="ctr">
-                      <a:solidFill>
-                        <a:srgbClr val="000000"/>
-                      </a:solidFill>
-                      <a:prstDash val="solid"/>
-                    </a:lnL>
-                    <a:lnR w="9525" cap="flat" cmpd="sng" algn="ctr">
-                      <a:solidFill>
-                        <a:srgbClr val="000000"/>
-                      </a:solidFill>
-                      <a:prstDash val="solid"/>
-                    </a:lnR>
-                    <a:lnT w="9525" cap="flat" cmpd="sng" algn="ctr">
-                      <a:solidFill>
-                        <a:srgbClr val="000000"/>
-                      </a:solidFill>
-                      <a:prstDash val="solid"/>
-                    </a:lnT>
-                    <a:lnB w="9525" cap="flat" cmpd="sng" algn="ctr">
-                      <a:solidFill>
-                        <a:srgbClr val="000000"/>
-                      </a:solidFill>
-                      <a:prstDash val="solid"/>
-                    </a:lnB>
-                    <a:solidFill>
-                      <a:srgbClr val="FFFFFF"/>
-                    </a:solidFill>
-                  </a:tcPr>
-                </a:tc>
-              </a:tr>
-              <a:tr h="914400">
-                <a:tc>
-                  <a:txBody>
-                    <a:bodyPr wrap="square"/>
-                    <a:lstStyle/>
-                    <a:p>
-                      <a:pPr algn="ctr"/>
-                      <a:r>
-                        <a:rPr sz="1050" b="0">
-                          <a:solidFill>
-                            <a:srgbClr val="000000"/>
-                          </a:solidFill>
-                          <a:latin typeface="맑은 고딕"/>
-                        </a:rPr>
-                        <a:t>Performance</a:t>
-                      </a:r>
-                    </a:p>
-                    <a:p>
-                      <a:pPr algn="ctr"/>
-                      <a:r>
-                        <a:rPr sz="1050" b="0">
-                          <a:solidFill>
-                            <a:srgbClr val="000000"/>
-                          </a:solidFill>
-                          <a:latin typeface="맑은 고딕"/>
-                        </a:rPr>
-                        <a:t>Resource</a:t>
-                      </a:r>
-                    </a:p>
-                    <a:p>
-                      <a:pPr algn="ctr"/>
-                      <a:r>
-                        <a:rPr sz="1050" b="0">
-                          <a:solidFill>
-                            <a:srgbClr val="000000"/>
-                          </a:solidFill>
-                          <a:latin typeface="맑은 고딕"/>
-                        </a:rPr>
-                        <a:t>utilization</a:t>
+                        <a:t/>
                       </a:r>
                     </a:p>
                   </a:txBody>
@@ -15334,7 +15118,150 @@
                           </a:solidFill>
                           <a:latin typeface="맑은 고딕"/>
                         </a:rPr>
-                        <a:t>HBM 점유율</a:t>
+                        <a:t/>
+                      </a:r>
+                    </a:p>
+                  </a:txBody>
+                  <a:tcPr marL="45720" marR="45720" marT="22860" marB="22860" anchor="ctr">
+                    <a:lnL w="9525" cap="flat" cmpd="sng" algn="ctr">
+                      <a:solidFill>
+                        <a:srgbClr val="000000"/>
+                      </a:solidFill>
+                      <a:prstDash val="solid"/>
+                    </a:lnL>
+                    <a:lnR w="9525" cap="flat" cmpd="sng" algn="ctr">
+                      <a:solidFill>
+                        <a:srgbClr val="000000"/>
+                      </a:solidFill>
+                      <a:prstDash val="solid"/>
+                    </a:lnR>
+                    <a:lnT w="9525" cap="flat" cmpd="sng" algn="ctr">
+                      <a:solidFill>
+                        <a:srgbClr val="000000"/>
+                      </a:solidFill>
+                      <a:prstDash val="solid"/>
+                    </a:lnT>
+                    <a:lnB w="9525" cap="flat" cmpd="sng" algn="ctr">
+                      <a:solidFill>
+                        <a:srgbClr val="000000"/>
+                      </a:solidFill>
+                      <a:prstDash val="solid"/>
+                    </a:lnB>
+                    <a:solidFill>
+                      <a:srgbClr val="FFFFFF"/>
+                    </a:solidFill>
+                  </a:tcPr>
+                </a:tc>
+              </a:tr>
+              <a:tr h="868680">
+                <a:tc>
+                  <a:txBody>
+                    <a:bodyPr wrap="square"/>
+                    <a:lstStyle/>
+                    <a:p>
+                      <a:pPr algn="ctr"/>
+                      <a:r>
+                        <a:rPr sz="1050" b="0">
+                          <a:solidFill>
+                            <a:srgbClr val="000000"/>
+                          </a:solidFill>
+                          <a:latin typeface="맑은 고딕"/>
+                        </a:rPr>
+                        <a:t>QA-04</a:t>
+                      </a:r>
+                    </a:p>
+                  </a:txBody>
+                  <a:tcPr marL="45720" marR="45720" marT="22860" marB="22860" anchor="ctr">
+                    <a:lnL w="9525" cap="flat" cmpd="sng" algn="ctr">
+                      <a:solidFill>
+                        <a:srgbClr val="000000"/>
+                      </a:solidFill>
+                      <a:prstDash val="solid"/>
+                    </a:lnL>
+                    <a:lnR w="9525" cap="flat" cmpd="sng" algn="ctr">
+                      <a:solidFill>
+                        <a:srgbClr val="000000"/>
+                      </a:solidFill>
+                      <a:prstDash val="solid"/>
+                    </a:lnR>
+                    <a:lnT w="9525" cap="flat" cmpd="sng" algn="ctr">
+                      <a:solidFill>
+                        <a:srgbClr val="000000"/>
+                      </a:solidFill>
+                      <a:prstDash val="solid"/>
+                    </a:lnT>
+                    <a:lnB w="9525" cap="flat" cmpd="sng" algn="ctr">
+                      <a:solidFill>
+                        <a:srgbClr val="000000"/>
+                      </a:solidFill>
+                      <a:prstDash val="solid"/>
+                    </a:lnB>
+                    <a:solidFill>
+                      <a:srgbClr val="FFFFFF"/>
+                    </a:solidFill>
+                  </a:tcPr>
+                </a:tc>
+                <a:tc>
+                  <a:txBody>
+                    <a:bodyPr wrap="square"/>
+                    <a:lstStyle/>
+                    <a:p>
+                      <a:pPr algn="ctr"/>
+                      <a:r>
+                        <a:rPr sz="1050" b="0">
+                          <a:solidFill>
+                            <a:srgbClr val="000000"/>
+                          </a:solidFill>
+                          <a:latin typeface="맑은 고딕"/>
+                        </a:rPr>
+                        <a:t>Modifiability</a:t>
+                      </a:r>
+                    </a:p>
+                  </a:txBody>
+                  <a:tcPr marL="45720" marR="45720" marT="22860" marB="22860" anchor="ctr">
+                    <a:lnL w="9525" cap="flat" cmpd="sng" algn="ctr">
+                      <a:solidFill>
+                        <a:srgbClr val="000000"/>
+                      </a:solidFill>
+                      <a:prstDash val="solid"/>
+                    </a:lnL>
+                    <a:lnR w="9525" cap="flat" cmpd="sng" algn="ctr">
+                      <a:solidFill>
+                        <a:srgbClr val="000000"/>
+                      </a:solidFill>
+                      <a:prstDash val="solid"/>
+                    </a:lnR>
+                    <a:lnT w="9525" cap="flat" cmpd="sng" algn="ctr">
+                      <a:solidFill>
+                        <a:srgbClr val="000000"/>
+                      </a:solidFill>
+                      <a:prstDash val="solid"/>
+                    </a:lnT>
+                    <a:lnB w="9525" cap="flat" cmpd="sng" algn="ctr">
+                      <a:solidFill>
+                        <a:srgbClr val="000000"/>
+                      </a:solidFill>
+                      <a:prstDash val="solid"/>
+                    </a:lnB>
+                    <a:solidFill>
+                      <a:srgbClr val="FFFFFF"/>
+                    </a:solidFill>
+                  </a:tcPr>
+                </a:tc>
+                <a:tc>
+                  <a:txBody>
+                    <a:bodyPr wrap="square"/>
+                    <a:lstStyle/>
+                    <a:p>
+                      <a:pPr algn="ctr"/>
+                      <a:r>
+                        <a:rPr sz="1050" b="0">
+                          <a:solidFill>
+                            <a:srgbClr val="000000"/>
+                          </a:solidFill>
+                          <a:latin typeface="맑은 고딕"/>
+                        </a:rPr>
+                        <a:t>변경 용이성</a:t>
                       </a:r>
                     </a:p>
                   </a:txBody>
@@ -15381,7 +15308,19 @@
                           </a:solidFill>
                           <a:latin typeface="맑은 고딕"/>
                         </a:rPr>
-                        <a:t>[전체 DP, 동일 조건] 동일 workload·SLO·Baseline에서 동일 부하가 유입된다. 응답은 KV·adapter·expert를 HBM 밖에 두는 것이다. 측정은 HBM 점유율(평균, 피크)이 Baseline 대비 [        ] 이하이다 (DP1·3 목표, DP2·4 측정)</a:t>
+                        <a:t>새로운 메모리 tier, 이동·배치 정책, 데이터 객체 유형을 추가할 때 서빙 경로를 수정하지 않고 반영할 수 있어야 한다.</a:t>
+                      </a:r>
+                    </a:p>
+                    <a:p>
+                      <a:pPr algn="l"/>
+                      <a:r>
+                        <a:rPr sz="1050" b="0">
+                          <a:solidFill>
+                            <a:srgbClr val="000000"/>
+                          </a:solidFill>
+                          <a:latin typeface="맑은 고딕"/>
+                        </a:rPr>
+                        <a:t>[측정: 기준 작업 3종의 가중 변경 비용(토큰 비용 50%, 공수 30%, 변경 모듈 수 20%) &lt; Baseline 대비 [   ] ]</a:t>
                       </a:r>
                     </a:p>
                   </a:txBody>
@@ -15522,7 +15461,834 @@
                           </a:solidFill>
                           <a:latin typeface="맑은 고딕"/>
                         </a:rPr>
-                        <a:t>3</a:t>
+                        <a:t/>
+                      </a:r>
+                    </a:p>
+                  </a:txBody>
+                  <a:tcPr marL="45720" marR="45720" marT="22860" marB="22860" anchor="ctr">
+                    <a:lnL w="9525" cap="flat" cmpd="sng" algn="ctr">
+                      <a:solidFill>
+                        <a:srgbClr val="000000"/>
+                      </a:solidFill>
+                      <a:prstDash val="solid"/>
+                    </a:lnL>
+                    <a:lnR w="9525" cap="flat" cmpd="sng" algn="ctr">
+                      <a:solidFill>
+                        <a:srgbClr val="000000"/>
+                      </a:solidFill>
+                      <a:prstDash val="solid"/>
+                    </a:lnR>
+                    <a:lnT w="9525" cap="flat" cmpd="sng" algn="ctr">
+                      <a:solidFill>
+                        <a:srgbClr val="000000"/>
+                      </a:solidFill>
+                      <a:prstDash val="solid"/>
+                    </a:lnT>
+                    <a:lnB w="9525" cap="flat" cmpd="sng" algn="ctr">
+                      <a:solidFill>
+                        <a:srgbClr val="000000"/>
+                      </a:solidFill>
+                      <a:prstDash val="solid"/>
+                    </a:lnB>
+                    <a:solidFill>
+                      <a:srgbClr val="FFFFFF"/>
+                    </a:solidFill>
+                  </a:tcPr>
+                </a:tc>
+                <a:tc>
+                  <a:txBody>
+                    <a:bodyPr wrap="square"/>
+                    <a:lstStyle/>
+                    <a:p>
+                      <a:pPr algn="ctr"/>
+                      <a:r>
+                        <a:rPr sz="1050" b="0">
+                          <a:solidFill>
+                            <a:srgbClr val="000000"/>
+                          </a:solidFill>
+                          <a:latin typeface="맑은 고딕"/>
+                        </a:rPr>
+                        <a:t/>
+                      </a:r>
+                    </a:p>
+                  </a:txBody>
+                  <a:tcPr marL="45720" marR="45720" marT="22860" marB="22860" anchor="ctr">
+                    <a:lnL w="9525" cap="flat" cmpd="sng" algn="ctr">
+                      <a:solidFill>
+                        <a:srgbClr val="000000"/>
+                      </a:solidFill>
+                      <a:prstDash val="solid"/>
+                    </a:lnL>
+                    <a:lnR w="9525" cap="flat" cmpd="sng" algn="ctr">
+                      <a:solidFill>
+                        <a:srgbClr val="000000"/>
+                      </a:solidFill>
+                      <a:prstDash val="solid"/>
+                    </a:lnR>
+                    <a:lnT w="9525" cap="flat" cmpd="sng" algn="ctr">
+                      <a:solidFill>
+                        <a:srgbClr val="000000"/>
+                      </a:solidFill>
+                      <a:prstDash val="solid"/>
+                    </a:lnT>
+                    <a:lnB w="9525" cap="flat" cmpd="sng" algn="ctr">
+                      <a:solidFill>
+                        <a:srgbClr val="000000"/>
+                      </a:solidFill>
+                      <a:prstDash val="solid"/>
+                    </a:lnB>
+                    <a:solidFill>
+                      <a:srgbClr val="FFFFFF"/>
+                    </a:solidFill>
+                  </a:tcPr>
+                </a:tc>
+              </a:tr>
+              <a:tr h="868680">
+                <a:tc>
+                  <a:txBody>
+                    <a:bodyPr wrap="square"/>
+                    <a:lstStyle/>
+                    <a:p>
+                      <a:pPr algn="ctr"/>
+                      <a:r>
+                        <a:rPr sz="1050" b="0">
+                          <a:solidFill>
+                            <a:srgbClr val="000000"/>
+                          </a:solidFill>
+                          <a:latin typeface="맑은 고딕"/>
+                        </a:rPr>
+                        <a:t>QA-05</a:t>
+                      </a:r>
+                    </a:p>
+                  </a:txBody>
+                  <a:tcPr marL="45720" marR="45720" marT="22860" marB="22860" anchor="ctr">
+                    <a:lnL w="9525" cap="flat" cmpd="sng" algn="ctr">
+                      <a:solidFill>
+                        <a:srgbClr val="000000"/>
+                      </a:solidFill>
+                      <a:prstDash val="solid"/>
+                    </a:lnL>
+                    <a:lnR w="9525" cap="flat" cmpd="sng" algn="ctr">
+                      <a:solidFill>
+                        <a:srgbClr val="000000"/>
+                      </a:solidFill>
+                      <a:prstDash val="solid"/>
+                    </a:lnR>
+                    <a:lnT w="9525" cap="flat" cmpd="sng" algn="ctr">
+                      <a:solidFill>
+                        <a:srgbClr val="000000"/>
+                      </a:solidFill>
+                      <a:prstDash val="solid"/>
+                    </a:lnT>
+                    <a:lnB w="9525" cap="flat" cmpd="sng" algn="ctr">
+                      <a:solidFill>
+                        <a:srgbClr val="000000"/>
+                      </a:solidFill>
+                      <a:prstDash val="solid"/>
+                    </a:lnB>
+                    <a:solidFill>
+                      <a:srgbClr val="FFFFFF"/>
+                    </a:solidFill>
+                  </a:tcPr>
+                </a:tc>
+                <a:tc>
+                  <a:txBody>
+                    <a:bodyPr wrap="square"/>
+                    <a:lstStyle/>
+                    <a:p>
+                      <a:pPr algn="ctr"/>
+                      <a:r>
+                        <a:rPr sz="1050" b="0">
+                          <a:solidFill>
+                            <a:srgbClr val="000000"/>
+                          </a:solidFill>
+                          <a:latin typeface="맑은 고딕"/>
+                        </a:rPr>
+                        <a:t>Scalability</a:t>
+                      </a:r>
+                    </a:p>
+                  </a:txBody>
+                  <a:tcPr marL="45720" marR="45720" marT="22860" marB="22860" anchor="ctr">
+                    <a:lnL w="9525" cap="flat" cmpd="sng" algn="ctr">
+                      <a:solidFill>
+                        <a:srgbClr val="000000"/>
+                      </a:solidFill>
+                      <a:prstDash val="solid"/>
+                    </a:lnL>
+                    <a:lnR w="9525" cap="flat" cmpd="sng" algn="ctr">
+                      <a:solidFill>
+                        <a:srgbClr val="000000"/>
+                      </a:solidFill>
+                      <a:prstDash val="solid"/>
+                    </a:lnR>
+                    <a:lnT w="9525" cap="flat" cmpd="sng" algn="ctr">
+                      <a:solidFill>
+                        <a:srgbClr val="000000"/>
+                      </a:solidFill>
+                      <a:prstDash val="solid"/>
+                    </a:lnT>
+                    <a:lnB w="9525" cap="flat" cmpd="sng" algn="ctr">
+                      <a:solidFill>
+                        <a:srgbClr val="000000"/>
+                      </a:solidFill>
+                      <a:prstDash val="solid"/>
+                    </a:lnB>
+                    <a:solidFill>
+                      <a:srgbClr val="FFFFFF"/>
+                    </a:solidFill>
+                  </a:tcPr>
+                </a:tc>
+                <a:tc>
+                  <a:txBody>
+                    <a:bodyPr wrap="square"/>
+                    <a:lstStyle/>
+                    <a:p>
+                      <a:pPr algn="ctr"/>
+                      <a:r>
+                        <a:rPr sz="1050" b="0">
+                          <a:solidFill>
+                            <a:srgbClr val="000000"/>
+                          </a:solidFill>
+                          <a:latin typeface="맑은 고딕"/>
+                        </a:rPr>
+                        <a:t>노드·메모리 type 확장</a:t>
+                      </a:r>
+                    </a:p>
+                  </a:txBody>
+                  <a:tcPr marL="45720" marR="45720" marT="22860" marB="22860" anchor="ctr">
+                    <a:lnL w="9525" cap="flat" cmpd="sng" algn="ctr">
+                      <a:solidFill>
+                        <a:srgbClr val="000000"/>
+                      </a:solidFill>
+                      <a:prstDash val="solid"/>
+                    </a:lnL>
+                    <a:lnR w="9525" cap="flat" cmpd="sng" algn="ctr">
+                      <a:solidFill>
+                        <a:srgbClr val="000000"/>
+                      </a:solidFill>
+                      <a:prstDash val="solid"/>
+                    </a:lnR>
+                    <a:lnT w="9525" cap="flat" cmpd="sng" algn="ctr">
+                      <a:solidFill>
+                        <a:srgbClr val="000000"/>
+                      </a:solidFill>
+                      <a:prstDash val="solid"/>
+                    </a:lnT>
+                    <a:lnB w="9525" cap="flat" cmpd="sng" algn="ctr">
+                      <a:solidFill>
+                        <a:srgbClr val="000000"/>
+                      </a:solidFill>
+                      <a:prstDash val="solid"/>
+                    </a:lnB>
+                    <a:solidFill>
+                      <a:srgbClr val="FFFFFF"/>
+                    </a:solidFill>
+                  </a:tcPr>
+                </a:tc>
+                <a:tc>
+                  <a:txBody>
+                    <a:bodyPr wrap="square"/>
+                    <a:lstStyle/>
+                    <a:p>
+                      <a:pPr algn="l"/>
+                      <a:r>
+                        <a:rPr sz="1050" b="0">
+                          <a:solidFill>
+                            <a:srgbClr val="000000"/>
+                          </a:solidFill>
+                          <a:latin typeface="맑은 고딕"/>
+                        </a:rPr>
+                        <a:t>실장 환경을 넘는 규모로 노드 또는 메모리 type이 늘어나도 결정이 병목이 되지 않고 성능이 늘어난 자원에 비례해 증가해야 한다 (시뮬레이션 평가).</a:t>
+                      </a:r>
+                    </a:p>
+                    <a:p>
+                      <a:pPr algn="l"/>
+                      <a:r>
+                        <a:rPr sz="1050" b="0">
+                          <a:solidFill>
+                            <a:srgbClr val="000000"/>
+                          </a:solidFill>
+                          <a:latin typeface="맑은 고딕"/>
+                        </a:rPr>
+                        <a:t>[측정: Scaling Efficiency &gt; [   ] ]</a:t>
+                      </a:r>
+                    </a:p>
+                  </a:txBody>
+                  <a:tcPr marL="45720" marR="45720" marT="22860" marB="22860" anchor="ctr">
+                    <a:lnL w="9525" cap="flat" cmpd="sng" algn="ctr">
+                      <a:solidFill>
+                        <a:srgbClr val="000000"/>
+                      </a:solidFill>
+                      <a:prstDash val="solid"/>
+                    </a:lnL>
+                    <a:lnR w="9525" cap="flat" cmpd="sng" algn="ctr">
+                      <a:solidFill>
+                        <a:srgbClr val="000000"/>
+                      </a:solidFill>
+                      <a:prstDash val="solid"/>
+                    </a:lnR>
+                    <a:lnT w="9525" cap="flat" cmpd="sng" algn="ctr">
+                      <a:solidFill>
+                        <a:srgbClr val="000000"/>
+                      </a:solidFill>
+                      <a:prstDash val="solid"/>
+                    </a:lnT>
+                    <a:lnB w="9525" cap="flat" cmpd="sng" algn="ctr">
+                      <a:solidFill>
+                        <a:srgbClr val="000000"/>
+                      </a:solidFill>
+                      <a:prstDash val="solid"/>
+                    </a:lnB>
+                    <a:solidFill>
+                      <a:srgbClr val="FFFFFF"/>
+                    </a:solidFill>
+                  </a:tcPr>
+                </a:tc>
+                <a:tc>
+                  <a:txBody>
+                    <a:bodyPr wrap="square"/>
+                    <a:lstStyle/>
+                    <a:p>
+                      <a:pPr algn="ctr"/>
+                      <a:r>
+                        <a:rPr sz="1050" b="0">
+                          <a:solidFill>
+                            <a:srgbClr val="000000"/>
+                          </a:solidFill>
+                          <a:latin typeface="맑은 고딕"/>
+                        </a:rPr>
+                        <a:t>M</a:t>
+                      </a:r>
+                    </a:p>
+                  </a:txBody>
+                  <a:tcPr marL="45720" marR="45720" marT="22860" marB="22860" anchor="ctr">
+                    <a:lnL w="9525" cap="flat" cmpd="sng" algn="ctr">
+                      <a:solidFill>
+                        <a:srgbClr val="000000"/>
+                      </a:solidFill>
+                      <a:prstDash val="solid"/>
+                    </a:lnL>
+                    <a:lnR w="9525" cap="flat" cmpd="sng" algn="ctr">
+                      <a:solidFill>
+                        <a:srgbClr val="000000"/>
+                      </a:solidFill>
+                      <a:prstDash val="solid"/>
+                    </a:lnR>
+                    <a:lnT w="9525" cap="flat" cmpd="sng" algn="ctr">
+                      <a:solidFill>
+                        <a:srgbClr val="000000"/>
+                      </a:solidFill>
+                      <a:prstDash val="solid"/>
+                    </a:lnT>
+                    <a:lnB w="9525" cap="flat" cmpd="sng" algn="ctr">
+                      <a:solidFill>
+                        <a:srgbClr val="000000"/>
+                      </a:solidFill>
+                      <a:prstDash val="solid"/>
+                    </a:lnB>
+                    <a:solidFill>
+                      <a:srgbClr val="FFFFFF"/>
+                    </a:solidFill>
+                  </a:tcPr>
+                </a:tc>
+                <a:tc>
+                  <a:txBody>
+                    <a:bodyPr wrap="square"/>
+                    <a:lstStyle/>
+                    <a:p>
+                      <a:pPr algn="ctr"/>
+                      <a:r>
+                        <a:rPr sz="1050" b="0">
+                          <a:solidFill>
+                            <a:srgbClr val="000000"/>
+                          </a:solidFill>
+                          <a:latin typeface="맑은 고딕"/>
+                        </a:rPr>
+                        <a:t>H</a:t>
+                      </a:r>
+                    </a:p>
+                  </a:txBody>
+                  <a:tcPr marL="45720" marR="45720" marT="22860" marB="22860" anchor="ctr">
+                    <a:lnL w="9525" cap="flat" cmpd="sng" algn="ctr">
+                      <a:solidFill>
+                        <a:srgbClr val="000000"/>
+                      </a:solidFill>
+                      <a:prstDash val="solid"/>
+                    </a:lnL>
+                    <a:lnR w="9525" cap="flat" cmpd="sng" algn="ctr">
+                      <a:solidFill>
+                        <a:srgbClr val="000000"/>
+                      </a:solidFill>
+                      <a:prstDash val="solid"/>
+                    </a:lnR>
+                    <a:lnT w="9525" cap="flat" cmpd="sng" algn="ctr">
+                      <a:solidFill>
+                        <a:srgbClr val="000000"/>
+                      </a:solidFill>
+                      <a:prstDash val="solid"/>
+                    </a:lnT>
+                    <a:lnB w="9525" cap="flat" cmpd="sng" algn="ctr">
+                      <a:solidFill>
+                        <a:srgbClr val="000000"/>
+                      </a:solidFill>
+                      <a:prstDash val="solid"/>
+                    </a:lnB>
+                    <a:solidFill>
+                      <a:srgbClr val="FFFFFF"/>
+                    </a:solidFill>
+                  </a:tcPr>
+                </a:tc>
+                <a:tc>
+                  <a:txBody>
+                    <a:bodyPr wrap="square"/>
+                    <a:lstStyle/>
+                    <a:p>
+                      <a:pPr algn="ctr"/>
+                      <a:r>
+                        <a:rPr sz="1050" b="0">
+                          <a:solidFill>
+                            <a:srgbClr val="000000"/>
+                          </a:solidFill>
+                          <a:latin typeface="맑은 고딕"/>
+                        </a:rPr>
+                        <a:t/>
+                      </a:r>
+                    </a:p>
+                  </a:txBody>
+                  <a:tcPr marL="45720" marR="45720" marT="22860" marB="22860" anchor="ctr">
+                    <a:lnL w="9525" cap="flat" cmpd="sng" algn="ctr">
+                      <a:solidFill>
+                        <a:srgbClr val="000000"/>
+                      </a:solidFill>
+                      <a:prstDash val="solid"/>
+                    </a:lnL>
+                    <a:lnR w="9525" cap="flat" cmpd="sng" algn="ctr">
+                      <a:solidFill>
+                        <a:srgbClr val="000000"/>
+                      </a:solidFill>
+                      <a:prstDash val="solid"/>
+                    </a:lnR>
+                    <a:lnT w="9525" cap="flat" cmpd="sng" algn="ctr">
+                      <a:solidFill>
+                        <a:srgbClr val="000000"/>
+                      </a:solidFill>
+                      <a:prstDash val="solid"/>
+                    </a:lnT>
+                    <a:lnB w="9525" cap="flat" cmpd="sng" algn="ctr">
+                      <a:solidFill>
+                        <a:srgbClr val="000000"/>
+                      </a:solidFill>
+                      <a:prstDash val="solid"/>
+                    </a:lnB>
+                    <a:solidFill>
+                      <a:srgbClr val="FFFFFF"/>
+                    </a:solidFill>
+                  </a:tcPr>
+                </a:tc>
+                <a:tc>
+                  <a:txBody>
+                    <a:bodyPr wrap="square"/>
+                    <a:lstStyle/>
+                    <a:p>
+                      <a:pPr algn="ctr"/>
+                      <a:r>
+                        <a:rPr sz="1050" b="0">
+                          <a:solidFill>
+                            <a:srgbClr val="000000"/>
+                          </a:solidFill>
+                          <a:latin typeface="맑은 고딕"/>
+                        </a:rPr>
+                        <a:t/>
+                      </a:r>
+                    </a:p>
+                  </a:txBody>
+                  <a:tcPr marL="45720" marR="45720" marT="22860" marB="22860" anchor="ctr">
+                    <a:lnL w="9525" cap="flat" cmpd="sng" algn="ctr">
+                      <a:solidFill>
+                        <a:srgbClr val="000000"/>
+                      </a:solidFill>
+                      <a:prstDash val="solid"/>
+                    </a:lnL>
+                    <a:lnR w="9525" cap="flat" cmpd="sng" algn="ctr">
+                      <a:solidFill>
+                        <a:srgbClr val="000000"/>
+                      </a:solidFill>
+                      <a:prstDash val="solid"/>
+                    </a:lnR>
+                    <a:lnT w="9525" cap="flat" cmpd="sng" algn="ctr">
+                      <a:solidFill>
+                        <a:srgbClr val="000000"/>
+                      </a:solidFill>
+                      <a:prstDash val="solid"/>
+                    </a:lnT>
+                    <a:lnB w="9525" cap="flat" cmpd="sng" algn="ctr">
+                      <a:solidFill>
+                        <a:srgbClr val="000000"/>
+                      </a:solidFill>
+                      <a:prstDash val="solid"/>
+                    </a:lnB>
+                    <a:solidFill>
+                      <a:srgbClr val="FFFFFF"/>
+                    </a:solidFill>
+                  </a:tcPr>
+                </a:tc>
+              </a:tr>
+              <a:tr h="868680">
+                <a:tc>
+                  <a:txBody>
+                    <a:bodyPr wrap="square"/>
+                    <a:lstStyle/>
+                    <a:p>
+                      <a:pPr algn="ctr"/>
+                      <a:r>
+                        <a:rPr sz="1050" b="0">
+                          <a:solidFill>
+                            <a:srgbClr val="000000"/>
+                          </a:solidFill>
+                          <a:latin typeface="맑은 고딕"/>
+                        </a:rPr>
+                        <a:t>QA-06</a:t>
+                      </a:r>
+                    </a:p>
+                  </a:txBody>
+                  <a:tcPr marL="45720" marR="45720" marT="22860" marB="22860" anchor="ctr">
+                    <a:lnL w="9525" cap="flat" cmpd="sng" algn="ctr">
+                      <a:solidFill>
+                        <a:srgbClr val="000000"/>
+                      </a:solidFill>
+                      <a:prstDash val="solid"/>
+                    </a:lnL>
+                    <a:lnR w="9525" cap="flat" cmpd="sng" algn="ctr">
+                      <a:solidFill>
+                        <a:srgbClr val="000000"/>
+                      </a:solidFill>
+                      <a:prstDash val="solid"/>
+                    </a:lnR>
+                    <a:lnT w="9525" cap="flat" cmpd="sng" algn="ctr">
+                      <a:solidFill>
+                        <a:srgbClr val="000000"/>
+                      </a:solidFill>
+                      <a:prstDash val="solid"/>
+                    </a:lnT>
+                    <a:lnB w="9525" cap="flat" cmpd="sng" algn="ctr">
+                      <a:solidFill>
+                        <a:srgbClr val="000000"/>
+                      </a:solidFill>
+                      <a:prstDash val="solid"/>
+                    </a:lnB>
+                    <a:solidFill>
+                      <a:srgbClr val="FFFFFF"/>
+                    </a:solidFill>
+                  </a:tcPr>
+                </a:tc>
+                <a:tc>
+                  <a:txBody>
+                    <a:bodyPr wrap="square"/>
+                    <a:lstStyle/>
+                    <a:p>
+                      <a:pPr algn="ctr"/>
+                      <a:r>
+                        <a:rPr sz="1050" b="0">
+                          <a:solidFill>
+                            <a:srgbClr val="000000"/>
+                          </a:solidFill>
+                          <a:latin typeface="맑은 고딕"/>
+                        </a:rPr>
+                        <a:t>Correctness</a:t>
+                      </a:r>
+                    </a:p>
+                  </a:txBody>
+                  <a:tcPr marL="45720" marR="45720" marT="22860" marB="22860" anchor="ctr">
+                    <a:lnL w="9525" cap="flat" cmpd="sng" algn="ctr">
+                      <a:solidFill>
+                        <a:srgbClr val="000000"/>
+                      </a:solidFill>
+                      <a:prstDash val="solid"/>
+                    </a:lnL>
+                    <a:lnR w="9525" cap="flat" cmpd="sng" algn="ctr">
+                      <a:solidFill>
+                        <a:srgbClr val="000000"/>
+                      </a:solidFill>
+                      <a:prstDash val="solid"/>
+                    </a:lnR>
+                    <a:lnT w="9525" cap="flat" cmpd="sng" algn="ctr">
+                      <a:solidFill>
+                        <a:srgbClr val="000000"/>
+                      </a:solidFill>
+                      <a:prstDash val="solid"/>
+                    </a:lnT>
+                    <a:lnB w="9525" cap="flat" cmpd="sng" algn="ctr">
+                      <a:solidFill>
+                        <a:srgbClr val="000000"/>
+                      </a:solidFill>
+                      <a:prstDash val="solid"/>
+                    </a:lnB>
+                    <a:solidFill>
+                      <a:srgbClr val="FFFFFF"/>
+                    </a:solidFill>
+                  </a:tcPr>
+                </a:tc>
+                <a:tc>
+                  <a:txBody>
+                    <a:bodyPr wrap="square"/>
+                    <a:lstStyle/>
+                    <a:p>
+                      <a:pPr algn="ctr"/>
+                      <a:r>
+                        <a:rPr sz="1050" b="0">
+                          <a:solidFill>
+                            <a:srgbClr val="000000"/>
+                          </a:solidFill>
+                          <a:latin typeface="맑은 고딕"/>
+                        </a:rPr>
+                        <a:t>출력 정확성</a:t>
+                      </a:r>
+                    </a:p>
+                  </a:txBody>
+                  <a:tcPr marL="45720" marR="45720" marT="22860" marB="22860" anchor="ctr">
+                    <a:lnL w="9525" cap="flat" cmpd="sng" algn="ctr">
+                      <a:solidFill>
+                        <a:srgbClr val="000000"/>
+                      </a:solidFill>
+                      <a:prstDash val="solid"/>
+                    </a:lnL>
+                    <a:lnR w="9525" cap="flat" cmpd="sng" algn="ctr">
+                      <a:solidFill>
+                        <a:srgbClr val="000000"/>
+                      </a:solidFill>
+                      <a:prstDash val="solid"/>
+                    </a:lnR>
+                    <a:lnT w="9525" cap="flat" cmpd="sng" algn="ctr">
+                      <a:solidFill>
+                        <a:srgbClr val="000000"/>
+                      </a:solidFill>
+                      <a:prstDash val="solid"/>
+                    </a:lnT>
+                    <a:lnB w="9525" cap="flat" cmpd="sng" algn="ctr">
+                      <a:solidFill>
+                        <a:srgbClr val="000000"/>
+                      </a:solidFill>
+                      <a:prstDash val="solid"/>
+                    </a:lnB>
+                    <a:solidFill>
+                      <a:srgbClr val="FFFFFF"/>
+                    </a:solidFill>
+                  </a:tcPr>
+                </a:tc>
+                <a:tc>
+                  <a:txBody>
+                    <a:bodyPr wrap="square"/>
+                    <a:lstStyle/>
+                    <a:p>
+                      <a:pPr algn="l"/>
+                      <a:r>
+                        <a:rPr sz="1050" b="0">
+                          <a:solidFill>
+                            <a:srgbClr val="000000"/>
+                          </a:solidFill>
+                          <a:latin typeface="맑은 고딕"/>
+                        </a:rPr>
+                        <a:t>데이터 이동·복원·재사용을 거친 요청의 출력이 거치지 않은 경우와 같아야 한다. 손실형 KV 압축·제거는 허용 정확도 한도 안이어야 한다.</a:t>
+                      </a:r>
+                    </a:p>
+                    <a:p>
+                      <a:pPr algn="l"/>
+                      <a:r>
+                        <a:rPr sz="1050" b="0">
+                          <a:solidFill>
+                            <a:srgbClr val="000000"/>
+                          </a:solidFill>
+                          <a:latin typeface="맑은 고딕"/>
+                        </a:rPr>
+                        <a:t>[측정: 출력 불일치 &lt; 1 건 / F1 하락 상대 &lt; 1% ]</a:t>
+                      </a:r>
+                    </a:p>
+                  </a:txBody>
+                  <a:tcPr marL="45720" marR="45720" marT="22860" marB="22860" anchor="ctr">
+                    <a:lnL w="9525" cap="flat" cmpd="sng" algn="ctr">
+                      <a:solidFill>
+                        <a:srgbClr val="000000"/>
+                      </a:solidFill>
+                      <a:prstDash val="solid"/>
+                    </a:lnL>
+                    <a:lnR w="9525" cap="flat" cmpd="sng" algn="ctr">
+                      <a:solidFill>
+                        <a:srgbClr val="000000"/>
+                      </a:solidFill>
+                      <a:prstDash val="solid"/>
+                    </a:lnR>
+                    <a:lnT w="9525" cap="flat" cmpd="sng" algn="ctr">
+                      <a:solidFill>
+                        <a:srgbClr val="000000"/>
+                      </a:solidFill>
+                      <a:prstDash val="solid"/>
+                    </a:lnT>
+                    <a:lnB w="9525" cap="flat" cmpd="sng" algn="ctr">
+                      <a:solidFill>
+                        <a:srgbClr val="000000"/>
+                      </a:solidFill>
+                      <a:prstDash val="solid"/>
+                    </a:lnB>
+                    <a:solidFill>
+                      <a:srgbClr val="FFFFFF"/>
+                    </a:solidFill>
+                  </a:tcPr>
+                </a:tc>
+                <a:tc>
+                  <a:txBody>
+                    <a:bodyPr wrap="square"/>
+                    <a:lstStyle/>
+                    <a:p>
+                      <a:pPr algn="ctr"/>
+                      <a:r>
+                        <a:rPr sz="1050" b="0">
+                          <a:solidFill>
+                            <a:srgbClr val="000000"/>
+                          </a:solidFill>
+                          <a:latin typeface="맑은 고딕"/>
+                        </a:rPr>
+                        <a:t>H</a:t>
+                      </a:r>
+                    </a:p>
+                  </a:txBody>
+                  <a:tcPr marL="45720" marR="45720" marT="22860" marB="22860" anchor="ctr">
+                    <a:lnL w="9525" cap="flat" cmpd="sng" algn="ctr">
+                      <a:solidFill>
+                        <a:srgbClr val="000000"/>
+                      </a:solidFill>
+                      <a:prstDash val="solid"/>
+                    </a:lnL>
+                    <a:lnR w="9525" cap="flat" cmpd="sng" algn="ctr">
+                      <a:solidFill>
+                        <a:srgbClr val="000000"/>
+                      </a:solidFill>
+                      <a:prstDash val="solid"/>
+                    </a:lnR>
+                    <a:lnT w="9525" cap="flat" cmpd="sng" algn="ctr">
+                      <a:solidFill>
+                        <a:srgbClr val="000000"/>
+                      </a:solidFill>
+                      <a:prstDash val="solid"/>
+                    </a:lnT>
+                    <a:lnB w="9525" cap="flat" cmpd="sng" algn="ctr">
+                      <a:solidFill>
+                        <a:srgbClr val="000000"/>
+                      </a:solidFill>
+                      <a:prstDash val="solid"/>
+                    </a:lnB>
+                    <a:solidFill>
+                      <a:srgbClr val="FFFFFF"/>
+                    </a:solidFill>
+                  </a:tcPr>
+                </a:tc>
+                <a:tc>
+                  <a:txBody>
+                    <a:bodyPr wrap="square"/>
+                    <a:lstStyle/>
+                    <a:p>
+                      <a:pPr algn="ctr"/>
+                      <a:r>
+                        <a:rPr sz="1050" b="0">
+                          <a:solidFill>
+                            <a:srgbClr val="000000"/>
+                          </a:solidFill>
+                          <a:latin typeface="맑은 고딕"/>
+                        </a:rPr>
+                        <a:t>H</a:t>
+                      </a:r>
+                    </a:p>
+                  </a:txBody>
+                  <a:tcPr marL="45720" marR="45720" marT="22860" marB="22860" anchor="ctr">
+                    <a:lnL w="9525" cap="flat" cmpd="sng" algn="ctr">
+                      <a:solidFill>
+                        <a:srgbClr val="000000"/>
+                      </a:solidFill>
+                      <a:prstDash val="solid"/>
+                    </a:lnL>
+                    <a:lnR w="9525" cap="flat" cmpd="sng" algn="ctr">
+                      <a:solidFill>
+                        <a:srgbClr val="000000"/>
+                      </a:solidFill>
+                      <a:prstDash val="solid"/>
+                    </a:lnR>
+                    <a:lnT w="9525" cap="flat" cmpd="sng" algn="ctr">
+                      <a:solidFill>
+                        <a:srgbClr val="000000"/>
+                      </a:solidFill>
+                      <a:prstDash val="solid"/>
+                    </a:lnT>
+                    <a:lnB w="9525" cap="flat" cmpd="sng" algn="ctr">
+                      <a:solidFill>
+                        <a:srgbClr val="000000"/>
+                      </a:solidFill>
+                      <a:prstDash val="solid"/>
+                    </a:lnB>
+                    <a:solidFill>
+                      <a:srgbClr val="FFFFFF"/>
+                    </a:solidFill>
+                  </a:tcPr>
+                </a:tc>
+                <a:tc>
+                  <a:txBody>
+                    <a:bodyPr wrap="square"/>
+                    <a:lstStyle/>
+                    <a:p>
+                      <a:pPr algn="ctr"/>
+                      <a:r>
+                        <a:rPr sz="1050" b="0">
+                          <a:solidFill>
+                            <a:srgbClr val="000000"/>
+                          </a:solidFill>
+                          <a:latin typeface="맑은 고딕"/>
+                        </a:rPr>
+                        <a:t/>
+                      </a:r>
+                    </a:p>
+                  </a:txBody>
+                  <a:tcPr marL="45720" marR="45720" marT="22860" marB="22860" anchor="ctr">
+                    <a:lnL w="9525" cap="flat" cmpd="sng" algn="ctr">
+                      <a:solidFill>
+                        <a:srgbClr val="000000"/>
+                      </a:solidFill>
+                      <a:prstDash val="solid"/>
+                    </a:lnL>
+                    <a:lnR w="9525" cap="flat" cmpd="sng" algn="ctr">
+                      <a:solidFill>
+                        <a:srgbClr val="000000"/>
+                      </a:solidFill>
+                      <a:prstDash val="solid"/>
+                    </a:lnR>
+                    <a:lnT w="9525" cap="flat" cmpd="sng" algn="ctr">
+                      <a:solidFill>
+                        <a:srgbClr val="000000"/>
+                      </a:solidFill>
+                      <a:prstDash val="solid"/>
+                    </a:lnT>
+                    <a:lnB w="9525" cap="flat" cmpd="sng" algn="ctr">
+                      <a:solidFill>
+                        <a:srgbClr val="000000"/>
+                      </a:solidFill>
+                      <a:prstDash val="solid"/>
+                    </a:lnB>
+                    <a:solidFill>
+                      <a:srgbClr val="FFFFFF"/>
+                    </a:solidFill>
+                  </a:tcPr>
+                </a:tc>
+                <a:tc>
+                  <a:txBody>
+                    <a:bodyPr wrap="square"/>
+                    <a:lstStyle/>
+                    <a:p>
+                      <a:pPr algn="ctr"/>
+                      <a:r>
+                        <a:rPr sz="1050" b="0">
+                          <a:solidFill>
+                            <a:srgbClr val="000000"/>
+                          </a:solidFill>
+                          <a:latin typeface="맑은 고딕"/>
+                        </a:rPr>
+                        <a:t/>
                       </a:r>
                     </a:p>
                   </a:txBody>
@@ -15609,7 +16375,7 @@
                 </a:solidFill>
                 <a:latin typeface="맑은 고딕"/>
               </a:rPr>
-              <a:t>요구사항 분석 – 품질 속성 유틸리티 트리 [2/3]</a:t>
+              <a:t>요구사항 분석 – 품질 속성 유틸리티 트리 [2/2]</a:t>
             </a:r>
           </a:p>
         </p:txBody>
@@ -15659,7 +16425,7 @@
         </p:nvGraphicFramePr>
         <p:xfrm>
           <a:off x="265176" y="731520"/>
-          <a:ext cx="10789920" cy="5010912"/>
+          <a:ext cx="11475720" cy="4754880"/>
         </p:xfrm>
         <a:graphic>
           <a:graphicData uri="http://schemas.openxmlformats.org/drawingml/2006/table">
@@ -15668,14 +16434,16 @@
                 <a:tableStyleId>{5C22544A-7EE6-4342-B048-85BDC9FD1C3A}</a:tableStyleId>
               </a:tblPr>
               <a:tblGrid>
+                <a:gridCol w="685800"/>
                 <a:gridCol w="1188720"/>
-                <a:gridCol w="1645920"/>
-                <a:gridCol w="6035040"/>
-                <a:gridCol w="640080"/>
-                <a:gridCol w="640080"/>
-                <a:gridCol w="640080"/>
+                <a:gridCol w="1325880"/>
+                <a:gridCol w="5852160"/>
+                <a:gridCol w="594360"/>
+                <a:gridCol w="594360"/>
+                <a:gridCol w="685800"/>
+                <a:gridCol w="548640"/>
               </a:tblGrid>
-              <a:tr h="347472">
+              <a:tr h="411480">
                 <a:tc>
                   <a:txBody>
                     <a:bodyPr wrap="square"/>
@@ -15689,7 +16457,7 @@
                           </a:solidFill>
                           <a:latin typeface="맑은 고딕"/>
                         </a:rPr>
-                        <a:t>Quality Attribute</a:t>
+                        <a:t>번호</a:t>
                       </a:r>
                     </a:p>
                   </a:txBody>
@@ -15736,7 +16504,54 @@
                           </a:solidFill>
                           <a:latin typeface="맑은 고딕"/>
                         </a:rPr>
-                        <a:t>Attribute Refinement</a:t>
+                        <a:t>QA</a:t>
+                      </a:r>
+                    </a:p>
+                  </a:txBody>
+                  <a:tcPr marL="45720" marR="45720" marT="22860" marB="22860" anchor="ctr">
+                    <a:lnL w="9525" cap="flat" cmpd="sng" algn="ctr">
+                      <a:solidFill>
+                        <a:srgbClr val="000000"/>
+                      </a:solidFill>
+                      <a:prstDash val="solid"/>
+                    </a:lnL>
+                    <a:lnR w="9525" cap="flat" cmpd="sng" algn="ctr">
+                      <a:solidFill>
+                        <a:srgbClr val="000000"/>
+                      </a:solidFill>
+                      <a:prstDash val="solid"/>
+                    </a:lnR>
+                    <a:lnT w="9525" cap="flat" cmpd="sng" algn="ctr">
+                      <a:solidFill>
+                        <a:srgbClr val="000000"/>
+                      </a:solidFill>
+                      <a:prstDash val="solid"/>
+                    </a:lnT>
+                    <a:lnB w="9525" cap="flat" cmpd="sng" algn="ctr">
+                      <a:solidFill>
+                        <a:srgbClr val="000000"/>
+                      </a:solidFill>
+                      <a:prstDash val="solid"/>
+                    </a:lnB>
+                    <a:solidFill>
+                      <a:srgbClr val="833C0B"/>
+                    </a:solidFill>
+                  </a:tcPr>
+                </a:tc>
+                <a:tc>
+                  <a:txBody>
+                    <a:bodyPr wrap="square"/>
+                    <a:lstStyle/>
+                    <a:p>
+                      <a:pPr algn="ctr"/>
+                      <a:r>
+                        <a:rPr sz="1100" b="1">
+                          <a:solidFill>
+                            <a:srgbClr val="FFFFFF"/>
+                          </a:solidFill>
+                          <a:latin typeface="맑은 고딕"/>
+                        </a:rPr>
+                        <a:t>Refinement</a:t>
                       </a:r>
                     </a:p>
                   </a:txBody>
@@ -15924,7 +16739,54 @@
                           </a:solidFill>
                           <a:latin typeface="맑은 고딕"/>
                         </a:rPr>
-                        <a:t>순위</a:t>
+                        <a:t>우선순위</a:t>
+                      </a:r>
+                    </a:p>
+                  </a:txBody>
+                  <a:tcPr marL="45720" marR="45720" marT="22860" marB="22860" anchor="ctr">
+                    <a:lnL w="9525" cap="flat" cmpd="sng" algn="ctr">
+                      <a:solidFill>
+                        <a:srgbClr val="000000"/>
+                      </a:solidFill>
+                      <a:prstDash val="solid"/>
+                    </a:lnL>
+                    <a:lnR w="9525" cap="flat" cmpd="sng" algn="ctr">
+                      <a:solidFill>
+                        <a:srgbClr val="000000"/>
+                      </a:solidFill>
+                      <a:prstDash val="solid"/>
+                    </a:lnR>
+                    <a:lnT w="9525" cap="flat" cmpd="sng" algn="ctr">
+                      <a:solidFill>
+                        <a:srgbClr val="000000"/>
+                      </a:solidFill>
+                      <a:prstDash val="solid"/>
+                    </a:lnT>
+                    <a:lnB w="9525" cap="flat" cmpd="sng" algn="ctr">
+                      <a:solidFill>
+                        <a:srgbClr val="000000"/>
+                      </a:solidFill>
+                      <a:prstDash val="solid"/>
+                    </a:lnB>
+                    <a:solidFill>
+                      <a:srgbClr val="833C0B"/>
+                    </a:solidFill>
+                  </a:tcPr>
+                </a:tc>
+                <a:tc>
+                  <a:txBody>
+                    <a:bodyPr wrap="square"/>
+                    <a:lstStyle/>
+                    <a:p>
+                      <a:pPr algn="ctr"/>
+                      <a:r>
+                        <a:rPr sz="1100" b="1">
+                          <a:solidFill>
+                            <a:srgbClr val="FFFFFF"/>
+                          </a:solidFill>
+                          <a:latin typeface="맑은 고딕"/>
+                        </a:rPr>
+                        <a:t>선정</a:t>
                       </a:r>
                     </a:p>
                   </a:txBody>
@@ -15959,7 +16821,7 @@
                   </a:tcPr>
                 </a:tc>
               </a:tr>
-              <a:tr h="777240">
+              <a:tr h="868680">
                 <a:tc>
                   <a:txBody>
                     <a:bodyPr wrap="square"/>
@@ -15973,7 +16835,7 @@
                           </a:solidFill>
                           <a:latin typeface="맑은 고딕"/>
                         </a:rPr>
-                        <a:t>Modifiability</a:t>
+                        <a:t>QA-07</a:t>
                       </a:r>
                     </a:p>
                   </a:txBody>
@@ -16020,7 +16882,54 @@
                           </a:solidFill>
                           <a:latin typeface="맑은 고딕"/>
                         </a:rPr>
-                        <a:t>새 tier 추가</a:t>
+                        <a:t>Co-existence</a:t>
+                      </a:r>
+                    </a:p>
+                  </a:txBody>
+                  <a:tcPr marL="45720" marR="45720" marT="22860" marB="22860" anchor="ctr">
+                    <a:lnL w="9525" cap="flat" cmpd="sng" algn="ctr">
+                      <a:solidFill>
+                        <a:srgbClr val="000000"/>
+                      </a:solidFill>
+                      <a:prstDash val="solid"/>
+                    </a:lnL>
+                    <a:lnR w="9525" cap="flat" cmpd="sng" algn="ctr">
+                      <a:solidFill>
+                        <a:srgbClr val="000000"/>
+                      </a:solidFill>
+                      <a:prstDash val="solid"/>
+                    </a:lnR>
+                    <a:lnT w="9525" cap="flat" cmpd="sng" algn="ctr">
+                      <a:solidFill>
+                        <a:srgbClr val="000000"/>
+                      </a:solidFill>
+                      <a:prstDash val="solid"/>
+                    </a:lnT>
+                    <a:lnB w="9525" cap="flat" cmpd="sng" algn="ctr">
+                      <a:solidFill>
+                        <a:srgbClr val="000000"/>
+                      </a:solidFill>
+                      <a:prstDash val="solid"/>
+                    </a:lnB>
+                    <a:solidFill>
+                      <a:srgbClr val="FFFFFF"/>
+                    </a:solidFill>
+                  </a:tcPr>
+                </a:tc>
+                <a:tc>
+                  <a:txBody>
+                    <a:bodyPr wrap="square"/>
+                    <a:lstStyle/>
+                    <a:p>
+                      <a:pPr algn="ctr"/>
+                      <a:r>
+                        <a:rPr sz="1050" b="0">
+                          <a:solidFill>
+                            <a:srgbClr val="000000"/>
+                          </a:solidFill>
+                          <a:latin typeface="맑은 고딕"/>
+                        </a:rPr>
+                        <a:t>이동 트래픽 공존</a:t>
                       </a:r>
                     </a:p>
                   </a:txBody>
@@ -16067,46 +16976,11 @@
                           </a:solidFill>
                           <a:latin typeface="맑은 고딕"/>
                         </a:rPr>
-                        <a:t>[시스템 개발자] 개발 시점에 새 메모리 tier(HBF, CXL 등) 추가를 요청한다. 대상은 정책·배치 모듈이고, 응답은 인터페이스에 맞춰 tier를 추가하는 것이다. 측정은 변경 모듈이 [        ] 개, 공수가 [        ] man-month 이내이다</a:t>
+                        <a:t>데이터 이동·복원 트래픽과 서빙 요청이 같은 자원을 동시에 쓰는 상황에서도 서빙 성능이 유지되어야 한다.</a:t>
                       </a:r>
                     </a:p>
-                  </a:txBody>
-                  <a:tcPr marL="45720" marR="45720" marT="22860" marB="22860" anchor="ctr">
-                    <a:lnL w="9525" cap="flat" cmpd="sng" algn="ctr">
-                      <a:solidFill>
-                        <a:srgbClr val="000000"/>
-                      </a:solidFill>
-                      <a:prstDash val="solid"/>
-                    </a:lnL>
-                    <a:lnR w="9525" cap="flat" cmpd="sng" algn="ctr">
-                      <a:solidFill>
-                        <a:srgbClr val="000000"/>
-                      </a:solidFill>
-                      <a:prstDash val="solid"/>
-                    </a:lnR>
-                    <a:lnT w="9525" cap="flat" cmpd="sng" algn="ctr">
-                      <a:solidFill>
-                        <a:srgbClr val="000000"/>
-                      </a:solidFill>
-                      <a:prstDash val="solid"/>
-                    </a:lnT>
-                    <a:lnB w="9525" cap="flat" cmpd="sng" algn="ctr">
-                      <a:solidFill>
-                        <a:srgbClr val="000000"/>
-                      </a:solidFill>
-                      <a:prstDash val="solid"/>
-                    </a:lnB>
-                    <a:solidFill>
-                      <a:srgbClr val="FFFFFF"/>
-                    </a:solidFill>
-                  </a:tcPr>
-                </a:tc>
-                <a:tc>
-                  <a:txBody>
-                    <a:bodyPr wrap="square"/>
-                    <a:lstStyle/>
                     <a:p>
-                      <a:pPr algn="ctr"/>
+                      <a:pPr algn="l"/>
                       <a:r>
                         <a:rPr sz="1050" b="0">
                           <a:solidFill>
@@ -16114,7 +16988,7 @@
                           </a:solidFill>
                           <a:latin typeface="맑은 고딕"/>
                         </a:rPr>
-                        <a:t>H</a:t>
+                        <a:t>[측정: 서빙 TTFT·TPOT 증가율 &lt; 10% ]</a:t>
                       </a:r>
                     </a:p>
                   </a:txBody>
@@ -16208,56 +17082,7 @@
                           </a:solidFill>
                           <a:latin typeface="맑은 고딕"/>
                         </a:rPr>
-                        <a:t/>
-                      </a:r>
-                    </a:p>
-                  </a:txBody>
-                  <a:tcPr marL="45720" marR="45720" marT="22860" marB="22860" anchor="ctr">
-                    <a:lnL w="9525" cap="flat" cmpd="sng" algn="ctr">
-                      <a:solidFill>
-                        <a:srgbClr val="000000"/>
-                      </a:solidFill>
-                      <a:prstDash val="solid"/>
-                    </a:lnL>
-                    <a:lnR w="9525" cap="flat" cmpd="sng" algn="ctr">
-                      <a:solidFill>
-                        <a:srgbClr val="000000"/>
-                      </a:solidFill>
-                      <a:prstDash val="solid"/>
-                    </a:lnR>
-                    <a:lnT w="9525" cap="flat" cmpd="sng" algn="ctr">
-                      <a:solidFill>
-                        <a:srgbClr val="000000"/>
-                      </a:solidFill>
-                      <a:prstDash val="solid"/>
-                    </a:lnT>
-                    <a:lnB w="9525" cap="flat" cmpd="sng" algn="ctr">
-                      <a:solidFill>
-                        <a:srgbClr val="000000"/>
-                      </a:solidFill>
-                      <a:prstDash val="solid"/>
-                    </a:lnB>
-                    <a:solidFill>
-                      <a:srgbClr val="FFFFFF"/>
-                    </a:solidFill>
-                  </a:tcPr>
-                </a:tc>
-              </a:tr>
-              <a:tr h="777240">
-                <a:tc>
-                  <a:txBody>
-                    <a:bodyPr wrap="square"/>
-                    <a:lstStyle/>
-                    <a:p>
-                      <a:pPr algn="ctr"/>
-                      <a:r>
-                        <a:rPr sz="1050" b="0">
-                          <a:solidFill>
-                            <a:srgbClr val="000000"/>
-                          </a:solidFill>
-                          <a:latin typeface="맑은 고딕"/>
-                        </a:rPr>
-                        <a:t>Modifiability</a:t>
+                        <a:t>M</a:t>
                       </a:r>
                     </a:p>
                   </a:txBody>
@@ -16304,7 +17129,197 @@
                           </a:solidFill>
                           <a:latin typeface="맑은 고딕"/>
                         </a:rPr>
-                        <a:t>새 정책·객체 추가</a:t>
+                        <a:t/>
+                      </a:r>
+                    </a:p>
+                  </a:txBody>
+                  <a:tcPr marL="45720" marR="45720" marT="22860" marB="22860" anchor="ctr">
+                    <a:lnL w="9525" cap="flat" cmpd="sng" algn="ctr">
+                      <a:solidFill>
+                        <a:srgbClr val="000000"/>
+                      </a:solidFill>
+                      <a:prstDash val="solid"/>
+                    </a:lnL>
+                    <a:lnR w="9525" cap="flat" cmpd="sng" algn="ctr">
+                      <a:solidFill>
+                        <a:srgbClr val="000000"/>
+                      </a:solidFill>
+                      <a:prstDash val="solid"/>
+                    </a:lnR>
+                    <a:lnT w="9525" cap="flat" cmpd="sng" algn="ctr">
+                      <a:solidFill>
+                        <a:srgbClr val="000000"/>
+                      </a:solidFill>
+                      <a:prstDash val="solid"/>
+                    </a:lnT>
+                    <a:lnB w="9525" cap="flat" cmpd="sng" algn="ctr">
+                      <a:solidFill>
+                        <a:srgbClr val="000000"/>
+                      </a:solidFill>
+                      <a:prstDash val="solid"/>
+                    </a:lnB>
+                    <a:solidFill>
+                      <a:srgbClr val="FFFFFF"/>
+                    </a:solidFill>
+                  </a:tcPr>
+                </a:tc>
+                <a:tc>
+                  <a:txBody>
+                    <a:bodyPr wrap="square"/>
+                    <a:lstStyle/>
+                    <a:p>
+                      <a:pPr algn="ctr"/>
+                      <a:r>
+                        <a:rPr sz="1050" b="0">
+                          <a:solidFill>
+                            <a:srgbClr val="000000"/>
+                          </a:solidFill>
+                          <a:latin typeface="맑은 고딕"/>
+                        </a:rPr>
+                        <a:t/>
+                      </a:r>
+                    </a:p>
+                  </a:txBody>
+                  <a:tcPr marL="45720" marR="45720" marT="22860" marB="22860" anchor="ctr">
+                    <a:lnL w="9525" cap="flat" cmpd="sng" algn="ctr">
+                      <a:solidFill>
+                        <a:srgbClr val="000000"/>
+                      </a:solidFill>
+                      <a:prstDash val="solid"/>
+                    </a:lnL>
+                    <a:lnR w="9525" cap="flat" cmpd="sng" algn="ctr">
+                      <a:solidFill>
+                        <a:srgbClr val="000000"/>
+                      </a:solidFill>
+                      <a:prstDash val="solid"/>
+                    </a:lnR>
+                    <a:lnT w="9525" cap="flat" cmpd="sng" algn="ctr">
+                      <a:solidFill>
+                        <a:srgbClr val="000000"/>
+                      </a:solidFill>
+                      <a:prstDash val="solid"/>
+                    </a:lnT>
+                    <a:lnB w="9525" cap="flat" cmpd="sng" algn="ctr">
+                      <a:solidFill>
+                        <a:srgbClr val="000000"/>
+                      </a:solidFill>
+                      <a:prstDash val="solid"/>
+                    </a:lnB>
+                    <a:solidFill>
+                      <a:srgbClr val="FFFFFF"/>
+                    </a:solidFill>
+                  </a:tcPr>
+                </a:tc>
+              </a:tr>
+              <a:tr h="868680">
+                <a:tc>
+                  <a:txBody>
+                    <a:bodyPr wrap="square"/>
+                    <a:lstStyle/>
+                    <a:p>
+                      <a:pPr algn="ctr"/>
+                      <a:r>
+                        <a:rPr sz="1050" b="0">
+                          <a:solidFill>
+                            <a:srgbClr val="000000"/>
+                          </a:solidFill>
+                          <a:latin typeface="맑은 고딕"/>
+                        </a:rPr>
+                        <a:t>QA-08</a:t>
+                      </a:r>
+                    </a:p>
+                  </a:txBody>
+                  <a:tcPr marL="45720" marR="45720" marT="22860" marB="22860" anchor="ctr">
+                    <a:lnL w="9525" cap="flat" cmpd="sng" algn="ctr">
+                      <a:solidFill>
+                        <a:srgbClr val="000000"/>
+                      </a:solidFill>
+                      <a:prstDash val="solid"/>
+                    </a:lnL>
+                    <a:lnR w="9525" cap="flat" cmpd="sng" algn="ctr">
+                      <a:solidFill>
+                        <a:srgbClr val="000000"/>
+                      </a:solidFill>
+                      <a:prstDash val="solid"/>
+                    </a:lnR>
+                    <a:lnT w="9525" cap="flat" cmpd="sng" algn="ctr">
+                      <a:solidFill>
+                        <a:srgbClr val="000000"/>
+                      </a:solidFill>
+                      <a:prstDash val="solid"/>
+                    </a:lnT>
+                    <a:lnB w="9525" cap="flat" cmpd="sng" algn="ctr">
+                      <a:solidFill>
+                        <a:srgbClr val="000000"/>
+                      </a:solidFill>
+                      <a:prstDash val="solid"/>
+                    </a:lnB>
+                    <a:solidFill>
+                      <a:srgbClr val="FFFFFF"/>
+                    </a:solidFill>
+                  </a:tcPr>
+                </a:tc>
+                <a:tc>
+                  <a:txBody>
+                    <a:bodyPr wrap="square"/>
+                    <a:lstStyle/>
+                    <a:p>
+                      <a:pPr algn="ctr"/>
+                      <a:r>
+                        <a:rPr sz="1050" b="0">
+                          <a:solidFill>
+                            <a:srgbClr val="000000"/>
+                          </a:solidFill>
+                          <a:latin typeface="맑은 고딕"/>
+                        </a:rPr>
+                        <a:t>Interoperability</a:t>
+                      </a:r>
+                    </a:p>
+                  </a:txBody>
+                  <a:tcPr marL="45720" marR="45720" marT="22860" marB="22860" anchor="ctr">
+                    <a:lnL w="9525" cap="flat" cmpd="sng" algn="ctr">
+                      <a:solidFill>
+                        <a:srgbClr val="000000"/>
+                      </a:solidFill>
+                      <a:prstDash val="solid"/>
+                    </a:lnL>
+                    <a:lnR w="9525" cap="flat" cmpd="sng" algn="ctr">
+                      <a:solidFill>
+                        <a:srgbClr val="000000"/>
+                      </a:solidFill>
+                      <a:prstDash val="solid"/>
+                    </a:lnR>
+                    <a:lnT w="9525" cap="flat" cmpd="sng" algn="ctr">
+                      <a:solidFill>
+                        <a:srgbClr val="000000"/>
+                      </a:solidFill>
+                      <a:prstDash val="solid"/>
+                    </a:lnT>
+                    <a:lnB w="9525" cap="flat" cmpd="sng" algn="ctr">
+                      <a:solidFill>
+                        <a:srgbClr val="000000"/>
+                      </a:solidFill>
+                      <a:prstDash val="solid"/>
+                    </a:lnB>
+                    <a:solidFill>
+                      <a:srgbClr val="FFFFFF"/>
+                    </a:solidFill>
+                  </a:tcPr>
+                </a:tc>
+                <a:tc>
+                  <a:txBody>
+                    <a:bodyPr wrap="square"/>
+                    <a:lstStyle/>
+                    <a:p>
+                      <a:pPr algn="ctr"/>
+                      <a:r>
+                        <a:rPr sz="1050" b="0">
+                          <a:solidFill>
+                            <a:srgbClr val="000000"/>
+                          </a:solidFill>
+                          <a:latin typeface="맑은 고딕"/>
+                        </a:rPr>
+                        <a:t>외부 구성요소 연동</a:t>
                       </a:r>
                     </a:p>
                   </a:txBody>
@@ -16351,7 +17366,19 @@
                           </a:solidFill>
                           <a:latin typeface="맑은 고딕"/>
                         </a:rPr>
-                        <a:t>[시스템 개발자] 개발 시점에 새 이동·라우팅 정책 또는 객체 유형을 추가한다. 응답은 서빙 경로 수정 없이 반영하는 것이다. 측정은 변경 모듈이 [        ] 개, 공수가 [        ] 이내이다</a:t>
+                        <a:t>vLLM, llm-d, NIXL 같은 외부 구성요소와 연동할 때 해당 구성요소의 소스를 수정하지 않아야 한다.</a:t>
+                      </a:r>
+                    </a:p>
+                    <a:p>
+                      <a:pPr algn="l"/>
+                      <a:r>
+                        <a:rPr sz="1050" b="0">
+                          <a:solidFill>
+                            <a:srgbClr val="000000"/>
+                          </a:solidFill>
+                          <a:latin typeface="맑은 고딕"/>
+                        </a:rPr>
+                        <a:t>[측정: 무수정 연동 인터페이스 수 ≥ 3 개 ]</a:t>
                       </a:r>
                     </a:p>
                   </a:txBody>
@@ -16526,8 +17553,6 @@
                     </a:solidFill>
                   </a:tcPr>
                 </a:tc>
-              </a:tr>
-              <a:tr h="777240">
                 <a:tc>
                   <a:txBody>
                     <a:bodyPr wrap="square"/>
@@ -16541,7 +17566,56 @@
                           </a:solidFill>
                           <a:latin typeface="맑은 고딕"/>
                         </a:rPr>
-                        <a:t>Scalability</a:t>
+                        <a:t/>
+                      </a:r>
+                    </a:p>
+                  </a:txBody>
+                  <a:tcPr marL="45720" marR="45720" marT="22860" marB="22860" anchor="ctr">
+                    <a:lnL w="9525" cap="flat" cmpd="sng" algn="ctr">
+                      <a:solidFill>
+                        <a:srgbClr val="000000"/>
+                      </a:solidFill>
+                      <a:prstDash val="solid"/>
+                    </a:lnL>
+                    <a:lnR w="9525" cap="flat" cmpd="sng" algn="ctr">
+                      <a:solidFill>
+                        <a:srgbClr val="000000"/>
+                      </a:solidFill>
+                      <a:prstDash val="solid"/>
+                    </a:lnR>
+                    <a:lnT w="9525" cap="flat" cmpd="sng" algn="ctr">
+                      <a:solidFill>
+                        <a:srgbClr val="000000"/>
+                      </a:solidFill>
+                      <a:prstDash val="solid"/>
+                    </a:lnT>
+                    <a:lnB w="9525" cap="flat" cmpd="sng" algn="ctr">
+                      <a:solidFill>
+                        <a:srgbClr val="000000"/>
+                      </a:solidFill>
+                      <a:prstDash val="solid"/>
+                    </a:lnB>
+                    <a:solidFill>
+                      <a:srgbClr val="FFFFFF"/>
+                    </a:solidFill>
+                  </a:tcPr>
+                </a:tc>
+              </a:tr>
+              <a:tr h="868680">
+                <a:tc>
+                  <a:txBody>
+                    <a:bodyPr wrap="square"/>
+                    <a:lstStyle/>
+                    <a:p>
+                      <a:pPr algn="ctr"/>
+                      <a:r>
+                        <a:rPr sz="1050" b="0">
+                          <a:solidFill>
+                            <a:srgbClr val="000000"/>
+                          </a:solidFill>
+                          <a:latin typeface="맑은 고딕"/>
+                        </a:rPr>
+                        <a:t>QA-09</a:t>
                       </a:r>
                     </a:p>
                   </a:txBody>
@@ -16588,7 +17662,54 @@
                           </a:solidFill>
                           <a:latin typeface="맑은 고딕"/>
                         </a:rPr>
-                        <a:t>노드 수 증가</a:t>
+                        <a:t>Fault tolerance</a:t>
+                      </a:r>
+                    </a:p>
+                  </a:txBody>
+                  <a:tcPr marL="45720" marR="45720" marT="22860" marB="22860" anchor="ctr">
+                    <a:lnL w="9525" cap="flat" cmpd="sng" algn="ctr">
+                      <a:solidFill>
+                        <a:srgbClr val="000000"/>
+                      </a:solidFill>
+                      <a:prstDash val="solid"/>
+                    </a:lnL>
+                    <a:lnR w="9525" cap="flat" cmpd="sng" algn="ctr">
+                      <a:solidFill>
+                        <a:srgbClr val="000000"/>
+                      </a:solidFill>
+                      <a:prstDash val="solid"/>
+                    </a:lnR>
+                    <a:lnT w="9525" cap="flat" cmpd="sng" algn="ctr">
+                      <a:solidFill>
+                        <a:srgbClr val="000000"/>
+                      </a:solidFill>
+                      <a:prstDash val="solid"/>
+                    </a:lnT>
+                    <a:lnB w="9525" cap="flat" cmpd="sng" algn="ctr">
+                      <a:solidFill>
+                        <a:srgbClr val="000000"/>
+                      </a:solidFill>
+                      <a:prstDash val="solid"/>
+                    </a:lnB>
+                    <a:solidFill>
+                      <a:srgbClr val="FFFFFF"/>
+                    </a:solidFill>
+                  </a:tcPr>
+                </a:tc>
+                <a:tc>
+                  <a:txBody>
+                    <a:bodyPr wrap="square"/>
+                    <a:lstStyle/>
+                    <a:p>
+                      <a:pPr algn="ctr"/>
+                      <a:r>
+                        <a:rPr sz="1050" b="0">
+                          <a:solidFill>
+                            <a:srgbClr val="000000"/>
+                          </a:solidFill>
+                          <a:latin typeface="맑은 고딕"/>
+                        </a:rPr>
+                        <a:t>전송·offload 실패 대체</a:t>
                       </a:r>
                     </a:p>
                   </a:txBody>
@@ -16635,7 +17756,19 @@
                           </a:solidFill>
                           <a:latin typeface="맑은 고딕"/>
                         </a:rPr>
-                        <a:t>[DP2·4] 환경은 실장이 없는 규모를 포함한 시뮬레이션이다(C-04). 노드 수를 N에서 2N, 4N으로 늘린다. 응답은 결정이 병목이 되지 않고 처리량이 늘어나는 것이다. 측정은 Scaling Efficiency가 [        ] 이상이다</a:t>
+                        <a:t>KV 전송이나 offload가 실패하거나 시간 초과해도 재계산 등 대체 경로로 요청 처리를 이어가야 한다.</a:t>
+                      </a:r>
+                    </a:p>
+                    <a:p>
+                      <a:pPr algn="l"/>
+                      <a:r>
+                        <a:rPr sz="1050" b="0">
+                          <a:solidFill>
+                            <a:srgbClr val="000000"/>
+                          </a:solidFill>
+                          <a:latin typeface="맑은 고딕"/>
+                        </a:rPr>
+                        <a:t>[측정: fallback 성공률 ≥ 99.9% ]</a:t>
                       </a:r>
                     </a:p>
                   </a:txBody>
@@ -16729,7 +17862,7 @@
                           </a:solidFill>
                           <a:latin typeface="맑은 고딕"/>
                         </a:rPr>
-                        <a:t>H</a:t>
+                        <a:t>M</a:t>
                       </a:r>
                     </a:p>
                   </a:txBody>
@@ -16810,8 +17943,6 @@
                     </a:solidFill>
                   </a:tcPr>
                 </a:tc>
-              </a:tr>
-              <a:tr h="777240">
                 <a:tc>
                   <a:txBody>
                     <a:bodyPr wrap="square"/>
@@ -16825,7 +17956,56 @@
                           </a:solidFill>
                           <a:latin typeface="맑은 고딕"/>
                         </a:rPr>
-                        <a:t>Scalability</a:t>
+                        <a:t/>
+                      </a:r>
+                    </a:p>
+                  </a:txBody>
+                  <a:tcPr marL="45720" marR="45720" marT="22860" marB="22860" anchor="ctr">
+                    <a:lnL w="9525" cap="flat" cmpd="sng" algn="ctr">
+                      <a:solidFill>
+                        <a:srgbClr val="000000"/>
+                      </a:solidFill>
+                      <a:prstDash val="solid"/>
+                    </a:lnL>
+                    <a:lnR w="9525" cap="flat" cmpd="sng" algn="ctr">
+                      <a:solidFill>
+                        <a:srgbClr val="000000"/>
+                      </a:solidFill>
+                      <a:prstDash val="solid"/>
+                    </a:lnR>
+                    <a:lnT w="9525" cap="flat" cmpd="sng" algn="ctr">
+                      <a:solidFill>
+                        <a:srgbClr val="000000"/>
+                      </a:solidFill>
+                      <a:prstDash val="solid"/>
+                    </a:lnT>
+                    <a:lnB w="9525" cap="flat" cmpd="sng" algn="ctr">
+                      <a:solidFill>
+                        <a:srgbClr val="000000"/>
+                      </a:solidFill>
+                      <a:prstDash val="solid"/>
+                    </a:lnB>
+                    <a:solidFill>
+                      <a:srgbClr val="FFFFFF"/>
+                    </a:solidFill>
+                  </a:tcPr>
+                </a:tc>
+              </a:tr>
+              <a:tr h="868680">
+                <a:tc>
+                  <a:txBody>
+                    <a:bodyPr wrap="square"/>
+                    <a:lstStyle/>
+                    <a:p>
+                      <a:pPr algn="ctr"/>
+                      <a:r>
+                        <a:rPr sz="1050" b="0">
+                          <a:solidFill>
+                            <a:srgbClr val="000000"/>
+                          </a:solidFill>
+                          <a:latin typeface="맑은 고딕"/>
+                        </a:rPr>
+                        <a:t>QA-10</a:t>
                       </a:r>
                     </a:p>
                   </a:txBody>
@@ -16872,9 +18052,44 @@
                           </a:solidFill>
                           <a:latin typeface="맑은 고딕"/>
                         </a:rPr>
-                        <a:t>메모리 type 증가</a:t>
+                        <a:t>Analysability</a:t>
                       </a:r>
                     </a:p>
+                  </a:txBody>
+                  <a:tcPr marL="45720" marR="45720" marT="22860" marB="22860" anchor="ctr">
+                    <a:lnL w="9525" cap="flat" cmpd="sng" algn="ctr">
+                      <a:solidFill>
+                        <a:srgbClr val="000000"/>
+                      </a:solidFill>
+                      <a:prstDash val="solid"/>
+                    </a:lnL>
+                    <a:lnR w="9525" cap="flat" cmpd="sng" algn="ctr">
+                      <a:solidFill>
+                        <a:srgbClr val="000000"/>
+                      </a:solidFill>
+                      <a:prstDash val="solid"/>
+                    </a:lnR>
+                    <a:lnT w="9525" cap="flat" cmpd="sng" algn="ctr">
+                      <a:solidFill>
+                        <a:srgbClr val="000000"/>
+                      </a:solidFill>
+                      <a:prstDash val="solid"/>
+                    </a:lnT>
+                    <a:lnB w="9525" cap="flat" cmpd="sng" algn="ctr">
+                      <a:solidFill>
+                        <a:srgbClr val="000000"/>
+                      </a:solidFill>
+                      <a:prstDash val="solid"/>
+                    </a:lnB>
+                    <a:solidFill>
+                      <a:srgbClr val="FFFFFF"/>
+                    </a:solidFill>
+                  </a:tcPr>
+                </a:tc>
+                <a:tc>
+                  <a:txBody>
+                    <a:bodyPr wrap="square"/>
+                    <a:lstStyle/>
                     <a:p>
                       <a:pPr algn="ctr"/>
                       <a:r>
@@ -16884,7 +18099,7 @@
                           </a:solidFill>
                           <a:latin typeface="맑은 고딕"/>
                         </a:rPr>
-                        <a:t>(제안)</a:t>
+                        <a:t>결정 근거 진단</a:t>
                       </a:r>
                     </a:p>
                   </a:txBody>
@@ -16931,7 +18146,66 @@
                           </a:solidFill>
                           <a:latin typeface="맑은 고딕"/>
                         </a:rPr>
-                        <a:t>환경은 스펙 기반 시뮬레이션이다(C-01, C-04). 새 type의 메모리를 tier로 추가한다. 응답은 추가 용량을 활용하며 결정 품질을 유지하는 것이다. 측정은 Capacity scaling efficiency가 [        ] 이상, 결정 지연 증가율이 [        ] 이내, optimality gap이 [        ] 이내이다</a:t>
+                        <a:t>이동·배치·라우팅 결정이 기대와 다를 때 결정 입력과 근거 기록으로 원인을 찾을 수 있어야 한다.</a:t>
+                      </a:r>
+                    </a:p>
+                    <a:p>
+                      <a:pPr algn="l"/>
+                      <a:r>
+                        <a:rPr sz="1050" b="0">
+                          <a:solidFill>
+                            <a:srgbClr val="000000"/>
+                          </a:solidFill>
+                          <a:latin typeface="맑은 고딕"/>
+                        </a:rPr>
+                        <a:t>[측정: 원인 파악 시간 &lt; 1 시간 (개발자 1인, 결정 1건 기준) ]</a:t>
+                      </a:r>
+                    </a:p>
+                  </a:txBody>
+                  <a:tcPr marL="45720" marR="45720" marT="22860" marB="22860" anchor="ctr">
+                    <a:lnL w="9525" cap="flat" cmpd="sng" algn="ctr">
+                      <a:solidFill>
+                        <a:srgbClr val="000000"/>
+                      </a:solidFill>
+                      <a:prstDash val="solid"/>
+                    </a:lnL>
+                    <a:lnR w="9525" cap="flat" cmpd="sng" algn="ctr">
+                      <a:solidFill>
+                        <a:srgbClr val="000000"/>
+                      </a:solidFill>
+                      <a:prstDash val="solid"/>
+                    </a:lnR>
+                    <a:lnT w="9525" cap="flat" cmpd="sng" algn="ctr">
+                      <a:solidFill>
+                        <a:srgbClr val="000000"/>
+                      </a:solidFill>
+                      <a:prstDash val="solid"/>
+                    </a:lnT>
+                    <a:lnB w="9525" cap="flat" cmpd="sng" algn="ctr">
+                      <a:solidFill>
+                        <a:srgbClr val="000000"/>
+                      </a:solidFill>
+                      <a:prstDash val="solid"/>
+                    </a:lnB>
+                    <a:solidFill>
+                      <a:srgbClr val="FFFFFF"/>
+                    </a:solidFill>
+                  </a:tcPr>
+                </a:tc>
+                <a:tc>
+                  <a:txBody>
+                    <a:bodyPr wrap="square"/>
+                    <a:lstStyle/>
+                    <a:p>
+                      <a:pPr algn="ctr"/>
+                      <a:r>
+                        <a:rPr sz="1050" b="0">
+                          <a:solidFill>
+                            <a:srgbClr val="000000"/>
+                          </a:solidFill>
+                          <a:latin typeface="맑은 고딕"/>
+                        </a:rPr>
+                        <a:t>L</a:t>
                       </a:r>
                     </a:p>
                   </a:txBody>
@@ -17025,7 +18299,7 @@
                           </a:solidFill>
                           <a:latin typeface="맑은 고딕"/>
                         </a:rPr>
-                        <a:t>M</a:t>
+                        <a:t/>
                       </a:r>
                     </a:p>
                   </a:txBody>
@@ -17107,7 +18381,7 @@
                   </a:tcPr>
                 </a:tc>
               </a:tr>
-              <a:tr h="777240">
+              <a:tr h="868680">
                 <a:tc>
                   <a:txBody>
                     <a:bodyPr wrap="square"/>
@@ -17121,7 +18395,7 @@
                           </a:solidFill>
                           <a:latin typeface="맑은 고딕"/>
                         </a:rPr>
-                        <a:t>Correctness</a:t>
+                        <a:t>QA-11</a:t>
                       </a:r>
                     </a:p>
                   </a:txBody>
@@ -17168,7 +18442,54 @@
                           </a:solidFill>
                           <a:latin typeface="맑은 고딕"/>
                         </a:rPr>
-                        <a:t>출력 bit-exact</a:t>
+                        <a:t>Adaptability</a:t>
+                      </a:r>
+                    </a:p>
+                  </a:txBody>
+                  <a:tcPr marL="45720" marR="45720" marT="22860" marB="22860" anchor="ctr">
+                    <a:lnL w="9525" cap="flat" cmpd="sng" algn="ctr">
+                      <a:solidFill>
+                        <a:srgbClr val="000000"/>
+                      </a:solidFill>
+                      <a:prstDash val="solid"/>
+                    </a:lnL>
+                    <a:lnR w="9525" cap="flat" cmpd="sng" algn="ctr">
+                      <a:solidFill>
+                        <a:srgbClr val="000000"/>
+                      </a:solidFill>
+                      <a:prstDash val="solid"/>
+                    </a:lnR>
+                    <a:lnT w="9525" cap="flat" cmpd="sng" algn="ctr">
+                      <a:solidFill>
+                        <a:srgbClr val="000000"/>
+                      </a:solidFill>
+                      <a:prstDash val="solid"/>
+                    </a:lnT>
+                    <a:lnB w="9525" cap="flat" cmpd="sng" algn="ctr">
+                      <a:solidFill>
+                        <a:srgbClr val="000000"/>
+                      </a:solidFill>
+                      <a:prstDash val="solid"/>
+                    </a:lnB>
+                    <a:solidFill>
+                      <a:srgbClr val="FFFFFF"/>
+                    </a:solidFill>
+                  </a:tcPr>
+                </a:tc>
+                <a:tc>
+                  <a:txBody>
+                    <a:bodyPr wrap="square"/>
+                    <a:lstStyle/>
+                    <a:p>
+                      <a:pPr algn="ctr"/>
+                      <a:r>
+                        <a:rPr sz="1050" b="0">
+                          <a:solidFill>
+                            <a:srgbClr val="000000"/>
+                          </a:solidFill>
+                          <a:latin typeface="맑은 고딕"/>
+                        </a:rPr>
+                        <a:t>워크로드 변화 적응</a:t>
                       </a:r>
                     </a:p>
                   </a:txBody>
@@ -17215,7 +18536,19 @@
                           </a:solidFill>
                           <a:latin typeface="맑은 고딕"/>
                         </a:rPr>
-                        <a:t>[DP1·2·4] 같은 precision에서 이동·복원·offload·재사용을 거친 요청이다. 응답은 거치지 않은 경우와 같은 출력을 내는 것이다. 측정은 출력 불일치가 [        ] 건 이내이다</a:t>
+                        <a:t>입력 분포나 접근 패턴이 바뀌어도 접근 통계를 반영해 배치를 다시 맞추고 성능을 회복해야 한다.</a:t>
+                      </a:r>
+                    </a:p>
+                    <a:p>
+                      <a:pPr algn="l"/>
+                      <a:r>
+                        <a:rPr sz="1050" b="0">
+                          <a:solidFill>
+                            <a:srgbClr val="000000"/>
+                          </a:solidFill>
+                          <a:latin typeface="맑은 고딕"/>
+                        </a:rPr>
+                        <a:t>[측정: 성능 회복 시간 &lt; 5 분 (변화 전 성능의 90% 기준) ]</a:t>
                       </a:r>
                     </a:p>
                   </a:txBody>
@@ -17262,7 +18595,7 @@
                           </a:solidFill>
                           <a:latin typeface="맑은 고딕"/>
                         </a:rPr>
-                        <a:t>H</a:t>
+                        <a:t>M</a:t>
                       </a:r>
                     </a:p>
                   </a:txBody>
@@ -17309,7 +18642,7 @@
                           </a:solidFill>
                           <a:latin typeface="맑은 고딕"/>
                         </a:rPr>
-                        <a:t>L</a:t>
+                        <a:t>M</a:t>
                       </a:r>
                     </a:p>
                   </a:txBody>
@@ -17390,953 +18723,6 @@
                     </a:solidFill>
                   </a:tcPr>
                 </a:tc>
-              </a:tr>
-              <a:tr h="777240">
-                <a:tc>
-                  <a:txBody>
-                    <a:bodyPr wrap="square"/>
-                    <a:lstStyle/>
-                    <a:p>
-                      <a:pPr algn="ctr"/>
-                      <a:r>
-                        <a:rPr sz="1050" b="0">
-                          <a:solidFill>
-                            <a:srgbClr val="000000"/>
-                          </a:solidFill>
-                          <a:latin typeface="맑은 고딕"/>
-                        </a:rPr>
-                        <a:t>Correctness</a:t>
-                      </a:r>
-                    </a:p>
-                  </a:txBody>
-                  <a:tcPr marL="45720" marR="45720" marT="22860" marB="22860" anchor="ctr">
-                    <a:lnL w="9525" cap="flat" cmpd="sng" algn="ctr">
-                      <a:solidFill>
-                        <a:srgbClr val="000000"/>
-                      </a:solidFill>
-                      <a:prstDash val="solid"/>
-                    </a:lnL>
-                    <a:lnR w="9525" cap="flat" cmpd="sng" algn="ctr">
-                      <a:solidFill>
-                        <a:srgbClr val="000000"/>
-                      </a:solidFill>
-                      <a:prstDash val="solid"/>
-                    </a:lnR>
-                    <a:lnT w="9525" cap="flat" cmpd="sng" algn="ctr">
-                      <a:solidFill>
-                        <a:srgbClr val="000000"/>
-                      </a:solidFill>
-                      <a:prstDash val="solid"/>
-                    </a:lnT>
-                    <a:lnB w="9525" cap="flat" cmpd="sng" algn="ctr">
-                      <a:solidFill>
-                        <a:srgbClr val="000000"/>
-                      </a:solidFill>
-                      <a:prstDash val="solid"/>
-                    </a:lnB>
-                    <a:solidFill>
-                      <a:srgbClr val="FFFFFF"/>
-                    </a:solidFill>
-                  </a:tcPr>
-                </a:tc>
-                <a:tc>
-                  <a:txBody>
-                    <a:bodyPr wrap="square"/>
-                    <a:lstStyle/>
-                    <a:p>
-                      <a:pPr algn="ctr"/>
-                      <a:r>
-                        <a:rPr sz="1050" b="0">
-                          <a:solidFill>
-                            <a:srgbClr val="000000"/>
-                          </a:solidFill>
-                          <a:latin typeface="맑은 고딕"/>
-                        </a:rPr>
-                        <a:t>Drop 후 정확도</a:t>
-                      </a:r>
-                    </a:p>
-                    <a:p>
-                      <a:pPr algn="ctr"/>
-                      <a:r>
-                        <a:rPr sz="1050" b="0">
-                          <a:solidFill>
-                            <a:srgbClr val="000000"/>
-                          </a:solidFill>
-                          <a:latin typeface="맑은 고딕"/>
-                        </a:rPr>
-                        <a:t>(DP3)</a:t>
-                      </a:r>
-                    </a:p>
-                  </a:txBody>
-                  <a:tcPr marL="45720" marR="45720" marT="22860" marB="22860" anchor="ctr">
-                    <a:lnL w="9525" cap="flat" cmpd="sng" algn="ctr">
-                      <a:solidFill>
-                        <a:srgbClr val="000000"/>
-                      </a:solidFill>
-                      <a:prstDash val="solid"/>
-                    </a:lnL>
-                    <a:lnR w="9525" cap="flat" cmpd="sng" algn="ctr">
-                      <a:solidFill>
-                        <a:srgbClr val="000000"/>
-                      </a:solidFill>
-                      <a:prstDash val="solid"/>
-                    </a:lnR>
-                    <a:lnT w="9525" cap="flat" cmpd="sng" algn="ctr">
-                      <a:solidFill>
-                        <a:srgbClr val="000000"/>
-                      </a:solidFill>
-                      <a:prstDash val="solid"/>
-                    </a:lnT>
-                    <a:lnB w="9525" cap="flat" cmpd="sng" algn="ctr">
-                      <a:solidFill>
-                        <a:srgbClr val="000000"/>
-                      </a:solidFill>
-                      <a:prstDash val="solid"/>
-                    </a:lnB>
-                    <a:solidFill>
-                      <a:srgbClr val="FFFFFF"/>
-                    </a:solidFill>
-                  </a:tcPr>
-                </a:tc>
-                <a:tc>
-                  <a:txBody>
-                    <a:bodyPr wrap="square"/>
-                    <a:lstStyle/>
-                    <a:p>
-                      <a:pPr algn="l"/>
-                      <a:r>
-                        <a:rPr sz="1050" b="0">
-                          <a:solidFill>
-                            <a:srgbClr val="000000"/>
-                          </a:solidFill>
-                          <a:latin typeface="맑은 고딕"/>
-                        </a:rPr>
-                        <a:t>[DP3] 중요도 기반 Drop·압축 재사용을 적용한다. 환경은 지정 task와 dataset(미정)이다. 응답은 정확도 한도 안에서 Drop하는 것이다. 측정은 압축 전 + full recompute 대비 F1 하락이 상대 [        ] 이내이다</a:t>
-                      </a:r>
-                    </a:p>
-                  </a:txBody>
-                  <a:tcPr marL="45720" marR="45720" marT="22860" marB="22860" anchor="ctr">
-                    <a:lnL w="9525" cap="flat" cmpd="sng" algn="ctr">
-                      <a:solidFill>
-                        <a:srgbClr val="000000"/>
-                      </a:solidFill>
-                      <a:prstDash val="solid"/>
-                    </a:lnL>
-                    <a:lnR w="9525" cap="flat" cmpd="sng" algn="ctr">
-                      <a:solidFill>
-                        <a:srgbClr val="000000"/>
-                      </a:solidFill>
-                      <a:prstDash val="solid"/>
-                    </a:lnR>
-                    <a:lnT w="9525" cap="flat" cmpd="sng" algn="ctr">
-                      <a:solidFill>
-                        <a:srgbClr val="000000"/>
-                      </a:solidFill>
-                      <a:prstDash val="solid"/>
-                    </a:lnT>
-                    <a:lnB w="9525" cap="flat" cmpd="sng" algn="ctr">
-                      <a:solidFill>
-                        <a:srgbClr val="000000"/>
-                      </a:solidFill>
-                      <a:prstDash val="solid"/>
-                    </a:lnB>
-                    <a:solidFill>
-                      <a:srgbClr val="FFFFFF"/>
-                    </a:solidFill>
-                  </a:tcPr>
-                </a:tc>
-                <a:tc>
-                  <a:txBody>
-                    <a:bodyPr wrap="square"/>
-                    <a:lstStyle/>
-                    <a:p>
-                      <a:pPr algn="ctr"/>
-                      <a:r>
-                        <a:rPr sz="1050" b="0">
-                          <a:solidFill>
-                            <a:srgbClr val="000000"/>
-                          </a:solidFill>
-                          <a:latin typeface="맑은 고딕"/>
-                        </a:rPr>
-                        <a:t>H</a:t>
-                      </a:r>
-                    </a:p>
-                  </a:txBody>
-                  <a:tcPr marL="45720" marR="45720" marT="22860" marB="22860" anchor="ctr">
-                    <a:lnL w="9525" cap="flat" cmpd="sng" algn="ctr">
-                      <a:solidFill>
-                        <a:srgbClr val="000000"/>
-                      </a:solidFill>
-                      <a:prstDash val="solid"/>
-                    </a:lnL>
-                    <a:lnR w="9525" cap="flat" cmpd="sng" algn="ctr">
-                      <a:solidFill>
-                        <a:srgbClr val="000000"/>
-                      </a:solidFill>
-                      <a:prstDash val="solid"/>
-                    </a:lnR>
-                    <a:lnT w="9525" cap="flat" cmpd="sng" algn="ctr">
-                      <a:solidFill>
-                        <a:srgbClr val="000000"/>
-                      </a:solidFill>
-                      <a:prstDash val="solid"/>
-                    </a:lnT>
-                    <a:lnB w="9525" cap="flat" cmpd="sng" algn="ctr">
-                      <a:solidFill>
-                        <a:srgbClr val="000000"/>
-                      </a:solidFill>
-                      <a:prstDash val="solid"/>
-                    </a:lnB>
-                    <a:solidFill>
-                      <a:srgbClr val="FFFFFF"/>
-                    </a:solidFill>
-                  </a:tcPr>
-                </a:tc>
-                <a:tc>
-                  <a:txBody>
-                    <a:bodyPr wrap="square"/>
-                    <a:lstStyle/>
-                    <a:p>
-                      <a:pPr algn="ctr"/>
-                      <a:r>
-                        <a:rPr sz="1050" b="0">
-                          <a:solidFill>
-                            <a:srgbClr val="000000"/>
-                          </a:solidFill>
-                          <a:latin typeface="맑은 고딕"/>
-                        </a:rPr>
-                        <a:t>H</a:t>
-                      </a:r>
-                    </a:p>
-                  </a:txBody>
-                  <a:tcPr marL="45720" marR="45720" marT="22860" marB="22860" anchor="ctr">
-                    <a:lnL w="9525" cap="flat" cmpd="sng" algn="ctr">
-                      <a:solidFill>
-                        <a:srgbClr val="000000"/>
-                      </a:solidFill>
-                      <a:prstDash val="solid"/>
-                    </a:lnL>
-                    <a:lnR w="9525" cap="flat" cmpd="sng" algn="ctr">
-                      <a:solidFill>
-                        <a:srgbClr val="000000"/>
-                      </a:solidFill>
-                      <a:prstDash val="solid"/>
-                    </a:lnR>
-                    <a:lnT w="9525" cap="flat" cmpd="sng" algn="ctr">
-                      <a:solidFill>
-                        <a:srgbClr val="000000"/>
-                      </a:solidFill>
-                      <a:prstDash val="solid"/>
-                    </a:lnT>
-                    <a:lnB w="9525" cap="flat" cmpd="sng" algn="ctr">
-                      <a:solidFill>
-                        <a:srgbClr val="000000"/>
-                      </a:solidFill>
-                      <a:prstDash val="solid"/>
-                    </a:lnB>
-                    <a:solidFill>
-                      <a:srgbClr val="FFFFFF"/>
-                    </a:solidFill>
-                  </a:tcPr>
-                </a:tc>
-                <a:tc>
-                  <a:txBody>
-                    <a:bodyPr wrap="square"/>
-                    <a:lstStyle/>
-                    <a:p>
-                      <a:pPr algn="ctr"/>
-                      <a:r>
-                        <a:rPr sz="1050" b="0">
-                          <a:solidFill>
-                            <a:srgbClr val="000000"/>
-                          </a:solidFill>
-                          <a:latin typeface="맑은 고딕"/>
-                        </a:rPr>
-                        <a:t>2</a:t>
-                      </a:r>
-                    </a:p>
-                  </a:txBody>
-                  <a:tcPr marL="45720" marR="45720" marT="22860" marB="22860" anchor="ctr">
-                    <a:lnL w="9525" cap="flat" cmpd="sng" algn="ctr">
-                      <a:solidFill>
-                        <a:srgbClr val="000000"/>
-                      </a:solidFill>
-                      <a:prstDash val="solid"/>
-                    </a:lnL>
-                    <a:lnR w="9525" cap="flat" cmpd="sng" algn="ctr">
-                      <a:solidFill>
-                        <a:srgbClr val="000000"/>
-                      </a:solidFill>
-                      <a:prstDash val="solid"/>
-                    </a:lnR>
-                    <a:lnT w="9525" cap="flat" cmpd="sng" algn="ctr">
-                      <a:solidFill>
-                        <a:srgbClr val="000000"/>
-                      </a:solidFill>
-                      <a:prstDash val="solid"/>
-                    </a:lnT>
-                    <a:lnB w="9525" cap="flat" cmpd="sng" algn="ctr">
-                      <a:solidFill>
-                        <a:srgbClr val="000000"/>
-                      </a:solidFill>
-                      <a:prstDash val="solid"/>
-                    </a:lnB>
-                    <a:solidFill>
-                      <a:srgbClr val="FFFFFF"/>
-                    </a:solidFill>
-                  </a:tcPr>
-                </a:tc>
-              </a:tr>
-            </a:tbl>
-          </a:graphicData>
-        </a:graphic>
-      </p:graphicFrame>
-    </p:spTree>
-  </p:cSld>
-  <p:clrMapOvr>
-    <a:masterClrMapping/>
-  </p:clrMapOvr>
-</p:sld>
-</file>
-
-<file path=ppt/slides/slide17.xml><?xml version="1.0" encoding="utf-8"?>
-<p:sld xmlns:a="http://schemas.openxmlformats.org/drawingml/2006/main" xmlns:p="http://schemas.openxmlformats.org/presentationml/2006/main" xmlns:r="http://schemas.openxmlformats.org/officeDocument/2006/relationships">
-  <p:cSld>
-    <p:spTree>
-      <p:nvGrpSpPr>
-        <p:cNvPr id="1" name=""/>
-        <p:cNvGrpSpPr/>
-        <p:nvPr/>
-      </p:nvGrpSpPr>
-      <p:grpSpPr/>
-      <p:sp>
-        <p:nvSpPr>
-          <p:cNvPr id="2" name="TextBox 1"/>
-          <p:cNvSpPr txBox="1"/>
-          <p:nvPr/>
-        </p:nvSpPr>
-        <p:spPr>
-          <a:xfrm>
-            <a:off x="237744" y="91440"/>
-            <a:ext cx="11521440" cy="457200"/>
-          </a:xfrm>
-          <a:prstGeom prst="rect">
-            <a:avLst/>
-          </a:prstGeom>
-          <a:noFill/>
-        </p:spPr>
-        <p:txBody>
-          <a:bodyPr wrap="square" lIns="73152" tIns="27432" rIns="73152" bIns="27432" anchor="ctr">
-            <a:spAutoFit/>
-          </a:bodyPr>
-          <a:lstStyle/>
-          <a:p>
-            <a:pPr algn="l"/>
-            <a:r>
-              <a:rPr sz="2200" b="1" i="0">
-                <a:solidFill>
-                  <a:srgbClr val="000000"/>
-                </a:solidFill>
-                <a:latin typeface="맑은 고딕"/>
-              </a:rPr>
-              <a:t>요구사항 분석 – 품질 속성 유틸리티 트리 [3/3]</a:t>
-            </a:r>
-          </a:p>
-        </p:txBody>
-      </p:sp>
-      <p:cxnSp>
-        <p:nvCxnSpPr>
-          <p:cNvPr id="3" name="Connector 2"/>
-          <p:cNvCxnSpPr/>
-          <p:nvPr/>
-        </p:nvCxnSpPr>
-        <p:spPr>
-          <a:xfrm>
-            <a:off x="237744" y="566928"/>
-            <a:ext cx="11713464" cy="0"/>
-          </a:xfrm>
-          <a:prstGeom prst="line">
-            <a:avLst/>
-          </a:prstGeom>
-          <a:ln w="12700">
-            <a:solidFill>
-              <a:srgbClr val="BFBFBF"/>
-            </a:solidFill>
-          </a:ln>
-        </p:spPr>
-        <p:style>
-          <a:lnRef idx="2">
-            <a:schemeClr val="accent1"/>
-          </a:lnRef>
-          <a:fillRef idx="0">
-            <a:schemeClr val="accent1"/>
-          </a:fillRef>
-          <a:effectRef idx="1">
-            <a:schemeClr val="accent1"/>
-          </a:effectRef>
-          <a:fontRef idx="minor">
-            <a:schemeClr val="tx1"/>
-          </a:fontRef>
-        </p:style>
-      </p:cxnSp>
-      <p:graphicFrame>
-        <p:nvGraphicFramePr>
-          <p:cNvPr id="4" name="Table 3"/>
-          <p:cNvGraphicFramePr>
-            <a:graphicFrameLocks noGrp="1"/>
-          </p:cNvGraphicFramePr>
-          <p:nvPr/>
-        </p:nvGraphicFramePr>
-        <p:xfrm>
-          <a:off x="265176" y="731520"/>
-          <a:ext cx="10789920" cy="4690872"/>
-        </p:xfrm>
-        <a:graphic>
-          <a:graphicData uri="http://schemas.openxmlformats.org/drawingml/2006/table">
-            <a:tbl>
-              <a:tblPr firstRow="0" bandRow="0">
-                <a:tableStyleId>{5C22544A-7EE6-4342-B048-85BDC9FD1C3A}</a:tableStyleId>
-              </a:tblPr>
-              <a:tblGrid>
-                <a:gridCol w="1188720"/>
-                <a:gridCol w="1645920"/>
-                <a:gridCol w="6035040"/>
-                <a:gridCol w="640080"/>
-                <a:gridCol w="640080"/>
-                <a:gridCol w="640080"/>
-              </a:tblGrid>
-              <a:tr h="347472">
-                <a:tc>
-                  <a:txBody>
-                    <a:bodyPr wrap="square"/>
-                    <a:lstStyle/>
-                    <a:p>
-                      <a:pPr algn="ctr"/>
-                      <a:r>
-                        <a:rPr sz="1100" b="1">
-                          <a:solidFill>
-                            <a:srgbClr val="FFFFFF"/>
-                          </a:solidFill>
-                          <a:latin typeface="맑은 고딕"/>
-                        </a:rPr>
-                        <a:t>Quality Attribute</a:t>
-                      </a:r>
-                    </a:p>
-                  </a:txBody>
-                  <a:tcPr marL="45720" marR="45720" marT="22860" marB="22860" anchor="ctr">
-                    <a:lnL w="9525" cap="flat" cmpd="sng" algn="ctr">
-                      <a:solidFill>
-                        <a:srgbClr val="000000"/>
-                      </a:solidFill>
-                      <a:prstDash val="solid"/>
-                    </a:lnL>
-                    <a:lnR w="9525" cap="flat" cmpd="sng" algn="ctr">
-                      <a:solidFill>
-                        <a:srgbClr val="000000"/>
-                      </a:solidFill>
-                      <a:prstDash val="solid"/>
-                    </a:lnR>
-                    <a:lnT w="9525" cap="flat" cmpd="sng" algn="ctr">
-                      <a:solidFill>
-                        <a:srgbClr val="000000"/>
-                      </a:solidFill>
-                      <a:prstDash val="solid"/>
-                    </a:lnT>
-                    <a:lnB w="9525" cap="flat" cmpd="sng" algn="ctr">
-                      <a:solidFill>
-                        <a:srgbClr val="000000"/>
-                      </a:solidFill>
-                      <a:prstDash val="solid"/>
-                    </a:lnB>
-                    <a:solidFill>
-                      <a:srgbClr val="833C0B"/>
-                    </a:solidFill>
-                  </a:tcPr>
-                </a:tc>
-                <a:tc>
-                  <a:txBody>
-                    <a:bodyPr wrap="square"/>
-                    <a:lstStyle/>
-                    <a:p>
-                      <a:pPr algn="ctr"/>
-                      <a:r>
-                        <a:rPr sz="1100" b="1">
-                          <a:solidFill>
-                            <a:srgbClr val="FFFFFF"/>
-                          </a:solidFill>
-                          <a:latin typeface="맑은 고딕"/>
-                        </a:rPr>
-                        <a:t>Attribute Refinement</a:t>
-                      </a:r>
-                    </a:p>
-                  </a:txBody>
-                  <a:tcPr marL="45720" marR="45720" marT="22860" marB="22860" anchor="ctr">
-                    <a:lnL w="9525" cap="flat" cmpd="sng" algn="ctr">
-                      <a:solidFill>
-                        <a:srgbClr val="000000"/>
-                      </a:solidFill>
-                      <a:prstDash val="solid"/>
-                    </a:lnL>
-                    <a:lnR w="9525" cap="flat" cmpd="sng" algn="ctr">
-                      <a:solidFill>
-                        <a:srgbClr val="000000"/>
-                      </a:solidFill>
-                      <a:prstDash val="solid"/>
-                    </a:lnR>
-                    <a:lnT w="9525" cap="flat" cmpd="sng" algn="ctr">
-                      <a:solidFill>
-                        <a:srgbClr val="000000"/>
-                      </a:solidFill>
-                      <a:prstDash val="solid"/>
-                    </a:lnT>
-                    <a:lnB w="9525" cap="flat" cmpd="sng" algn="ctr">
-                      <a:solidFill>
-                        <a:srgbClr val="000000"/>
-                      </a:solidFill>
-                      <a:prstDash val="solid"/>
-                    </a:lnB>
-                    <a:solidFill>
-                      <a:srgbClr val="833C0B"/>
-                    </a:solidFill>
-                  </a:tcPr>
-                </a:tc>
-                <a:tc>
-                  <a:txBody>
-                    <a:bodyPr wrap="square"/>
-                    <a:lstStyle/>
-                    <a:p>
-                      <a:pPr algn="ctr"/>
-                      <a:r>
-                        <a:rPr sz="1100" b="1">
-                          <a:solidFill>
-                            <a:srgbClr val="FFFFFF"/>
-                          </a:solidFill>
-                          <a:latin typeface="맑은 고딕"/>
-                        </a:rPr>
-                        <a:t>Scenario</a:t>
-                      </a:r>
-                    </a:p>
-                  </a:txBody>
-                  <a:tcPr marL="45720" marR="45720" marT="22860" marB="22860" anchor="ctr">
-                    <a:lnL w="9525" cap="flat" cmpd="sng" algn="ctr">
-                      <a:solidFill>
-                        <a:srgbClr val="000000"/>
-                      </a:solidFill>
-                      <a:prstDash val="solid"/>
-                    </a:lnL>
-                    <a:lnR w="9525" cap="flat" cmpd="sng" algn="ctr">
-                      <a:solidFill>
-                        <a:srgbClr val="000000"/>
-                      </a:solidFill>
-                      <a:prstDash val="solid"/>
-                    </a:lnR>
-                    <a:lnT w="9525" cap="flat" cmpd="sng" algn="ctr">
-                      <a:solidFill>
-                        <a:srgbClr val="000000"/>
-                      </a:solidFill>
-                      <a:prstDash val="solid"/>
-                    </a:lnT>
-                    <a:lnB w="9525" cap="flat" cmpd="sng" algn="ctr">
-                      <a:solidFill>
-                        <a:srgbClr val="000000"/>
-                      </a:solidFill>
-                      <a:prstDash val="solid"/>
-                    </a:lnB>
-                    <a:solidFill>
-                      <a:srgbClr val="833C0B"/>
-                    </a:solidFill>
-                  </a:tcPr>
-                </a:tc>
-                <a:tc>
-                  <a:txBody>
-                    <a:bodyPr wrap="square"/>
-                    <a:lstStyle/>
-                    <a:p>
-                      <a:pPr algn="ctr"/>
-                      <a:r>
-                        <a:rPr sz="1100" b="1">
-                          <a:solidFill>
-                            <a:srgbClr val="FFFFFF"/>
-                          </a:solidFill>
-                          <a:latin typeface="맑은 고딕"/>
-                        </a:rPr>
-                        <a:t>중요도</a:t>
-                      </a:r>
-                    </a:p>
-                  </a:txBody>
-                  <a:tcPr marL="45720" marR="45720" marT="22860" marB="22860" anchor="ctr">
-                    <a:lnL w="9525" cap="flat" cmpd="sng" algn="ctr">
-                      <a:solidFill>
-                        <a:srgbClr val="000000"/>
-                      </a:solidFill>
-                      <a:prstDash val="solid"/>
-                    </a:lnL>
-                    <a:lnR w="9525" cap="flat" cmpd="sng" algn="ctr">
-                      <a:solidFill>
-                        <a:srgbClr val="000000"/>
-                      </a:solidFill>
-                      <a:prstDash val="solid"/>
-                    </a:lnR>
-                    <a:lnT w="9525" cap="flat" cmpd="sng" algn="ctr">
-                      <a:solidFill>
-                        <a:srgbClr val="000000"/>
-                      </a:solidFill>
-                      <a:prstDash val="solid"/>
-                    </a:lnT>
-                    <a:lnB w="9525" cap="flat" cmpd="sng" algn="ctr">
-                      <a:solidFill>
-                        <a:srgbClr val="000000"/>
-                      </a:solidFill>
-                      <a:prstDash val="solid"/>
-                    </a:lnB>
-                    <a:solidFill>
-                      <a:srgbClr val="833C0B"/>
-                    </a:solidFill>
-                  </a:tcPr>
-                </a:tc>
-                <a:tc>
-                  <a:txBody>
-                    <a:bodyPr wrap="square"/>
-                    <a:lstStyle/>
-                    <a:p>
-                      <a:pPr algn="ctr"/>
-                      <a:r>
-                        <a:rPr sz="1100" b="1">
-                          <a:solidFill>
-                            <a:srgbClr val="FFFFFF"/>
-                          </a:solidFill>
-                          <a:latin typeface="맑은 고딕"/>
-                        </a:rPr>
-                        <a:t>난이도</a:t>
-                      </a:r>
-                    </a:p>
-                  </a:txBody>
-                  <a:tcPr marL="45720" marR="45720" marT="22860" marB="22860" anchor="ctr">
-                    <a:lnL w="9525" cap="flat" cmpd="sng" algn="ctr">
-                      <a:solidFill>
-                        <a:srgbClr val="000000"/>
-                      </a:solidFill>
-                      <a:prstDash val="solid"/>
-                    </a:lnL>
-                    <a:lnR w="9525" cap="flat" cmpd="sng" algn="ctr">
-                      <a:solidFill>
-                        <a:srgbClr val="000000"/>
-                      </a:solidFill>
-                      <a:prstDash val="solid"/>
-                    </a:lnR>
-                    <a:lnT w="9525" cap="flat" cmpd="sng" algn="ctr">
-                      <a:solidFill>
-                        <a:srgbClr val="000000"/>
-                      </a:solidFill>
-                      <a:prstDash val="solid"/>
-                    </a:lnT>
-                    <a:lnB w="9525" cap="flat" cmpd="sng" algn="ctr">
-                      <a:solidFill>
-                        <a:srgbClr val="000000"/>
-                      </a:solidFill>
-                      <a:prstDash val="solid"/>
-                    </a:lnB>
-                    <a:solidFill>
-                      <a:srgbClr val="833C0B"/>
-                    </a:solidFill>
-                  </a:tcPr>
-                </a:tc>
-                <a:tc>
-                  <a:txBody>
-                    <a:bodyPr wrap="square"/>
-                    <a:lstStyle/>
-                    <a:p>
-                      <a:pPr algn="ctr"/>
-                      <a:r>
-                        <a:rPr sz="1100" b="1">
-                          <a:solidFill>
-                            <a:srgbClr val="FFFFFF"/>
-                          </a:solidFill>
-                          <a:latin typeface="맑은 고딕"/>
-                        </a:rPr>
-                        <a:t>순위</a:t>
-                      </a:r>
-                    </a:p>
-                  </a:txBody>
-                  <a:tcPr marL="45720" marR="45720" marT="22860" marB="22860" anchor="ctr">
-                    <a:lnL w="9525" cap="flat" cmpd="sng" algn="ctr">
-                      <a:solidFill>
-                        <a:srgbClr val="000000"/>
-                      </a:solidFill>
-                      <a:prstDash val="solid"/>
-                    </a:lnL>
-                    <a:lnR w="9525" cap="flat" cmpd="sng" algn="ctr">
-                      <a:solidFill>
-                        <a:srgbClr val="000000"/>
-                      </a:solidFill>
-                      <a:prstDash val="solid"/>
-                    </a:lnR>
-                    <a:lnT w="9525" cap="flat" cmpd="sng" algn="ctr">
-                      <a:solidFill>
-                        <a:srgbClr val="000000"/>
-                      </a:solidFill>
-                      <a:prstDash val="solid"/>
-                    </a:lnT>
-                    <a:lnB w="9525" cap="flat" cmpd="sng" algn="ctr">
-                      <a:solidFill>
-                        <a:srgbClr val="000000"/>
-                      </a:solidFill>
-                      <a:prstDash val="solid"/>
-                    </a:lnB>
-                    <a:solidFill>
-                      <a:srgbClr val="833C0B"/>
-                    </a:solidFill>
-                  </a:tcPr>
-                </a:tc>
-              </a:tr>
-              <a:tr h="868680">
-                <a:tc>
-                  <a:txBody>
-                    <a:bodyPr wrap="square"/>
-                    <a:lstStyle/>
-                    <a:p>
-                      <a:pPr algn="ctr"/>
-                      <a:r>
-                        <a:rPr sz="1050" b="0">
-                          <a:solidFill>
-                            <a:srgbClr val="000000"/>
-                          </a:solidFill>
-                          <a:latin typeface="맑은 고딕"/>
-                        </a:rPr>
-                        <a:t>Compatibility</a:t>
-                      </a:r>
-                    </a:p>
-                    <a:p>
-                      <a:pPr algn="ctr"/>
-                      <a:r>
-                        <a:rPr sz="1050" b="0">
-                          <a:solidFill>
-                            <a:srgbClr val="000000"/>
-                          </a:solidFill>
-                          <a:latin typeface="맑은 고딕"/>
-                        </a:rPr>
-                        <a:t>Co-existence</a:t>
-                      </a:r>
-                    </a:p>
-                  </a:txBody>
-                  <a:tcPr marL="45720" marR="45720" marT="22860" marB="22860" anchor="ctr">
-                    <a:lnL w="9525" cap="flat" cmpd="sng" algn="ctr">
-                      <a:solidFill>
-                        <a:srgbClr val="000000"/>
-                      </a:solidFill>
-                      <a:prstDash val="solid"/>
-                    </a:lnL>
-                    <a:lnR w="9525" cap="flat" cmpd="sng" algn="ctr">
-                      <a:solidFill>
-                        <a:srgbClr val="000000"/>
-                      </a:solidFill>
-                      <a:prstDash val="solid"/>
-                    </a:lnR>
-                    <a:lnT w="9525" cap="flat" cmpd="sng" algn="ctr">
-                      <a:solidFill>
-                        <a:srgbClr val="000000"/>
-                      </a:solidFill>
-                      <a:prstDash val="solid"/>
-                    </a:lnT>
-                    <a:lnB w="9525" cap="flat" cmpd="sng" algn="ctr">
-                      <a:solidFill>
-                        <a:srgbClr val="000000"/>
-                      </a:solidFill>
-                      <a:prstDash val="solid"/>
-                    </a:lnB>
-                    <a:solidFill>
-                      <a:srgbClr val="FFFFFF"/>
-                    </a:solidFill>
-                  </a:tcPr>
-                </a:tc>
-                <a:tc>
-                  <a:txBody>
-                    <a:bodyPr wrap="square"/>
-                    <a:lstStyle/>
-                    <a:p>
-                      <a:pPr algn="ctr"/>
-                      <a:r>
-                        <a:rPr sz="1050" b="0">
-                          <a:solidFill>
-                            <a:srgbClr val="000000"/>
-                          </a:solidFill>
-                          <a:latin typeface="맑은 고딕"/>
-                        </a:rPr>
-                        <a:t>이동 트래픽 공존</a:t>
-                      </a:r>
-                    </a:p>
-                  </a:txBody>
-                  <a:tcPr marL="45720" marR="45720" marT="22860" marB="22860" anchor="ctr">
-                    <a:lnL w="9525" cap="flat" cmpd="sng" algn="ctr">
-                      <a:solidFill>
-                        <a:srgbClr val="000000"/>
-                      </a:solidFill>
-                      <a:prstDash val="solid"/>
-                    </a:lnL>
-                    <a:lnR w="9525" cap="flat" cmpd="sng" algn="ctr">
-                      <a:solidFill>
-                        <a:srgbClr val="000000"/>
-                      </a:solidFill>
-                      <a:prstDash val="solid"/>
-                    </a:lnR>
-                    <a:lnT w="9525" cap="flat" cmpd="sng" algn="ctr">
-                      <a:solidFill>
-                        <a:srgbClr val="000000"/>
-                      </a:solidFill>
-                      <a:prstDash val="solid"/>
-                    </a:lnT>
-                    <a:lnB w="9525" cap="flat" cmpd="sng" algn="ctr">
-                      <a:solidFill>
-                        <a:srgbClr val="000000"/>
-                      </a:solidFill>
-                      <a:prstDash val="solid"/>
-                    </a:lnB>
-                    <a:solidFill>
-                      <a:srgbClr val="FFFFFF"/>
-                    </a:solidFill>
-                  </a:tcPr>
-                </a:tc>
-                <a:tc>
-                  <a:txBody>
-                    <a:bodyPr wrap="square"/>
-                    <a:lstStyle/>
-                    <a:p>
-                      <a:pPr algn="l"/>
-                      <a:r>
-                        <a:rPr sz="1050" b="0">
-                          <a:solidFill>
-                            <a:srgbClr val="000000"/>
-                          </a:solidFill>
-                          <a:latin typeface="맑은 고딕"/>
-                        </a:rPr>
-                        <a:t>[DP1·4] 환경은 이동·복원 트래픽과 서빙 요청이 같은 링크를 동시에 쓰는 혼합 부하이다. 응답은 이동 트래픽을 제한해 서빙을 유지하는 것이다. 측정은 서빙 TTFT·TPOT 증가율이 이동 트래픽이 없을 때 대비 [        ] 이내이다</a:t>
-                      </a:r>
-                    </a:p>
-                  </a:txBody>
-                  <a:tcPr marL="45720" marR="45720" marT="22860" marB="22860" anchor="ctr">
-                    <a:lnL w="9525" cap="flat" cmpd="sng" algn="ctr">
-                      <a:solidFill>
-                        <a:srgbClr val="000000"/>
-                      </a:solidFill>
-                      <a:prstDash val="solid"/>
-                    </a:lnL>
-                    <a:lnR w="9525" cap="flat" cmpd="sng" algn="ctr">
-                      <a:solidFill>
-                        <a:srgbClr val="000000"/>
-                      </a:solidFill>
-                      <a:prstDash val="solid"/>
-                    </a:lnR>
-                    <a:lnT w="9525" cap="flat" cmpd="sng" algn="ctr">
-                      <a:solidFill>
-                        <a:srgbClr val="000000"/>
-                      </a:solidFill>
-                      <a:prstDash val="solid"/>
-                    </a:lnT>
-                    <a:lnB w="9525" cap="flat" cmpd="sng" algn="ctr">
-                      <a:solidFill>
-                        <a:srgbClr val="000000"/>
-                      </a:solidFill>
-                      <a:prstDash val="solid"/>
-                    </a:lnB>
-                    <a:solidFill>
-                      <a:srgbClr val="FFFFFF"/>
-                    </a:solidFill>
-                  </a:tcPr>
-                </a:tc>
-                <a:tc>
-                  <a:txBody>
-                    <a:bodyPr wrap="square"/>
-                    <a:lstStyle/>
-                    <a:p>
-                      <a:pPr algn="ctr"/>
-                      <a:r>
-                        <a:rPr sz="1050" b="0">
-                          <a:solidFill>
-                            <a:srgbClr val="000000"/>
-                          </a:solidFill>
-                          <a:latin typeface="맑은 고딕"/>
-                        </a:rPr>
-                        <a:t>M</a:t>
-                      </a:r>
-                    </a:p>
-                  </a:txBody>
-                  <a:tcPr marL="45720" marR="45720" marT="22860" marB="22860" anchor="ctr">
-                    <a:lnL w="9525" cap="flat" cmpd="sng" algn="ctr">
-                      <a:solidFill>
-                        <a:srgbClr val="000000"/>
-                      </a:solidFill>
-                      <a:prstDash val="solid"/>
-                    </a:lnL>
-                    <a:lnR w="9525" cap="flat" cmpd="sng" algn="ctr">
-                      <a:solidFill>
-                        <a:srgbClr val="000000"/>
-                      </a:solidFill>
-                      <a:prstDash val="solid"/>
-                    </a:lnR>
-                    <a:lnT w="9525" cap="flat" cmpd="sng" algn="ctr">
-                      <a:solidFill>
-                        <a:srgbClr val="000000"/>
-                      </a:solidFill>
-                      <a:prstDash val="solid"/>
-                    </a:lnT>
-                    <a:lnB w="9525" cap="flat" cmpd="sng" algn="ctr">
-                      <a:solidFill>
-                        <a:srgbClr val="000000"/>
-                      </a:solidFill>
-                      <a:prstDash val="solid"/>
-                    </a:lnB>
-                    <a:solidFill>
-                      <a:srgbClr val="FFFFFF"/>
-                    </a:solidFill>
-                  </a:tcPr>
-                </a:tc>
-                <a:tc>
-                  <a:txBody>
-                    <a:bodyPr wrap="square"/>
-                    <a:lstStyle/>
-                    <a:p>
-                      <a:pPr algn="ctr"/>
-                      <a:r>
-                        <a:rPr sz="1050" b="0">
-                          <a:solidFill>
-                            <a:srgbClr val="000000"/>
-                          </a:solidFill>
-                          <a:latin typeface="맑은 고딕"/>
-                        </a:rPr>
-                        <a:t>M</a:t>
-                      </a:r>
-                    </a:p>
-                  </a:txBody>
-                  <a:tcPr marL="45720" marR="45720" marT="22860" marB="22860" anchor="ctr">
-                    <a:lnL w="9525" cap="flat" cmpd="sng" algn="ctr">
-                      <a:solidFill>
-                        <a:srgbClr val="000000"/>
-                      </a:solidFill>
-                      <a:prstDash val="solid"/>
-                    </a:lnL>
-                    <a:lnR w="9525" cap="flat" cmpd="sng" algn="ctr">
-                      <a:solidFill>
-                        <a:srgbClr val="000000"/>
-                      </a:solidFill>
-                      <a:prstDash val="solid"/>
-                    </a:lnR>
-                    <a:lnT w="9525" cap="flat" cmpd="sng" algn="ctr">
-                      <a:solidFill>
-                        <a:srgbClr val="000000"/>
-                      </a:solidFill>
-                      <a:prstDash val="solid"/>
-                    </a:lnT>
-                    <a:lnB w="9525" cap="flat" cmpd="sng" algn="ctr">
-                      <a:solidFill>
-                        <a:srgbClr val="000000"/>
-                      </a:solidFill>
-                      <a:prstDash val="solid"/>
-                    </a:lnB>
-                    <a:solidFill>
-                      <a:srgbClr val="FFFFFF"/>
-                    </a:solidFill>
-                  </a:tcPr>
-                </a:tc>
                 <a:tc>
                   <a:txBody>
                     <a:bodyPr wrap="square"/>
@@ -18385,1190 +18771,6 @@
                   </a:tcPr>
                 </a:tc>
               </a:tr>
-              <a:tr h="868680">
-                <a:tc>
-                  <a:txBody>
-                    <a:bodyPr wrap="square"/>
-                    <a:lstStyle/>
-                    <a:p>
-                      <a:pPr algn="ctr"/>
-                      <a:r>
-                        <a:rPr sz="1050" b="0">
-                          <a:solidFill>
-                            <a:srgbClr val="000000"/>
-                          </a:solidFill>
-                          <a:latin typeface="맑은 고딕"/>
-                        </a:rPr>
-                        <a:t>Compatibility</a:t>
-                      </a:r>
-                    </a:p>
-                    <a:p>
-                      <a:pPr algn="ctr"/>
-                      <a:r>
-                        <a:rPr sz="1050" b="0">
-                          <a:solidFill>
-                            <a:srgbClr val="000000"/>
-                          </a:solidFill>
-                          <a:latin typeface="맑은 고딕"/>
-                        </a:rPr>
-                        <a:t>Interoperability</a:t>
-                      </a:r>
-                    </a:p>
-                  </a:txBody>
-                  <a:tcPr marL="45720" marR="45720" marT="22860" marB="22860" anchor="ctr">
-                    <a:lnL w="9525" cap="flat" cmpd="sng" algn="ctr">
-                      <a:solidFill>
-                        <a:srgbClr val="000000"/>
-                      </a:solidFill>
-                      <a:prstDash val="solid"/>
-                    </a:lnL>
-                    <a:lnR w="9525" cap="flat" cmpd="sng" algn="ctr">
-                      <a:solidFill>
-                        <a:srgbClr val="000000"/>
-                      </a:solidFill>
-                      <a:prstDash val="solid"/>
-                    </a:lnR>
-                    <a:lnT w="9525" cap="flat" cmpd="sng" algn="ctr">
-                      <a:solidFill>
-                        <a:srgbClr val="000000"/>
-                      </a:solidFill>
-                      <a:prstDash val="solid"/>
-                    </a:lnT>
-                    <a:lnB w="9525" cap="flat" cmpd="sng" algn="ctr">
-                      <a:solidFill>
-                        <a:srgbClr val="000000"/>
-                      </a:solidFill>
-                      <a:prstDash val="solid"/>
-                    </a:lnB>
-                    <a:solidFill>
-                      <a:srgbClr val="FFFFFF"/>
-                    </a:solidFill>
-                  </a:tcPr>
-                </a:tc>
-                <a:tc>
-                  <a:txBody>
-                    <a:bodyPr wrap="square"/>
-                    <a:lstStyle/>
-                    <a:p>
-                      <a:pPr algn="ctr"/>
-                      <a:r>
-                        <a:rPr sz="1050" b="0">
-                          <a:solidFill>
-                            <a:srgbClr val="000000"/>
-                          </a:solidFill>
-                          <a:latin typeface="맑은 고딕"/>
-                        </a:rPr>
-                        <a:t>외부 구성요소 연동</a:t>
-                      </a:r>
-                    </a:p>
-                  </a:txBody>
-                  <a:tcPr marL="45720" marR="45720" marT="22860" marB="22860" anchor="ctr">
-                    <a:lnL w="9525" cap="flat" cmpd="sng" algn="ctr">
-                      <a:solidFill>
-                        <a:srgbClr val="000000"/>
-                      </a:solidFill>
-                      <a:prstDash val="solid"/>
-                    </a:lnL>
-                    <a:lnR w="9525" cap="flat" cmpd="sng" algn="ctr">
-                      <a:solidFill>
-                        <a:srgbClr val="000000"/>
-                      </a:solidFill>
-                      <a:prstDash val="solid"/>
-                    </a:lnR>
-                    <a:lnT w="9525" cap="flat" cmpd="sng" algn="ctr">
-                      <a:solidFill>
-                        <a:srgbClr val="000000"/>
-                      </a:solidFill>
-                      <a:prstDash val="solid"/>
-                    </a:lnT>
-                    <a:lnB w="9525" cap="flat" cmpd="sng" algn="ctr">
-                      <a:solidFill>
-                        <a:srgbClr val="000000"/>
-                      </a:solidFill>
-                      <a:prstDash val="solid"/>
-                    </a:lnB>
-                    <a:solidFill>
-                      <a:srgbClr val="FFFFFF"/>
-                    </a:solidFill>
-                  </a:tcPr>
-                </a:tc>
-                <a:tc>
-                  <a:txBody>
-                    <a:bodyPr wrap="square"/>
-                    <a:lstStyle/>
-                    <a:p>
-                      <a:pPr algn="l"/>
-                      <a:r>
-                        <a:rPr sz="1050" b="0">
-                          <a:solidFill>
-                            <a:srgbClr val="000000"/>
-                          </a:solidFill>
-                          <a:latin typeface="맑은 고딕"/>
-                        </a:rPr>
-                        <a:t>[DP4] 개발 시점에 vLLM, llm-d, NIXL 같은 외부 구성요소와 연동한다. 응답은 해당 구성요소의 소스 수정 없이 연동하는 것이다. 측정은 무수정으로 연동되는 인터페이스가 [        ] 개 이상이다</a:t>
-                      </a:r>
-                    </a:p>
-                  </a:txBody>
-                  <a:tcPr marL="45720" marR="45720" marT="22860" marB="22860" anchor="ctr">
-                    <a:lnL w="9525" cap="flat" cmpd="sng" algn="ctr">
-                      <a:solidFill>
-                        <a:srgbClr val="000000"/>
-                      </a:solidFill>
-                      <a:prstDash val="solid"/>
-                    </a:lnL>
-                    <a:lnR w="9525" cap="flat" cmpd="sng" algn="ctr">
-                      <a:solidFill>
-                        <a:srgbClr val="000000"/>
-                      </a:solidFill>
-                      <a:prstDash val="solid"/>
-                    </a:lnR>
-                    <a:lnT w="9525" cap="flat" cmpd="sng" algn="ctr">
-                      <a:solidFill>
-                        <a:srgbClr val="000000"/>
-                      </a:solidFill>
-                      <a:prstDash val="solid"/>
-                    </a:lnT>
-                    <a:lnB w="9525" cap="flat" cmpd="sng" algn="ctr">
-                      <a:solidFill>
-                        <a:srgbClr val="000000"/>
-                      </a:solidFill>
-                      <a:prstDash val="solid"/>
-                    </a:lnB>
-                    <a:solidFill>
-                      <a:srgbClr val="FFFFFF"/>
-                    </a:solidFill>
-                  </a:tcPr>
-                </a:tc>
-                <a:tc>
-                  <a:txBody>
-                    <a:bodyPr wrap="square"/>
-                    <a:lstStyle/>
-                    <a:p>
-                      <a:pPr algn="ctr"/>
-                      <a:r>
-                        <a:rPr sz="1050" b="0">
-                          <a:solidFill>
-                            <a:srgbClr val="000000"/>
-                          </a:solidFill>
-                          <a:latin typeface="맑은 고딕"/>
-                        </a:rPr>
-                        <a:t>M</a:t>
-                      </a:r>
-                    </a:p>
-                  </a:txBody>
-                  <a:tcPr marL="45720" marR="45720" marT="22860" marB="22860" anchor="ctr">
-                    <a:lnL w="9525" cap="flat" cmpd="sng" algn="ctr">
-                      <a:solidFill>
-                        <a:srgbClr val="000000"/>
-                      </a:solidFill>
-                      <a:prstDash val="solid"/>
-                    </a:lnL>
-                    <a:lnR w="9525" cap="flat" cmpd="sng" algn="ctr">
-                      <a:solidFill>
-                        <a:srgbClr val="000000"/>
-                      </a:solidFill>
-                      <a:prstDash val="solid"/>
-                    </a:lnR>
-                    <a:lnT w="9525" cap="flat" cmpd="sng" algn="ctr">
-                      <a:solidFill>
-                        <a:srgbClr val="000000"/>
-                      </a:solidFill>
-                      <a:prstDash val="solid"/>
-                    </a:lnT>
-                    <a:lnB w="9525" cap="flat" cmpd="sng" algn="ctr">
-                      <a:solidFill>
-                        <a:srgbClr val="000000"/>
-                      </a:solidFill>
-                      <a:prstDash val="solid"/>
-                    </a:lnB>
-                    <a:solidFill>
-                      <a:srgbClr val="FFFFFF"/>
-                    </a:solidFill>
-                  </a:tcPr>
-                </a:tc>
-                <a:tc>
-                  <a:txBody>
-                    <a:bodyPr wrap="square"/>
-                    <a:lstStyle/>
-                    <a:p>
-                      <a:pPr algn="ctr"/>
-                      <a:r>
-                        <a:rPr sz="1050" b="0">
-                          <a:solidFill>
-                            <a:srgbClr val="000000"/>
-                          </a:solidFill>
-                          <a:latin typeface="맑은 고딕"/>
-                        </a:rPr>
-                        <a:t>L</a:t>
-                      </a:r>
-                    </a:p>
-                  </a:txBody>
-                  <a:tcPr marL="45720" marR="45720" marT="22860" marB="22860" anchor="ctr">
-                    <a:lnL w="9525" cap="flat" cmpd="sng" algn="ctr">
-                      <a:solidFill>
-                        <a:srgbClr val="000000"/>
-                      </a:solidFill>
-                      <a:prstDash val="solid"/>
-                    </a:lnL>
-                    <a:lnR w="9525" cap="flat" cmpd="sng" algn="ctr">
-                      <a:solidFill>
-                        <a:srgbClr val="000000"/>
-                      </a:solidFill>
-                      <a:prstDash val="solid"/>
-                    </a:lnR>
-                    <a:lnT w="9525" cap="flat" cmpd="sng" algn="ctr">
-                      <a:solidFill>
-                        <a:srgbClr val="000000"/>
-                      </a:solidFill>
-                      <a:prstDash val="solid"/>
-                    </a:lnT>
-                    <a:lnB w="9525" cap="flat" cmpd="sng" algn="ctr">
-                      <a:solidFill>
-                        <a:srgbClr val="000000"/>
-                      </a:solidFill>
-                      <a:prstDash val="solid"/>
-                    </a:lnB>
-                    <a:solidFill>
-                      <a:srgbClr val="FFFFFF"/>
-                    </a:solidFill>
-                  </a:tcPr>
-                </a:tc>
-                <a:tc>
-                  <a:txBody>
-                    <a:bodyPr wrap="square"/>
-                    <a:lstStyle/>
-                    <a:p>
-                      <a:pPr algn="ctr"/>
-                      <a:r>
-                        <a:rPr sz="1050" b="0">
-                          <a:solidFill>
-                            <a:srgbClr val="000000"/>
-                          </a:solidFill>
-                          <a:latin typeface="맑은 고딕"/>
-                        </a:rPr>
-                        <a:t/>
-                      </a:r>
-                    </a:p>
-                  </a:txBody>
-                  <a:tcPr marL="45720" marR="45720" marT="22860" marB="22860" anchor="ctr">
-                    <a:lnL w="9525" cap="flat" cmpd="sng" algn="ctr">
-                      <a:solidFill>
-                        <a:srgbClr val="000000"/>
-                      </a:solidFill>
-                      <a:prstDash val="solid"/>
-                    </a:lnL>
-                    <a:lnR w="9525" cap="flat" cmpd="sng" algn="ctr">
-                      <a:solidFill>
-                        <a:srgbClr val="000000"/>
-                      </a:solidFill>
-                      <a:prstDash val="solid"/>
-                    </a:lnR>
-                    <a:lnT w="9525" cap="flat" cmpd="sng" algn="ctr">
-                      <a:solidFill>
-                        <a:srgbClr val="000000"/>
-                      </a:solidFill>
-                      <a:prstDash val="solid"/>
-                    </a:lnT>
-                    <a:lnB w="9525" cap="flat" cmpd="sng" algn="ctr">
-                      <a:solidFill>
-                        <a:srgbClr val="000000"/>
-                      </a:solidFill>
-                      <a:prstDash val="solid"/>
-                    </a:lnB>
-                    <a:solidFill>
-                      <a:srgbClr val="FFFFFF"/>
-                    </a:solidFill>
-                  </a:tcPr>
-                </a:tc>
-              </a:tr>
-              <a:tr h="868680">
-                <a:tc>
-                  <a:txBody>
-                    <a:bodyPr wrap="square"/>
-                    <a:lstStyle/>
-                    <a:p>
-                      <a:pPr algn="ctr"/>
-                      <a:r>
-                        <a:rPr sz="1050" b="0">
-                          <a:solidFill>
-                            <a:srgbClr val="000000"/>
-                          </a:solidFill>
-                          <a:latin typeface="맑은 고딕"/>
-                        </a:rPr>
-                        <a:t>Reliability</a:t>
-                      </a:r>
-                    </a:p>
-                    <a:p>
-                      <a:pPr algn="ctr"/>
-                      <a:r>
-                        <a:rPr sz="1050" b="0">
-                          <a:solidFill>
-                            <a:srgbClr val="000000"/>
-                          </a:solidFill>
-                          <a:latin typeface="맑은 고딕"/>
-                        </a:rPr>
-                        <a:t>Fault tolerance</a:t>
-                      </a:r>
-                    </a:p>
-                  </a:txBody>
-                  <a:tcPr marL="45720" marR="45720" marT="22860" marB="22860" anchor="ctr">
-                    <a:lnL w="9525" cap="flat" cmpd="sng" algn="ctr">
-                      <a:solidFill>
-                        <a:srgbClr val="000000"/>
-                      </a:solidFill>
-                      <a:prstDash val="solid"/>
-                    </a:lnL>
-                    <a:lnR w="9525" cap="flat" cmpd="sng" algn="ctr">
-                      <a:solidFill>
-                        <a:srgbClr val="000000"/>
-                      </a:solidFill>
-                      <a:prstDash val="solid"/>
-                    </a:lnR>
-                    <a:lnT w="9525" cap="flat" cmpd="sng" algn="ctr">
-                      <a:solidFill>
-                        <a:srgbClr val="000000"/>
-                      </a:solidFill>
-                      <a:prstDash val="solid"/>
-                    </a:lnT>
-                    <a:lnB w="9525" cap="flat" cmpd="sng" algn="ctr">
-                      <a:solidFill>
-                        <a:srgbClr val="000000"/>
-                      </a:solidFill>
-                      <a:prstDash val="solid"/>
-                    </a:lnB>
-                    <a:solidFill>
-                      <a:srgbClr val="FFFFFF"/>
-                    </a:solidFill>
-                  </a:tcPr>
-                </a:tc>
-                <a:tc>
-                  <a:txBody>
-                    <a:bodyPr wrap="square"/>
-                    <a:lstStyle/>
-                    <a:p>
-                      <a:pPr algn="ctr"/>
-                      <a:r>
-                        <a:rPr sz="1050" b="0">
-                          <a:solidFill>
-                            <a:srgbClr val="000000"/>
-                          </a:solidFill>
-                          <a:latin typeface="맑은 고딕"/>
-                        </a:rPr>
-                        <a:t>전송·offload 실패 대체</a:t>
-                      </a:r>
-                    </a:p>
-                  </a:txBody>
-                  <a:tcPr marL="45720" marR="45720" marT="22860" marB="22860" anchor="ctr">
-                    <a:lnL w="9525" cap="flat" cmpd="sng" algn="ctr">
-                      <a:solidFill>
-                        <a:srgbClr val="000000"/>
-                      </a:solidFill>
-                      <a:prstDash val="solid"/>
-                    </a:lnL>
-                    <a:lnR w="9525" cap="flat" cmpd="sng" algn="ctr">
-                      <a:solidFill>
-                        <a:srgbClr val="000000"/>
-                      </a:solidFill>
-                      <a:prstDash val="solid"/>
-                    </a:lnR>
-                    <a:lnT w="9525" cap="flat" cmpd="sng" algn="ctr">
-                      <a:solidFill>
-                        <a:srgbClr val="000000"/>
-                      </a:solidFill>
-                      <a:prstDash val="solid"/>
-                    </a:lnT>
-                    <a:lnB w="9525" cap="flat" cmpd="sng" algn="ctr">
-                      <a:solidFill>
-                        <a:srgbClr val="000000"/>
-                      </a:solidFill>
-                      <a:prstDash val="solid"/>
-                    </a:lnB>
-                    <a:solidFill>
-                      <a:srgbClr val="FFFFFF"/>
-                    </a:solidFill>
-                  </a:tcPr>
-                </a:tc>
-                <a:tc>
-                  <a:txBody>
-                    <a:bodyPr wrap="square"/>
-                    <a:lstStyle/>
-                    <a:p>
-                      <a:pPr algn="l"/>
-                      <a:r>
-                        <a:rPr sz="1050" b="0">
-                          <a:solidFill>
-                            <a:srgbClr val="000000"/>
-                          </a:solidFill>
-                          <a:latin typeface="맑은 고딕"/>
-                        </a:rPr>
-                        <a:t>[DP2·4] KV 전송 또는 offload가 실패하거나 시간 초과한다. 응답은 재계산 등 대체 경로로 요청을 이어가는 것이다. 측정은 fallback 성공률이 [        ] 이상이다</a:t>
-                      </a:r>
-                    </a:p>
-                  </a:txBody>
-                  <a:tcPr marL="45720" marR="45720" marT="22860" marB="22860" anchor="ctr">
-                    <a:lnL w="9525" cap="flat" cmpd="sng" algn="ctr">
-                      <a:solidFill>
-                        <a:srgbClr val="000000"/>
-                      </a:solidFill>
-                      <a:prstDash val="solid"/>
-                    </a:lnL>
-                    <a:lnR w="9525" cap="flat" cmpd="sng" algn="ctr">
-                      <a:solidFill>
-                        <a:srgbClr val="000000"/>
-                      </a:solidFill>
-                      <a:prstDash val="solid"/>
-                    </a:lnR>
-                    <a:lnT w="9525" cap="flat" cmpd="sng" algn="ctr">
-                      <a:solidFill>
-                        <a:srgbClr val="000000"/>
-                      </a:solidFill>
-                      <a:prstDash val="solid"/>
-                    </a:lnT>
-                    <a:lnB w="9525" cap="flat" cmpd="sng" algn="ctr">
-                      <a:solidFill>
-                        <a:srgbClr val="000000"/>
-                      </a:solidFill>
-                      <a:prstDash val="solid"/>
-                    </a:lnB>
-                    <a:solidFill>
-                      <a:srgbClr val="FFFFFF"/>
-                    </a:solidFill>
-                  </a:tcPr>
-                </a:tc>
-                <a:tc>
-                  <a:txBody>
-                    <a:bodyPr wrap="square"/>
-                    <a:lstStyle/>
-                    <a:p>
-                      <a:pPr algn="ctr"/>
-                      <a:r>
-                        <a:rPr sz="1050" b="0">
-                          <a:solidFill>
-                            <a:srgbClr val="000000"/>
-                          </a:solidFill>
-                          <a:latin typeface="맑은 고딕"/>
-                        </a:rPr>
-                        <a:t>M</a:t>
-                      </a:r>
-                    </a:p>
-                  </a:txBody>
-                  <a:tcPr marL="45720" marR="45720" marT="22860" marB="22860" anchor="ctr">
-                    <a:lnL w="9525" cap="flat" cmpd="sng" algn="ctr">
-                      <a:solidFill>
-                        <a:srgbClr val="000000"/>
-                      </a:solidFill>
-                      <a:prstDash val="solid"/>
-                    </a:lnL>
-                    <a:lnR w="9525" cap="flat" cmpd="sng" algn="ctr">
-                      <a:solidFill>
-                        <a:srgbClr val="000000"/>
-                      </a:solidFill>
-                      <a:prstDash val="solid"/>
-                    </a:lnR>
-                    <a:lnT w="9525" cap="flat" cmpd="sng" algn="ctr">
-                      <a:solidFill>
-                        <a:srgbClr val="000000"/>
-                      </a:solidFill>
-                      <a:prstDash val="solid"/>
-                    </a:lnT>
-                    <a:lnB w="9525" cap="flat" cmpd="sng" algn="ctr">
-                      <a:solidFill>
-                        <a:srgbClr val="000000"/>
-                      </a:solidFill>
-                      <a:prstDash val="solid"/>
-                    </a:lnB>
-                    <a:solidFill>
-                      <a:srgbClr val="FFFFFF"/>
-                    </a:solidFill>
-                  </a:tcPr>
-                </a:tc>
-                <a:tc>
-                  <a:txBody>
-                    <a:bodyPr wrap="square"/>
-                    <a:lstStyle/>
-                    <a:p>
-                      <a:pPr algn="ctr"/>
-                      <a:r>
-                        <a:rPr sz="1050" b="0">
-                          <a:solidFill>
-                            <a:srgbClr val="000000"/>
-                          </a:solidFill>
-                          <a:latin typeface="맑은 고딕"/>
-                        </a:rPr>
-                        <a:t>M</a:t>
-                      </a:r>
-                    </a:p>
-                  </a:txBody>
-                  <a:tcPr marL="45720" marR="45720" marT="22860" marB="22860" anchor="ctr">
-                    <a:lnL w="9525" cap="flat" cmpd="sng" algn="ctr">
-                      <a:solidFill>
-                        <a:srgbClr val="000000"/>
-                      </a:solidFill>
-                      <a:prstDash val="solid"/>
-                    </a:lnL>
-                    <a:lnR w="9525" cap="flat" cmpd="sng" algn="ctr">
-                      <a:solidFill>
-                        <a:srgbClr val="000000"/>
-                      </a:solidFill>
-                      <a:prstDash val="solid"/>
-                    </a:lnR>
-                    <a:lnT w="9525" cap="flat" cmpd="sng" algn="ctr">
-                      <a:solidFill>
-                        <a:srgbClr val="000000"/>
-                      </a:solidFill>
-                      <a:prstDash val="solid"/>
-                    </a:lnT>
-                    <a:lnB w="9525" cap="flat" cmpd="sng" algn="ctr">
-                      <a:solidFill>
-                        <a:srgbClr val="000000"/>
-                      </a:solidFill>
-                      <a:prstDash val="solid"/>
-                    </a:lnB>
-                    <a:solidFill>
-                      <a:srgbClr val="FFFFFF"/>
-                    </a:solidFill>
-                  </a:tcPr>
-                </a:tc>
-                <a:tc>
-                  <a:txBody>
-                    <a:bodyPr wrap="square"/>
-                    <a:lstStyle/>
-                    <a:p>
-                      <a:pPr algn="ctr"/>
-                      <a:r>
-                        <a:rPr sz="1050" b="0">
-                          <a:solidFill>
-                            <a:srgbClr val="000000"/>
-                          </a:solidFill>
-                          <a:latin typeface="맑은 고딕"/>
-                        </a:rPr>
-                        <a:t/>
-                      </a:r>
-                    </a:p>
-                  </a:txBody>
-                  <a:tcPr marL="45720" marR="45720" marT="22860" marB="22860" anchor="ctr">
-                    <a:lnL w="9525" cap="flat" cmpd="sng" algn="ctr">
-                      <a:solidFill>
-                        <a:srgbClr val="000000"/>
-                      </a:solidFill>
-                      <a:prstDash val="solid"/>
-                    </a:lnL>
-                    <a:lnR w="9525" cap="flat" cmpd="sng" algn="ctr">
-                      <a:solidFill>
-                        <a:srgbClr val="000000"/>
-                      </a:solidFill>
-                      <a:prstDash val="solid"/>
-                    </a:lnR>
-                    <a:lnT w="9525" cap="flat" cmpd="sng" algn="ctr">
-                      <a:solidFill>
-                        <a:srgbClr val="000000"/>
-                      </a:solidFill>
-                      <a:prstDash val="solid"/>
-                    </a:lnT>
-                    <a:lnB w="9525" cap="flat" cmpd="sng" algn="ctr">
-                      <a:solidFill>
-                        <a:srgbClr val="000000"/>
-                      </a:solidFill>
-                      <a:prstDash val="solid"/>
-                    </a:lnB>
-                    <a:solidFill>
-                      <a:srgbClr val="FFFFFF"/>
-                    </a:solidFill>
-                  </a:tcPr>
-                </a:tc>
-              </a:tr>
-              <a:tr h="868680">
-                <a:tc>
-                  <a:txBody>
-                    <a:bodyPr wrap="square"/>
-                    <a:lstStyle/>
-                    <a:p>
-                      <a:pPr algn="ctr"/>
-                      <a:r>
-                        <a:rPr sz="1050" b="0">
-                          <a:solidFill>
-                            <a:srgbClr val="000000"/>
-                          </a:solidFill>
-                          <a:latin typeface="맑은 고딕"/>
-                        </a:rPr>
-                        <a:t>Maintainability</a:t>
-                      </a:r>
-                    </a:p>
-                    <a:p>
-                      <a:pPr algn="ctr"/>
-                      <a:r>
-                        <a:rPr sz="1050" b="0">
-                          <a:solidFill>
-                            <a:srgbClr val="000000"/>
-                          </a:solidFill>
-                          <a:latin typeface="맑은 고딕"/>
-                        </a:rPr>
-                        <a:t>Analysability</a:t>
-                      </a:r>
-                    </a:p>
-                  </a:txBody>
-                  <a:tcPr marL="45720" marR="45720" marT="22860" marB="22860" anchor="ctr">
-                    <a:lnL w="9525" cap="flat" cmpd="sng" algn="ctr">
-                      <a:solidFill>
-                        <a:srgbClr val="000000"/>
-                      </a:solidFill>
-                      <a:prstDash val="solid"/>
-                    </a:lnL>
-                    <a:lnR w="9525" cap="flat" cmpd="sng" algn="ctr">
-                      <a:solidFill>
-                        <a:srgbClr val="000000"/>
-                      </a:solidFill>
-                      <a:prstDash val="solid"/>
-                    </a:lnR>
-                    <a:lnT w="9525" cap="flat" cmpd="sng" algn="ctr">
-                      <a:solidFill>
-                        <a:srgbClr val="000000"/>
-                      </a:solidFill>
-                      <a:prstDash val="solid"/>
-                    </a:lnT>
-                    <a:lnB w="9525" cap="flat" cmpd="sng" algn="ctr">
-                      <a:solidFill>
-                        <a:srgbClr val="000000"/>
-                      </a:solidFill>
-                      <a:prstDash val="solid"/>
-                    </a:lnB>
-                    <a:solidFill>
-                      <a:srgbClr val="FFFFFF"/>
-                    </a:solidFill>
-                  </a:tcPr>
-                </a:tc>
-                <a:tc>
-                  <a:txBody>
-                    <a:bodyPr wrap="square"/>
-                    <a:lstStyle/>
-                    <a:p>
-                      <a:pPr algn="ctr"/>
-                      <a:r>
-                        <a:rPr sz="1050" b="0">
-                          <a:solidFill>
-                            <a:srgbClr val="000000"/>
-                          </a:solidFill>
-                          <a:latin typeface="맑은 고딕"/>
-                        </a:rPr>
-                        <a:t>결정 근거 진단</a:t>
-                      </a:r>
-                    </a:p>
-                  </a:txBody>
-                  <a:tcPr marL="45720" marR="45720" marT="22860" marB="22860" anchor="ctr">
-                    <a:lnL w="9525" cap="flat" cmpd="sng" algn="ctr">
-                      <a:solidFill>
-                        <a:srgbClr val="000000"/>
-                      </a:solidFill>
-                      <a:prstDash val="solid"/>
-                    </a:lnL>
-                    <a:lnR w="9525" cap="flat" cmpd="sng" algn="ctr">
-                      <a:solidFill>
-                        <a:srgbClr val="000000"/>
-                      </a:solidFill>
-                      <a:prstDash val="solid"/>
-                    </a:lnR>
-                    <a:lnT w="9525" cap="flat" cmpd="sng" algn="ctr">
-                      <a:solidFill>
-                        <a:srgbClr val="000000"/>
-                      </a:solidFill>
-                      <a:prstDash val="solid"/>
-                    </a:lnT>
-                    <a:lnB w="9525" cap="flat" cmpd="sng" algn="ctr">
-                      <a:solidFill>
-                        <a:srgbClr val="000000"/>
-                      </a:solidFill>
-                      <a:prstDash val="solid"/>
-                    </a:lnB>
-                    <a:solidFill>
-                      <a:srgbClr val="FFFFFF"/>
-                    </a:solidFill>
-                  </a:tcPr>
-                </a:tc>
-                <a:tc>
-                  <a:txBody>
-                    <a:bodyPr wrap="square"/>
-                    <a:lstStyle/>
-                    <a:p>
-                      <a:pPr algn="l"/>
-                      <a:r>
-                        <a:rPr sz="1050" b="0">
-                          <a:solidFill>
-                            <a:srgbClr val="000000"/>
-                          </a:solidFill>
-                          <a:latin typeface="맑은 고딕"/>
-                        </a:rPr>
-                        <a:t>[시스템 개발자] 이동·배치·라우팅 결정이 기대와 다르게 나온다. 응답은 결정 입력과 근거 기록으로 원인을 찾는 것이다. 측정은 원인 파악 시간이 [        ] 이내이다</a:t>
-                      </a:r>
-                    </a:p>
-                  </a:txBody>
-                  <a:tcPr marL="45720" marR="45720" marT="22860" marB="22860" anchor="ctr">
-                    <a:lnL w="9525" cap="flat" cmpd="sng" algn="ctr">
-                      <a:solidFill>
-                        <a:srgbClr val="000000"/>
-                      </a:solidFill>
-                      <a:prstDash val="solid"/>
-                    </a:lnL>
-                    <a:lnR w="9525" cap="flat" cmpd="sng" algn="ctr">
-                      <a:solidFill>
-                        <a:srgbClr val="000000"/>
-                      </a:solidFill>
-                      <a:prstDash val="solid"/>
-                    </a:lnR>
-                    <a:lnT w="9525" cap="flat" cmpd="sng" algn="ctr">
-                      <a:solidFill>
-                        <a:srgbClr val="000000"/>
-                      </a:solidFill>
-                      <a:prstDash val="solid"/>
-                    </a:lnT>
-                    <a:lnB w="9525" cap="flat" cmpd="sng" algn="ctr">
-                      <a:solidFill>
-                        <a:srgbClr val="000000"/>
-                      </a:solidFill>
-                      <a:prstDash val="solid"/>
-                    </a:lnB>
-                    <a:solidFill>
-                      <a:srgbClr val="FFFFFF"/>
-                    </a:solidFill>
-                  </a:tcPr>
-                </a:tc>
-                <a:tc>
-                  <a:txBody>
-                    <a:bodyPr wrap="square"/>
-                    <a:lstStyle/>
-                    <a:p>
-                      <a:pPr algn="ctr"/>
-                      <a:r>
-                        <a:rPr sz="1050" b="0">
-                          <a:solidFill>
-                            <a:srgbClr val="000000"/>
-                          </a:solidFill>
-                          <a:latin typeface="맑은 고딕"/>
-                        </a:rPr>
-                        <a:t>L</a:t>
-                      </a:r>
-                    </a:p>
-                  </a:txBody>
-                  <a:tcPr marL="45720" marR="45720" marT="22860" marB="22860" anchor="ctr">
-                    <a:lnL w="9525" cap="flat" cmpd="sng" algn="ctr">
-                      <a:solidFill>
-                        <a:srgbClr val="000000"/>
-                      </a:solidFill>
-                      <a:prstDash val="solid"/>
-                    </a:lnL>
-                    <a:lnR w="9525" cap="flat" cmpd="sng" algn="ctr">
-                      <a:solidFill>
-                        <a:srgbClr val="000000"/>
-                      </a:solidFill>
-                      <a:prstDash val="solid"/>
-                    </a:lnR>
-                    <a:lnT w="9525" cap="flat" cmpd="sng" algn="ctr">
-                      <a:solidFill>
-                        <a:srgbClr val="000000"/>
-                      </a:solidFill>
-                      <a:prstDash val="solid"/>
-                    </a:lnT>
-                    <a:lnB w="9525" cap="flat" cmpd="sng" algn="ctr">
-                      <a:solidFill>
-                        <a:srgbClr val="000000"/>
-                      </a:solidFill>
-                      <a:prstDash val="solid"/>
-                    </a:lnB>
-                    <a:solidFill>
-                      <a:srgbClr val="FFFFFF"/>
-                    </a:solidFill>
-                  </a:tcPr>
-                </a:tc>
-                <a:tc>
-                  <a:txBody>
-                    <a:bodyPr wrap="square"/>
-                    <a:lstStyle/>
-                    <a:p>
-                      <a:pPr algn="ctr"/>
-                      <a:r>
-                        <a:rPr sz="1050" b="0">
-                          <a:solidFill>
-                            <a:srgbClr val="000000"/>
-                          </a:solidFill>
-                          <a:latin typeface="맑은 고딕"/>
-                        </a:rPr>
-                        <a:t>M</a:t>
-                      </a:r>
-                    </a:p>
-                  </a:txBody>
-                  <a:tcPr marL="45720" marR="45720" marT="22860" marB="22860" anchor="ctr">
-                    <a:lnL w="9525" cap="flat" cmpd="sng" algn="ctr">
-                      <a:solidFill>
-                        <a:srgbClr val="000000"/>
-                      </a:solidFill>
-                      <a:prstDash val="solid"/>
-                    </a:lnL>
-                    <a:lnR w="9525" cap="flat" cmpd="sng" algn="ctr">
-                      <a:solidFill>
-                        <a:srgbClr val="000000"/>
-                      </a:solidFill>
-                      <a:prstDash val="solid"/>
-                    </a:lnR>
-                    <a:lnT w="9525" cap="flat" cmpd="sng" algn="ctr">
-                      <a:solidFill>
-                        <a:srgbClr val="000000"/>
-                      </a:solidFill>
-                      <a:prstDash val="solid"/>
-                    </a:lnT>
-                    <a:lnB w="9525" cap="flat" cmpd="sng" algn="ctr">
-                      <a:solidFill>
-                        <a:srgbClr val="000000"/>
-                      </a:solidFill>
-                      <a:prstDash val="solid"/>
-                    </a:lnB>
-                    <a:solidFill>
-                      <a:srgbClr val="FFFFFF"/>
-                    </a:solidFill>
-                  </a:tcPr>
-                </a:tc>
-                <a:tc>
-                  <a:txBody>
-                    <a:bodyPr wrap="square"/>
-                    <a:lstStyle/>
-                    <a:p>
-                      <a:pPr algn="ctr"/>
-                      <a:r>
-                        <a:rPr sz="1050" b="0">
-                          <a:solidFill>
-                            <a:srgbClr val="000000"/>
-                          </a:solidFill>
-                          <a:latin typeface="맑은 고딕"/>
-                        </a:rPr>
-                        <a:t/>
-                      </a:r>
-                    </a:p>
-                  </a:txBody>
-                  <a:tcPr marL="45720" marR="45720" marT="22860" marB="22860" anchor="ctr">
-                    <a:lnL w="9525" cap="flat" cmpd="sng" algn="ctr">
-                      <a:solidFill>
-                        <a:srgbClr val="000000"/>
-                      </a:solidFill>
-                      <a:prstDash val="solid"/>
-                    </a:lnL>
-                    <a:lnR w="9525" cap="flat" cmpd="sng" algn="ctr">
-                      <a:solidFill>
-                        <a:srgbClr val="000000"/>
-                      </a:solidFill>
-                      <a:prstDash val="solid"/>
-                    </a:lnR>
-                    <a:lnT w="9525" cap="flat" cmpd="sng" algn="ctr">
-                      <a:solidFill>
-                        <a:srgbClr val="000000"/>
-                      </a:solidFill>
-                      <a:prstDash val="solid"/>
-                    </a:lnT>
-                    <a:lnB w="9525" cap="flat" cmpd="sng" algn="ctr">
-                      <a:solidFill>
-                        <a:srgbClr val="000000"/>
-                      </a:solidFill>
-                      <a:prstDash val="solid"/>
-                    </a:lnB>
-                    <a:solidFill>
-                      <a:srgbClr val="FFFFFF"/>
-                    </a:solidFill>
-                  </a:tcPr>
-                </a:tc>
-              </a:tr>
-              <a:tr h="868680">
-                <a:tc>
-                  <a:txBody>
-                    <a:bodyPr wrap="square"/>
-                    <a:lstStyle/>
-                    <a:p>
-                      <a:pPr algn="ctr"/>
-                      <a:r>
-                        <a:rPr sz="1050" b="0">
-                          <a:solidFill>
-                            <a:srgbClr val="000000"/>
-                          </a:solidFill>
-                          <a:latin typeface="맑은 고딕"/>
-                        </a:rPr>
-                        <a:t>Flexibility</a:t>
-                      </a:r>
-                    </a:p>
-                    <a:p>
-                      <a:pPr algn="ctr"/>
-                      <a:r>
-                        <a:rPr sz="1050" b="0">
-                          <a:solidFill>
-                            <a:srgbClr val="000000"/>
-                          </a:solidFill>
-                          <a:latin typeface="맑은 고딕"/>
-                        </a:rPr>
-                        <a:t>Adaptability</a:t>
-                      </a:r>
-                    </a:p>
-                  </a:txBody>
-                  <a:tcPr marL="45720" marR="45720" marT="22860" marB="22860" anchor="ctr">
-                    <a:lnL w="9525" cap="flat" cmpd="sng" algn="ctr">
-                      <a:solidFill>
-                        <a:srgbClr val="000000"/>
-                      </a:solidFill>
-                      <a:prstDash val="solid"/>
-                    </a:lnL>
-                    <a:lnR w="9525" cap="flat" cmpd="sng" algn="ctr">
-                      <a:solidFill>
-                        <a:srgbClr val="000000"/>
-                      </a:solidFill>
-                      <a:prstDash val="solid"/>
-                    </a:lnR>
-                    <a:lnT w="9525" cap="flat" cmpd="sng" algn="ctr">
-                      <a:solidFill>
-                        <a:srgbClr val="000000"/>
-                      </a:solidFill>
-                      <a:prstDash val="solid"/>
-                    </a:lnT>
-                    <a:lnB w="9525" cap="flat" cmpd="sng" algn="ctr">
-                      <a:solidFill>
-                        <a:srgbClr val="000000"/>
-                      </a:solidFill>
-                      <a:prstDash val="solid"/>
-                    </a:lnB>
-                    <a:solidFill>
-                      <a:srgbClr val="FFFFFF"/>
-                    </a:solidFill>
-                  </a:tcPr>
-                </a:tc>
-                <a:tc>
-                  <a:txBody>
-                    <a:bodyPr wrap="square"/>
-                    <a:lstStyle/>
-                    <a:p>
-                      <a:pPr algn="ctr"/>
-                      <a:r>
-                        <a:rPr sz="1050" b="0">
-                          <a:solidFill>
-                            <a:srgbClr val="000000"/>
-                          </a:solidFill>
-                          <a:latin typeface="맑은 고딕"/>
-                        </a:rPr>
-                        <a:t>워크로드 변화 적응</a:t>
-                      </a:r>
-                    </a:p>
-                  </a:txBody>
-                  <a:tcPr marL="45720" marR="45720" marT="22860" marB="22860" anchor="ctr">
-                    <a:lnL w="9525" cap="flat" cmpd="sng" algn="ctr">
-                      <a:solidFill>
-                        <a:srgbClr val="000000"/>
-                      </a:solidFill>
-                      <a:prstDash val="solid"/>
-                    </a:lnL>
-                    <a:lnR w="9525" cap="flat" cmpd="sng" algn="ctr">
-                      <a:solidFill>
-                        <a:srgbClr val="000000"/>
-                      </a:solidFill>
-                      <a:prstDash val="solid"/>
-                    </a:lnR>
-                    <a:lnT w="9525" cap="flat" cmpd="sng" algn="ctr">
-                      <a:solidFill>
-                        <a:srgbClr val="000000"/>
-                      </a:solidFill>
-                      <a:prstDash val="solid"/>
-                    </a:lnT>
-                    <a:lnB w="9525" cap="flat" cmpd="sng" algn="ctr">
-                      <a:solidFill>
-                        <a:srgbClr val="000000"/>
-                      </a:solidFill>
-                      <a:prstDash val="solid"/>
-                    </a:lnB>
-                    <a:solidFill>
-                      <a:srgbClr val="FFFFFF"/>
-                    </a:solidFill>
-                  </a:tcPr>
-                </a:tc>
-                <a:tc>
-                  <a:txBody>
-                    <a:bodyPr wrap="square"/>
-                    <a:lstStyle/>
-                    <a:p>
-                      <a:pPr algn="l"/>
-                      <a:r>
-                        <a:rPr sz="1050" b="0">
-                          <a:solidFill>
-                            <a:srgbClr val="000000"/>
-                          </a:solidFill>
-                          <a:latin typeface="맑은 고딕"/>
-                        </a:rPr>
-                        <a:t>[DP1] hot 객체(expert, adapter, 문서)가 입력 분포 변화로 바뀐다. 응답은 접근 통계를 반영해 배치를 다시 맞추는 것이다. 측정은 성능 회복 시간이 [        ] 이내이다</a:t>
-                      </a:r>
-                    </a:p>
-                  </a:txBody>
-                  <a:tcPr marL="45720" marR="45720" marT="22860" marB="22860" anchor="ctr">
-                    <a:lnL w="9525" cap="flat" cmpd="sng" algn="ctr">
-                      <a:solidFill>
-                        <a:srgbClr val="000000"/>
-                      </a:solidFill>
-                      <a:prstDash val="solid"/>
-                    </a:lnL>
-                    <a:lnR w="9525" cap="flat" cmpd="sng" algn="ctr">
-                      <a:solidFill>
-                        <a:srgbClr val="000000"/>
-                      </a:solidFill>
-                      <a:prstDash val="solid"/>
-                    </a:lnR>
-                    <a:lnT w="9525" cap="flat" cmpd="sng" algn="ctr">
-                      <a:solidFill>
-                        <a:srgbClr val="000000"/>
-                      </a:solidFill>
-                      <a:prstDash val="solid"/>
-                    </a:lnT>
-                    <a:lnB w="9525" cap="flat" cmpd="sng" algn="ctr">
-                      <a:solidFill>
-                        <a:srgbClr val="000000"/>
-                      </a:solidFill>
-                      <a:prstDash val="solid"/>
-                    </a:lnB>
-                    <a:solidFill>
-                      <a:srgbClr val="FFFFFF"/>
-                    </a:solidFill>
-                  </a:tcPr>
-                </a:tc>
-                <a:tc>
-                  <a:txBody>
-                    <a:bodyPr wrap="square"/>
-                    <a:lstStyle/>
-                    <a:p>
-                      <a:pPr algn="ctr"/>
-                      <a:r>
-                        <a:rPr sz="1050" b="0">
-                          <a:solidFill>
-                            <a:srgbClr val="000000"/>
-                          </a:solidFill>
-                          <a:latin typeface="맑은 고딕"/>
-                        </a:rPr>
-                        <a:t>M</a:t>
-                      </a:r>
-                    </a:p>
-                  </a:txBody>
-                  <a:tcPr marL="45720" marR="45720" marT="22860" marB="22860" anchor="ctr">
-                    <a:lnL w="9525" cap="flat" cmpd="sng" algn="ctr">
-                      <a:solidFill>
-                        <a:srgbClr val="000000"/>
-                      </a:solidFill>
-                      <a:prstDash val="solid"/>
-                    </a:lnL>
-                    <a:lnR w="9525" cap="flat" cmpd="sng" algn="ctr">
-                      <a:solidFill>
-                        <a:srgbClr val="000000"/>
-                      </a:solidFill>
-                      <a:prstDash val="solid"/>
-                    </a:lnR>
-                    <a:lnT w="9525" cap="flat" cmpd="sng" algn="ctr">
-                      <a:solidFill>
-                        <a:srgbClr val="000000"/>
-                      </a:solidFill>
-                      <a:prstDash val="solid"/>
-                    </a:lnT>
-                    <a:lnB w="9525" cap="flat" cmpd="sng" algn="ctr">
-                      <a:solidFill>
-                        <a:srgbClr val="000000"/>
-                      </a:solidFill>
-                      <a:prstDash val="solid"/>
-                    </a:lnB>
-                    <a:solidFill>
-                      <a:srgbClr val="FFFFFF"/>
-                    </a:solidFill>
-                  </a:tcPr>
-                </a:tc>
-                <a:tc>
-                  <a:txBody>
-                    <a:bodyPr wrap="square"/>
-                    <a:lstStyle/>
-                    <a:p>
-                      <a:pPr algn="ctr"/>
-                      <a:r>
-                        <a:rPr sz="1050" b="0">
-                          <a:solidFill>
-                            <a:srgbClr val="000000"/>
-                          </a:solidFill>
-                          <a:latin typeface="맑은 고딕"/>
-                        </a:rPr>
-                        <a:t>M</a:t>
-                      </a:r>
-                    </a:p>
-                  </a:txBody>
-                  <a:tcPr marL="45720" marR="45720" marT="22860" marB="22860" anchor="ctr">
-                    <a:lnL w="9525" cap="flat" cmpd="sng" algn="ctr">
-                      <a:solidFill>
-                        <a:srgbClr val="000000"/>
-                      </a:solidFill>
-                      <a:prstDash val="solid"/>
-                    </a:lnL>
-                    <a:lnR w="9525" cap="flat" cmpd="sng" algn="ctr">
-                      <a:solidFill>
-                        <a:srgbClr val="000000"/>
-                      </a:solidFill>
-                      <a:prstDash val="solid"/>
-                    </a:lnR>
-                    <a:lnT w="9525" cap="flat" cmpd="sng" algn="ctr">
-                      <a:solidFill>
-                        <a:srgbClr val="000000"/>
-                      </a:solidFill>
-                      <a:prstDash val="solid"/>
-                    </a:lnT>
-                    <a:lnB w="9525" cap="flat" cmpd="sng" algn="ctr">
-                      <a:solidFill>
-                        <a:srgbClr val="000000"/>
-                      </a:solidFill>
-                      <a:prstDash val="solid"/>
-                    </a:lnB>
-                    <a:solidFill>
-                      <a:srgbClr val="FFFFFF"/>
-                    </a:solidFill>
-                  </a:tcPr>
-                </a:tc>
-                <a:tc>
-                  <a:txBody>
-                    <a:bodyPr wrap="square"/>
-                    <a:lstStyle/>
-                    <a:p>
-                      <a:pPr algn="ctr"/>
-                      <a:r>
-                        <a:rPr sz="1050" b="0">
-                          <a:solidFill>
-                            <a:srgbClr val="000000"/>
-                          </a:solidFill>
-                          <a:latin typeface="맑은 고딕"/>
-                        </a:rPr>
-                        <a:t/>
-                      </a:r>
-                    </a:p>
-                  </a:txBody>
-                  <a:tcPr marL="45720" marR="45720" marT="22860" marB="22860" anchor="ctr">
-                    <a:lnL w="9525" cap="flat" cmpd="sng" algn="ctr">
-                      <a:solidFill>
-                        <a:srgbClr val="000000"/>
-                      </a:solidFill>
-                      <a:prstDash val="solid"/>
-                    </a:lnL>
-                    <a:lnR w="9525" cap="flat" cmpd="sng" algn="ctr">
-                      <a:solidFill>
-                        <a:srgbClr val="000000"/>
-                      </a:solidFill>
-                      <a:prstDash val="solid"/>
-                    </a:lnR>
-                    <a:lnT w="9525" cap="flat" cmpd="sng" algn="ctr">
-                      <a:solidFill>
-                        <a:srgbClr val="000000"/>
-                      </a:solidFill>
-                      <a:prstDash val="solid"/>
-                    </a:lnT>
-                    <a:lnB w="9525" cap="flat" cmpd="sng" algn="ctr">
-                      <a:solidFill>
-                        <a:srgbClr val="000000"/>
-                      </a:solidFill>
-                      <a:prstDash val="solid"/>
-                    </a:lnB>
-                    <a:solidFill>
-                      <a:srgbClr val="FFFFFF"/>
-                    </a:solidFill>
-                  </a:tcPr>
-                </a:tc>
-              </a:tr>
             </a:tbl>
           </a:graphicData>
         </a:graphic>
@@ -19581,8 +18783,8 @@
         </p:nvSpPr>
         <p:spPr>
           <a:xfrm>
-            <a:off x="265176" y="5669280"/>
-            <a:ext cx="11612880" cy="274320"/>
+            <a:off x="265176" y="5486400"/>
+            <a:ext cx="11612880" cy="822960"/>
           </a:xfrm>
           <a:prstGeom prst="rect">
             <a:avLst/>
@@ -19597,13 +18799,25 @@
           <a:p>
             <a:pPr algn="l"/>
             <a:r>
-              <a:rPr sz="1000" b="0" i="1">
+              <a:rPr sz="1050" b="0" i="1">
                 <a:solidFill>
                   <a:srgbClr val="000000"/>
                 </a:solidFill>
                 <a:latin typeface="맑은 고딕"/>
               </a:rPr>
-              <a:t>* [ ] = 공란. 중요도·난이도·순위는 Claude 제안이며 소유자 확정 전이다 (H/M/L, 순위는 H/H·H/M 중심)</a:t>
+              <a:t>* [ ] = 공란. QA-01~05의 측정값은 통합 단계에서 정한다. QA-06~11의 측정값은 Claude 제안값이며 확정 전이다</a:t>
+            </a:r>
+          </a:p>
+          <a:p>
+            <a:pPr algn="l"/>
+            <a:r>
+              <a:rPr sz="1050" b="0" i="1">
+                <a:solidFill>
+                  <a:srgbClr val="000000"/>
+                </a:solidFill>
+                <a:latin typeface="맑은 고딕"/>
+              </a:rPr>
+              <a:t>* 중요도·난이도는 Claude 제안값이고 우선순위·선정은 확정 후 기입한다 (H/M/L)</a:t>
             </a:r>
           </a:p>
         </p:txBody>
@@ -19616,7 +18830,7 @@
 </p:sld>
 </file>
 
-<file path=ppt/slides/slide18.xml><?xml version="1.0" encoding="utf-8"?>
+<file path=ppt/slides/slide17.xml><?xml version="1.0" encoding="utf-8"?>
 <p:sld xmlns:a="http://schemas.openxmlformats.org/drawingml/2006/main" xmlns:p="http://schemas.openxmlformats.org/presentationml/2006/main" xmlns:r="http://schemas.openxmlformats.org/officeDocument/2006/relationships">
   <p:cSld>
     <p:spTree>
@@ -23437,7 +22651,7 @@
 </p:sld>
 </file>
 
-<file path=ppt/slides/slide19.xml><?xml version="1.0" encoding="utf-8"?>
+<file path=ppt/slides/slide18.xml><?xml version="1.0" encoding="utf-8"?>
 <p:sld xmlns:a="http://schemas.openxmlformats.org/drawingml/2006/main" xmlns:p="http://schemas.openxmlformats.org/presentationml/2006/main" xmlns:r="http://schemas.openxmlformats.org/officeDocument/2006/relationships">
   <p:cSld>
     <p:spTree>
@@ -23674,7 +22888,7 @@
         </p:nvSpPr>
         <p:spPr>
           <a:xfrm>
-            <a:off x="274320" y="4160520"/>
+            <a:off x="274320" y="4343400"/>
             <a:ext cx="3657600" cy="320040"/>
           </a:xfrm>
           <a:prstGeom prst="rect">
@@ -23839,7 +23053,7 @@
                 </a:solidFill>
                 <a:latin typeface="맑은 고딕"/>
               </a:rPr>
-              <a:t>FR01</a:t>
+              <a:t>FR26</a:t>
             </a:r>
           </a:p>
         </p:txBody>
@@ -23874,7 +23088,7 @@
                 </a:solidFill>
                 <a:latin typeface="맑은 고딕"/>
               </a:rPr>
-              <a:t>이기종 메모리 데이터 저장</a:t>
+              <a:t>메모리 배치와 연산의 동적 스케줄링</a:t>
             </a:r>
           </a:p>
         </p:txBody>
@@ -24017,7 +23231,7 @@
                 </a:solidFill>
                 <a:latin typeface="맑은 고딕"/>
               </a:rPr>
-              <a:t>FR02</a:t>
+              <a:t>FR01</a:t>
             </a:r>
           </a:p>
         </p:txBody>
@@ -24052,7 +23266,7 @@
                 </a:solidFill>
                 <a:latin typeface="맑은 고딕"/>
               </a:rPr>
-              <a:t>메모리 간 데이터 복사</a:t>
+              <a:t>이기종 메모리 데이터 저장</a:t>
             </a:r>
           </a:p>
         </p:txBody>
@@ -24195,7 +23409,7 @@
                 </a:solidFill>
                 <a:latin typeface="맑은 고딕"/>
               </a:rPr>
-              <a:t>FR03</a:t>
+              <a:t>FR02</a:t>
             </a:r>
           </a:p>
         </p:txBody>
@@ -24230,7 +23444,7 @@
                 </a:solidFill>
                 <a:latin typeface="맑은 고딕"/>
               </a:rPr>
-              <a:t>vLLM 연동</a:t>
+              <a:t>메모리 간 데이터 복사</a:t>
             </a:r>
           </a:p>
         </p:txBody>
@@ -24373,7 +23587,7 @@
                 </a:solidFill>
                 <a:latin typeface="맑은 고딕"/>
               </a:rPr>
-              <a:t>FR04</a:t>
+              <a:t>FR03</a:t>
             </a:r>
           </a:p>
         </p:txBody>
@@ -24408,7 +23622,7 @@
                 </a:solidFill>
                 <a:latin typeface="맑은 고딕"/>
               </a:rPr>
-              <a:t>KV cache offload와 재사용</a:t>
+              <a:t>vLLM 연동</a:t>
             </a:r>
           </a:p>
         </p:txBody>
@@ -24551,7 +23765,7 @@
                 </a:solidFill>
                 <a:latin typeface="맑은 고딕"/>
               </a:rPr>
-              <a:t>FR05</a:t>
+              <a:t>FR04</a:t>
             </a:r>
           </a:p>
         </p:txBody>
@@ -24586,7 +23800,7 @@
                 </a:solidFill>
                 <a:latin typeface="맑은 고딕"/>
               </a:rPr>
-              <a:t>LoRA adapter 서빙</a:t>
+              <a:t>KV cache offload와 재사용</a:t>
             </a:r>
           </a:p>
         </p:txBody>
@@ -24729,7 +23943,7 @@
                 </a:solidFill>
                 <a:latin typeface="맑은 고딕"/>
               </a:rPr>
-              <a:t>FR06</a:t>
+              <a:t>FR05</a:t>
             </a:r>
           </a:p>
         </p:txBody>
@@ -24764,7 +23978,7 @@
                 </a:solidFill>
                 <a:latin typeface="맑은 고딕"/>
               </a:rPr>
-              <a:t>RAG 서빙</a:t>
+              <a:t>LoRA adapter 서빙</a:t>
             </a:r>
           </a:p>
         </p:txBody>
@@ -24907,7 +24121,7 @@
                 </a:solidFill>
                 <a:latin typeface="맑은 고딕"/>
               </a:rPr>
-              <a:t>FR07</a:t>
+              <a:t>FR06</a:t>
             </a:r>
           </a:p>
         </p:txBody>
@@ -24942,7 +24156,7 @@
                 </a:solidFill>
                 <a:latin typeface="맑은 고딕"/>
               </a:rPr>
-              <a:t>MoE 모델 서빙</a:t>
+              <a:t>RAG 서빙</a:t>
             </a:r>
           </a:p>
         </p:txBody>
@@ -25085,7 +24299,7 @@
                 </a:solidFill>
                 <a:latin typeface="맑은 고딕"/>
               </a:rPr>
-              <a:t>FR08</a:t>
+              <a:t>FR07</a:t>
             </a:r>
           </a:p>
         </p:txBody>
@@ -25120,7 +24334,7 @@
                 </a:solidFill>
                 <a:latin typeface="맑은 고딕"/>
               </a:rPr>
-              <a:t>Prefill/Decode disaggregation</a:t>
+              <a:t>MoE 모델 서빙</a:t>
             </a:r>
           </a:p>
         </p:txBody>
@@ -25263,7 +24477,7 @@
                 </a:solidFill>
                 <a:latin typeface="맑은 고딕"/>
               </a:rPr>
-              <a:t>FR09</a:t>
+              <a:t>FR08</a:t>
             </a:r>
           </a:p>
         </p:txBody>
@@ -25298,7 +24512,7 @@
                 </a:solidFill>
                 <a:latin typeface="맑은 고딕"/>
               </a:rPr>
-              <a:t>연산 offload와 GPU fallback</a:t>
+              <a:t>Prefill/Decode disaggregation</a:t>
             </a:r>
           </a:p>
         </p:txBody>
@@ -25441,6 +24655,184 @@
                 </a:solidFill>
                 <a:latin typeface="맑은 고딕"/>
               </a:rPr>
+              <a:t>FR09</a:t>
+            </a:r>
+          </a:p>
+        </p:txBody>
+      </p:sp>
+      <p:sp>
+        <p:nvSpPr>
+          <p:cNvPr id="47" name="TextBox 46"/>
+          <p:cNvSpPr txBox="1"/>
+          <p:nvPr/>
+        </p:nvSpPr>
+        <p:spPr>
+          <a:xfrm>
+            <a:off x="3886200" y="2953512"/>
+            <a:ext cx="1783080" cy="402336"/>
+          </a:xfrm>
+          <a:prstGeom prst="rect">
+            <a:avLst/>
+          </a:prstGeom>
+          <a:noFill/>
+        </p:spPr>
+        <p:txBody>
+          <a:bodyPr wrap="square" lIns="36576" tIns="18288" rIns="36576" bIns="18288" anchor="ctr">
+            <a:spAutoFit/>
+          </a:bodyPr>
+          <a:lstStyle/>
+          <a:p>
+            <a:pPr algn="l"/>
+            <a:r>
+              <a:rPr sz="900" b="1" i="0">
+                <a:solidFill>
+                  <a:srgbClr val="000000"/>
+                </a:solidFill>
+                <a:latin typeface="맑은 고딕"/>
+              </a:rPr>
+              <a:t>연산 offload와 GPU fallback</a:t>
+            </a:r>
+          </a:p>
+        </p:txBody>
+      </p:sp>
+      <p:sp>
+        <p:nvSpPr>
+          <p:cNvPr id="48" name="Rectangle 47"/>
+          <p:cNvSpPr/>
+          <p:nvPr/>
+        </p:nvSpPr>
+        <p:spPr>
+          <a:xfrm>
+            <a:off x="274320" y="3429000"/>
+            <a:ext cx="2651760" cy="402336"/>
+          </a:xfrm>
+          <a:prstGeom prst="rect">
+            <a:avLst/>
+          </a:prstGeom>
+          <a:solidFill>
+            <a:srgbClr val="DEEBF6"/>
+          </a:solidFill>
+          <a:ln w="28575">
+            <a:solidFill>
+              <a:srgbClr val="1E4E79"/>
+            </a:solidFill>
+          </a:ln>
+          <a:effectLst/>
+        </p:spPr>
+        <p:style>
+          <a:lnRef idx="1">
+            <a:schemeClr val="accent1"/>
+          </a:lnRef>
+          <a:fillRef idx="3">
+            <a:schemeClr val="accent1"/>
+          </a:fillRef>
+          <a:effectRef idx="2">
+            <a:schemeClr val="accent1"/>
+          </a:effectRef>
+          <a:fontRef idx="minor">
+            <a:schemeClr val="lt1"/>
+          </a:fontRef>
+        </p:style>
+        <p:txBody>
+          <a:bodyPr rtlCol="0" anchor="ctr"/>
+          <a:lstStyle/>
+          <a:p>
+            <a:pPr algn="ctr"/>
+          </a:p>
+        </p:txBody>
+      </p:sp>
+      <p:sp>
+        <p:nvSpPr>
+          <p:cNvPr id="49" name="Rectangle 48"/>
+          <p:cNvSpPr/>
+          <p:nvPr/>
+        </p:nvSpPr>
+        <p:spPr>
+          <a:xfrm>
+            <a:off x="612647" y="3429000"/>
+            <a:ext cx="402336" cy="402336"/>
+          </a:xfrm>
+          <a:prstGeom prst="rect">
+            <a:avLst/>
+          </a:prstGeom>
+          <a:solidFill>
+            <a:srgbClr val="1E4E79"/>
+          </a:solidFill>
+          <a:ln>
+            <a:noFill/>
+          </a:ln>
+          <a:effectLst/>
+        </p:spPr>
+        <p:style>
+          <a:lnRef idx="1">
+            <a:schemeClr val="accent1"/>
+          </a:lnRef>
+          <a:fillRef idx="3">
+            <a:schemeClr val="accent1"/>
+          </a:fillRef>
+          <a:effectRef idx="2">
+            <a:schemeClr val="accent1"/>
+          </a:effectRef>
+          <a:fontRef idx="minor">
+            <a:schemeClr val="lt1"/>
+          </a:fontRef>
+        </p:style>
+        <p:txBody>
+          <a:bodyPr rtlCol="0" anchor="ctr"/>
+          <a:lstStyle/>
+          <a:p>
+            <a:pPr algn="ctr"/>
+          </a:p>
+        </p:txBody>
+      </p:sp>
+      <p:sp>
+        <p:nvSpPr>
+          <p:cNvPr id="50" name="Oval 49"/>
+          <p:cNvSpPr/>
+          <p:nvPr/>
+        </p:nvSpPr>
+        <p:spPr>
+          <a:xfrm>
+            <a:off x="640080" y="3447288"/>
+            <a:ext cx="365760" cy="365760"/>
+          </a:xfrm>
+          <a:prstGeom prst="ellipse">
+            <a:avLst/>
+          </a:prstGeom>
+          <a:solidFill>
+            <a:srgbClr val="1E4E79"/>
+          </a:solidFill>
+          <a:ln>
+            <a:noFill/>
+          </a:ln>
+          <a:effectLst/>
+        </p:spPr>
+        <p:style>
+          <a:lnRef idx="1">
+            <a:schemeClr val="accent1"/>
+          </a:lnRef>
+          <a:fillRef idx="3">
+            <a:schemeClr val="accent1"/>
+          </a:fillRef>
+          <a:effectRef idx="2">
+            <a:schemeClr val="accent1"/>
+          </a:effectRef>
+          <a:fontRef idx="minor">
+            <a:schemeClr val="lt1"/>
+          </a:fontRef>
+        </p:style>
+        <p:txBody>
+          <a:bodyPr rtlCol="0" anchor="ctr" wrap="none" lIns="0" tIns="0" rIns="0" bIns="0"/>
+          <a:lstStyle/>
+          <a:p>
+            <a:pPr algn="ctr"/>
+            <a:r>
+              <a:rPr sz="900" b="1" i="0">
+                <a:solidFill>
+                  <a:srgbClr val="FFFFFF"/>
+                </a:solidFill>
+                <a:latin typeface="맑은 고딕"/>
+              </a:rPr>
               <a:t>FR10</a:t>
             </a:r>
           </a:p>
@@ -25448,13 +24840,13 @@
       </p:sp>
       <p:sp>
         <p:nvSpPr>
-          <p:cNvPr id="47" name="TextBox 46"/>
+          <p:cNvPr id="51" name="TextBox 50"/>
           <p:cNvSpPr txBox="1"/>
           <p:nvPr/>
         </p:nvSpPr>
         <p:spPr>
           <a:xfrm>
-            <a:off x="3886200" y="2953512"/>
+            <a:off x="1143000" y="3429000"/>
             <a:ext cx="1783080" cy="402336"/>
           </a:xfrm>
           <a:prstGeom prst="rect">
@@ -25483,7 +24875,7 @@
       </p:sp>
       <p:sp>
         <p:nvSpPr>
-          <p:cNvPr id="48" name="Rectangle 47"/>
+          <p:cNvPr id="52" name="Rectangle 51"/>
           <p:cNvSpPr/>
           <p:nvPr/>
         </p:nvSpPr>
@@ -25529,7 +24921,7 @@
       </p:sp>
       <p:sp>
         <p:nvSpPr>
-          <p:cNvPr id="49" name="Rectangle 48"/>
+          <p:cNvPr id="53" name="Rectangle 52"/>
           <p:cNvSpPr/>
           <p:nvPr/>
         </p:nvSpPr>
@@ -25573,7 +24965,7 @@
       </p:sp>
       <p:sp>
         <p:nvSpPr>
-          <p:cNvPr id="50" name="Oval 49"/>
+          <p:cNvPr id="54" name="Oval 53"/>
           <p:cNvSpPr/>
           <p:nvPr/>
         </p:nvSpPr>
@@ -25626,7 +25018,7 @@
       </p:sp>
       <p:sp>
         <p:nvSpPr>
-          <p:cNvPr id="51" name="TextBox 50"/>
+          <p:cNvPr id="55" name="TextBox 54"/>
           <p:cNvSpPr txBox="1"/>
           <p:nvPr/>
         </p:nvSpPr>
@@ -25661,7 +25053,7 @@
       </p:sp>
       <p:sp>
         <p:nvSpPr>
-          <p:cNvPr id="52" name="Rectangle 51"/>
+          <p:cNvPr id="56" name="Rectangle 55"/>
           <p:cNvSpPr/>
           <p:nvPr/>
         </p:nvSpPr>
@@ -25707,7 +25099,7 @@
       </p:sp>
       <p:sp>
         <p:nvSpPr>
-          <p:cNvPr id="53" name="Rectangle 52"/>
+          <p:cNvPr id="57" name="Rectangle 56"/>
           <p:cNvSpPr/>
           <p:nvPr/>
         </p:nvSpPr>
@@ -25751,7 +25143,7 @@
       </p:sp>
       <p:sp>
         <p:nvSpPr>
-          <p:cNvPr id="54" name="Oval 53"/>
+          <p:cNvPr id="58" name="Oval 57"/>
           <p:cNvSpPr/>
           <p:nvPr/>
         </p:nvSpPr>
@@ -25804,7 +25196,7 @@
       </p:sp>
       <p:sp>
         <p:nvSpPr>
-          <p:cNvPr id="55" name="TextBox 54"/>
+          <p:cNvPr id="59" name="TextBox 58"/>
           <p:cNvSpPr txBox="1"/>
           <p:nvPr/>
         </p:nvSpPr>
@@ -25839,7 +25231,7 @@
       </p:sp>
       <p:sp>
         <p:nvSpPr>
-          <p:cNvPr id="56" name="Rectangle 55"/>
+          <p:cNvPr id="60" name="Rectangle 59"/>
           <p:cNvSpPr/>
           <p:nvPr/>
         </p:nvSpPr>
@@ -25885,7 +25277,7 @@
       </p:sp>
       <p:sp>
         <p:nvSpPr>
-          <p:cNvPr id="57" name="Rectangle 56"/>
+          <p:cNvPr id="61" name="Rectangle 60"/>
           <p:cNvSpPr/>
           <p:nvPr/>
         </p:nvSpPr>
@@ -25929,7 +25321,7 @@
       </p:sp>
       <p:sp>
         <p:nvSpPr>
-          <p:cNvPr id="58" name="Oval 57"/>
+          <p:cNvPr id="62" name="Oval 61"/>
           <p:cNvSpPr/>
           <p:nvPr/>
         </p:nvSpPr>
@@ -25982,7 +25374,7 @@
       </p:sp>
       <p:sp>
         <p:nvSpPr>
-          <p:cNvPr id="59" name="TextBox 58"/>
+          <p:cNvPr id="63" name="TextBox 62"/>
           <p:cNvSpPr txBox="1"/>
           <p:nvPr/>
         </p:nvSpPr>
@@ -26017,7 +25409,7 @@
       </p:sp>
       <p:sp>
         <p:nvSpPr>
-          <p:cNvPr id="60" name="Rectangle 59"/>
+          <p:cNvPr id="64" name="Rectangle 63"/>
           <p:cNvSpPr/>
           <p:nvPr/>
         </p:nvSpPr>
@@ -26063,7 +25455,7 @@
       </p:sp>
       <p:sp>
         <p:nvSpPr>
-          <p:cNvPr id="61" name="Rectangle 60"/>
+          <p:cNvPr id="65" name="Rectangle 64"/>
           <p:cNvSpPr/>
           <p:nvPr/>
         </p:nvSpPr>
@@ -26107,7 +25499,7 @@
       </p:sp>
       <p:sp>
         <p:nvSpPr>
-          <p:cNvPr id="62" name="Oval 61"/>
+          <p:cNvPr id="66" name="Oval 65"/>
           <p:cNvSpPr/>
           <p:nvPr/>
         </p:nvSpPr>
@@ -26160,7 +25552,7 @@
       </p:sp>
       <p:sp>
         <p:nvSpPr>
-          <p:cNvPr id="63" name="TextBox 62"/>
+          <p:cNvPr id="67" name="TextBox 66"/>
           <p:cNvSpPr txBox="1"/>
           <p:nvPr/>
         </p:nvSpPr>
@@ -26195,7 +25587,7 @@
       </p:sp>
       <p:sp>
         <p:nvSpPr>
-          <p:cNvPr id="64" name="Rectangle 63"/>
+          <p:cNvPr id="68" name="Rectangle 67"/>
           <p:cNvSpPr/>
           <p:nvPr/>
         </p:nvSpPr>
@@ -26241,7 +25633,7 @@
       </p:sp>
       <p:sp>
         <p:nvSpPr>
-          <p:cNvPr id="65" name="Rectangle 64"/>
+          <p:cNvPr id="69" name="Rectangle 68"/>
           <p:cNvSpPr/>
           <p:nvPr/>
         </p:nvSpPr>
@@ -26285,7 +25677,7 @@
       </p:sp>
       <p:sp>
         <p:nvSpPr>
-          <p:cNvPr id="66" name="Oval 65"/>
+          <p:cNvPr id="70" name="Oval 69"/>
           <p:cNvSpPr/>
           <p:nvPr/>
         </p:nvSpPr>
@@ -26338,7 +25730,7 @@
       </p:sp>
       <p:sp>
         <p:nvSpPr>
-          <p:cNvPr id="67" name="TextBox 66"/>
+          <p:cNvPr id="71" name="TextBox 70"/>
           <p:cNvSpPr txBox="1"/>
           <p:nvPr/>
         </p:nvSpPr>
@@ -26373,7 +25765,7 @@
       </p:sp>
       <p:sp>
         <p:nvSpPr>
-          <p:cNvPr id="68" name="Rectangle 67"/>
+          <p:cNvPr id="72" name="Rectangle 71"/>
           <p:cNvSpPr/>
           <p:nvPr/>
         </p:nvSpPr>
@@ -26419,7 +25811,7 @@
       </p:sp>
       <p:sp>
         <p:nvSpPr>
-          <p:cNvPr id="69" name="Rectangle 68"/>
+          <p:cNvPr id="73" name="Rectangle 72"/>
           <p:cNvSpPr/>
           <p:nvPr/>
         </p:nvSpPr>
@@ -26463,7 +25855,7 @@
       </p:sp>
       <p:sp>
         <p:nvSpPr>
-          <p:cNvPr id="70" name="Oval 69"/>
+          <p:cNvPr id="74" name="Oval 73"/>
           <p:cNvSpPr/>
           <p:nvPr/>
         </p:nvSpPr>
@@ -26516,7 +25908,7 @@
       </p:sp>
       <p:sp>
         <p:nvSpPr>
-          <p:cNvPr id="71" name="TextBox 70"/>
+          <p:cNvPr id="75" name="TextBox 74"/>
           <p:cNvSpPr txBox="1"/>
           <p:nvPr/>
         </p:nvSpPr>
@@ -26551,7 +25943,7 @@
       </p:sp>
       <p:sp>
         <p:nvSpPr>
-          <p:cNvPr id="72" name="Rectangle 71"/>
+          <p:cNvPr id="76" name="Rectangle 75"/>
           <p:cNvSpPr/>
           <p:nvPr/>
         </p:nvSpPr>
@@ -26597,7 +25989,7 @@
       </p:sp>
       <p:sp>
         <p:nvSpPr>
-          <p:cNvPr id="73" name="Rectangle 72"/>
+          <p:cNvPr id="77" name="Rectangle 76"/>
           <p:cNvSpPr/>
           <p:nvPr/>
         </p:nvSpPr>
@@ -26641,7 +26033,7 @@
       </p:sp>
       <p:sp>
         <p:nvSpPr>
-          <p:cNvPr id="74" name="Oval 73"/>
+          <p:cNvPr id="78" name="Oval 77"/>
           <p:cNvSpPr/>
           <p:nvPr/>
         </p:nvSpPr>
@@ -26694,7 +26086,7 @@
       </p:sp>
       <p:sp>
         <p:nvSpPr>
-          <p:cNvPr id="75" name="TextBox 74"/>
+          <p:cNvPr id="79" name="TextBox 78"/>
           <p:cNvSpPr txBox="1"/>
           <p:nvPr/>
         </p:nvSpPr>
@@ -26729,13 +26121,13 @@
       </p:sp>
       <p:sp>
         <p:nvSpPr>
-          <p:cNvPr id="76" name="Rectangle 75"/>
+          <p:cNvPr id="80" name="Rectangle 79"/>
           <p:cNvSpPr/>
           <p:nvPr/>
         </p:nvSpPr>
         <p:spPr>
           <a:xfrm>
-            <a:off x="274320" y="4526280"/>
+            <a:off x="274320" y="4709160"/>
             <a:ext cx="3749039" cy="402336"/>
           </a:xfrm>
           <a:prstGeom prst="rect">
@@ -26775,13 +26167,13 @@
       </p:sp>
       <p:sp>
         <p:nvSpPr>
-          <p:cNvPr id="77" name="Rectangle 76"/>
+          <p:cNvPr id="81" name="Rectangle 80"/>
           <p:cNvSpPr/>
           <p:nvPr/>
         </p:nvSpPr>
         <p:spPr>
           <a:xfrm>
-            <a:off x="612647" y="4526280"/>
+            <a:off x="612647" y="4709160"/>
             <a:ext cx="402336" cy="402336"/>
           </a:xfrm>
           <a:prstGeom prst="rect">
@@ -26819,13 +26211,13 @@
       </p:sp>
       <p:sp>
         <p:nvSpPr>
-          <p:cNvPr id="78" name="Oval 77"/>
+          <p:cNvPr id="82" name="Oval 81"/>
           <p:cNvSpPr/>
           <p:nvPr/>
         </p:nvSpPr>
         <p:spPr>
           <a:xfrm>
-            <a:off x="640080" y="4544568"/>
+            <a:off x="640080" y="4727448"/>
             <a:ext cx="365760" cy="365760"/>
           </a:xfrm>
           <a:prstGeom prst="ellipse">
@@ -26872,13 +26264,13 @@
       </p:sp>
       <p:sp>
         <p:nvSpPr>
-          <p:cNvPr id="79" name="TextBox 78"/>
+          <p:cNvPr id="83" name="TextBox 82"/>
           <p:cNvSpPr txBox="1"/>
           <p:nvPr/>
         </p:nvSpPr>
         <p:spPr>
           <a:xfrm>
-            <a:off x="1188720" y="4526280"/>
+            <a:off x="1188720" y="4709160"/>
             <a:ext cx="2743200" cy="402336"/>
           </a:xfrm>
           <a:prstGeom prst="rect">
@@ -26907,13 +26299,13 @@
       </p:sp>
       <p:sp>
         <p:nvSpPr>
-          <p:cNvPr id="80" name="Rectangle 79"/>
+          <p:cNvPr id="84" name="Rectangle 83"/>
           <p:cNvSpPr/>
           <p:nvPr/>
         </p:nvSpPr>
         <p:spPr>
           <a:xfrm>
-            <a:off x="4206240" y="4526280"/>
+            <a:off x="4206240" y="4709160"/>
             <a:ext cx="3749039" cy="402336"/>
           </a:xfrm>
           <a:prstGeom prst="rect">
@@ -26953,13 +26345,13 @@
       </p:sp>
       <p:sp>
         <p:nvSpPr>
-          <p:cNvPr id="81" name="Rectangle 80"/>
+          <p:cNvPr id="85" name="Rectangle 84"/>
           <p:cNvSpPr/>
           <p:nvPr/>
         </p:nvSpPr>
         <p:spPr>
           <a:xfrm>
-            <a:off x="4544568" y="4526280"/>
+            <a:off x="4544568" y="4709160"/>
             <a:ext cx="402336" cy="402336"/>
           </a:xfrm>
           <a:prstGeom prst="rect">
@@ -26997,13 +26389,13 @@
       </p:sp>
       <p:sp>
         <p:nvSpPr>
-          <p:cNvPr id="82" name="Oval 81"/>
+          <p:cNvPr id="86" name="Oval 85"/>
           <p:cNvSpPr/>
           <p:nvPr/>
         </p:nvSpPr>
         <p:spPr>
           <a:xfrm>
-            <a:off x="4572000" y="4544568"/>
+            <a:off x="4572000" y="4727448"/>
             <a:ext cx="365760" cy="365760"/>
           </a:xfrm>
           <a:prstGeom prst="ellipse">
@@ -27050,13 +26442,13 @@
       </p:sp>
       <p:sp>
         <p:nvSpPr>
-          <p:cNvPr id="83" name="TextBox 82"/>
+          <p:cNvPr id="87" name="TextBox 86"/>
           <p:cNvSpPr txBox="1"/>
           <p:nvPr/>
         </p:nvSpPr>
         <p:spPr>
           <a:xfrm>
-            <a:off x="5120640" y="4526280"/>
+            <a:off x="5120640" y="4709160"/>
             <a:ext cx="2743200" cy="402336"/>
           </a:xfrm>
           <a:prstGeom prst="rect">
@@ -27085,13 +26477,13 @@
       </p:sp>
       <p:sp>
         <p:nvSpPr>
-          <p:cNvPr id="84" name="Rectangle 83"/>
+          <p:cNvPr id="88" name="Rectangle 87"/>
           <p:cNvSpPr/>
           <p:nvPr/>
         </p:nvSpPr>
         <p:spPr>
           <a:xfrm>
-            <a:off x="8138160" y="4526280"/>
+            <a:off x="8138160" y="4709160"/>
             <a:ext cx="3749039" cy="402336"/>
           </a:xfrm>
           <a:prstGeom prst="rect">
@@ -27131,13 +26523,13 @@
       </p:sp>
       <p:sp>
         <p:nvSpPr>
-          <p:cNvPr id="85" name="Rectangle 84"/>
+          <p:cNvPr id="89" name="Rectangle 88"/>
           <p:cNvSpPr/>
           <p:nvPr/>
         </p:nvSpPr>
         <p:spPr>
           <a:xfrm>
-            <a:off x="8476488" y="4526280"/>
+            <a:off x="8476488" y="4709160"/>
             <a:ext cx="402336" cy="402336"/>
           </a:xfrm>
           <a:prstGeom prst="rect">
@@ -27175,13 +26567,13 @@
       </p:sp>
       <p:sp>
         <p:nvSpPr>
-          <p:cNvPr id="86" name="Oval 85"/>
+          <p:cNvPr id="90" name="Oval 89"/>
           <p:cNvSpPr/>
           <p:nvPr/>
         </p:nvSpPr>
         <p:spPr>
           <a:xfrm>
-            <a:off x="8503920" y="4544568"/>
+            <a:off x="8503920" y="4727448"/>
             <a:ext cx="365760" cy="365760"/>
           </a:xfrm>
           <a:prstGeom prst="ellipse">
@@ -27228,13 +26620,13 @@
       </p:sp>
       <p:sp>
         <p:nvSpPr>
-          <p:cNvPr id="87" name="TextBox 86"/>
+          <p:cNvPr id="91" name="TextBox 90"/>
           <p:cNvSpPr txBox="1"/>
           <p:nvPr/>
         </p:nvSpPr>
         <p:spPr>
           <a:xfrm>
-            <a:off x="9052560" y="4526280"/>
+            <a:off x="9052560" y="4709160"/>
             <a:ext cx="2743200" cy="402336"/>
           </a:xfrm>
           <a:prstGeom prst="rect">
@@ -27263,13 +26655,13 @@
       </p:sp>
       <p:sp>
         <p:nvSpPr>
-          <p:cNvPr id="88" name="Rectangle 87"/>
+          <p:cNvPr id="92" name="Rectangle 91"/>
           <p:cNvSpPr/>
           <p:nvPr/>
         </p:nvSpPr>
         <p:spPr>
           <a:xfrm>
-            <a:off x="274320" y="4983480"/>
+            <a:off x="274320" y="5148072"/>
             <a:ext cx="3749039" cy="402336"/>
           </a:xfrm>
           <a:prstGeom prst="rect">
@@ -27309,13 +26701,13 @@
       </p:sp>
       <p:sp>
         <p:nvSpPr>
-          <p:cNvPr id="89" name="Rectangle 88"/>
+          <p:cNvPr id="93" name="Rectangle 92"/>
           <p:cNvSpPr/>
           <p:nvPr/>
         </p:nvSpPr>
         <p:spPr>
           <a:xfrm>
-            <a:off x="612647" y="4983480"/>
+            <a:off x="612647" y="5148072"/>
             <a:ext cx="402336" cy="402336"/>
           </a:xfrm>
           <a:prstGeom prst="rect">
@@ -27353,13 +26745,13 @@
       </p:sp>
       <p:sp>
         <p:nvSpPr>
-          <p:cNvPr id="90" name="Oval 89"/>
+          <p:cNvPr id="94" name="Oval 93"/>
           <p:cNvSpPr/>
           <p:nvPr/>
         </p:nvSpPr>
         <p:spPr>
           <a:xfrm>
-            <a:off x="640080" y="5001768"/>
+            <a:off x="640080" y="5166360"/>
             <a:ext cx="365760" cy="365760"/>
           </a:xfrm>
           <a:prstGeom prst="ellipse">
@@ -27406,13 +26798,13 @@
       </p:sp>
       <p:sp>
         <p:nvSpPr>
-          <p:cNvPr id="91" name="TextBox 90"/>
+          <p:cNvPr id="95" name="TextBox 94"/>
           <p:cNvSpPr txBox="1"/>
           <p:nvPr/>
         </p:nvSpPr>
         <p:spPr>
           <a:xfrm>
-            <a:off x="1188720" y="4983480"/>
+            <a:off x="1188720" y="5148072"/>
             <a:ext cx="2743200" cy="402336"/>
           </a:xfrm>
           <a:prstGeom prst="rect">
@@ -27441,13 +26833,13 @@
       </p:sp>
       <p:sp>
         <p:nvSpPr>
-          <p:cNvPr id="92" name="Rectangle 91"/>
+          <p:cNvPr id="96" name="Rectangle 95"/>
           <p:cNvSpPr/>
           <p:nvPr/>
         </p:nvSpPr>
         <p:spPr>
           <a:xfrm>
-            <a:off x="4206240" y="4983480"/>
+            <a:off x="4206240" y="5148072"/>
             <a:ext cx="3749039" cy="402336"/>
           </a:xfrm>
           <a:prstGeom prst="rect">
@@ -27487,13 +26879,13 @@
       </p:sp>
       <p:sp>
         <p:nvSpPr>
-          <p:cNvPr id="93" name="Rectangle 92"/>
+          <p:cNvPr id="97" name="Rectangle 96"/>
           <p:cNvSpPr/>
           <p:nvPr/>
         </p:nvSpPr>
         <p:spPr>
           <a:xfrm>
-            <a:off x="4544568" y="4983480"/>
+            <a:off x="4544568" y="5148072"/>
             <a:ext cx="402336" cy="402336"/>
           </a:xfrm>
           <a:prstGeom prst="rect">
@@ -27531,13 +26923,13 @@
       </p:sp>
       <p:sp>
         <p:nvSpPr>
-          <p:cNvPr id="94" name="Oval 93"/>
+          <p:cNvPr id="98" name="Oval 97"/>
           <p:cNvSpPr/>
           <p:nvPr/>
         </p:nvSpPr>
         <p:spPr>
           <a:xfrm>
-            <a:off x="4572000" y="5001768"/>
+            <a:off x="4572000" y="5166360"/>
             <a:ext cx="365760" cy="365760"/>
           </a:xfrm>
           <a:prstGeom prst="ellipse">
@@ -27584,13 +26976,13 @@
       </p:sp>
       <p:sp>
         <p:nvSpPr>
-          <p:cNvPr id="95" name="TextBox 94"/>
+          <p:cNvPr id="99" name="TextBox 98"/>
           <p:cNvSpPr txBox="1"/>
           <p:nvPr/>
         </p:nvSpPr>
         <p:spPr>
           <a:xfrm>
-            <a:off x="5120640" y="4983480"/>
+            <a:off x="5120640" y="5148072"/>
             <a:ext cx="2743200" cy="402336"/>
           </a:xfrm>
           <a:prstGeom prst="rect">
@@ -27619,13 +27011,13 @@
       </p:sp>
       <p:sp>
         <p:nvSpPr>
-          <p:cNvPr id="96" name="Rectangle 95"/>
+          <p:cNvPr id="100" name="Rectangle 99"/>
           <p:cNvSpPr/>
           <p:nvPr/>
         </p:nvSpPr>
         <p:spPr>
           <a:xfrm>
-            <a:off x="8138160" y="4983480"/>
+            <a:off x="8138160" y="5148072"/>
             <a:ext cx="3749039" cy="402336"/>
           </a:xfrm>
           <a:prstGeom prst="rect">
@@ -27665,13 +27057,13 @@
       </p:sp>
       <p:sp>
         <p:nvSpPr>
-          <p:cNvPr id="97" name="Rectangle 96"/>
+          <p:cNvPr id="101" name="Rectangle 100"/>
           <p:cNvSpPr/>
           <p:nvPr/>
         </p:nvSpPr>
         <p:spPr>
           <a:xfrm>
-            <a:off x="8476488" y="4983480"/>
+            <a:off x="8476488" y="5148072"/>
             <a:ext cx="402336" cy="402336"/>
           </a:xfrm>
           <a:prstGeom prst="rect">
@@ -27709,13 +27101,13 @@
       </p:sp>
       <p:sp>
         <p:nvSpPr>
-          <p:cNvPr id="98" name="Oval 97"/>
+          <p:cNvPr id="102" name="Oval 101"/>
           <p:cNvSpPr/>
           <p:nvPr/>
         </p:nvSpPr>
         <p:spPr>
           <a:xfrm>
-            <a:off x="8503920" y="5001768"/>
+            <a:off x="8503920" y="5166360"/>
             <a:ext cx="365760" cy="365760"/>
           </a:xfrm>
           <a:prstGeom prst="ellipse">
@@ -27762,13 +27154,13 @@
       </p:sp>
       <p:sp>
         <p:nvSpPr>
-          <p:cNvPr id="99" name="TextBox 98"/>
+          <p:cNvPr id="103" name="TextBox 102"/>
           <p:cNvSpPr txBox="1"/>
           <p:nvPr/>
         </p:nvSpPr>
         <p:spPr>
           <a:xfrm>
-            <a:off x="9052560" y="4983480"/>
+            <a:off x="9052560" y="5148072"/>
             <a:ext cx="2743200" cy="402336"/>
           </a:xfrm>
           <a:prstGeom prst="rect">
@@ -27797,13 +27189,13 @@
       </p:sp>
       <p:sp>
         <p:nvSpPr>
-          <p:cNvPr id="100" name="Rectangle 99"/>
+          <p:cNvPr id="104" name="Rectangle 103"/>
           <p:cNvSpPr/>
           <p:nvPr/>
         </p:nvSpPr>
         <p:spPr>
           <a:xfrm>
-            <a:off x="274320" y="5440680"/>
+            <a:off x="274320" y="5586984"/>
             <a:ext cx="3749039" cy="402336"/>
           </a:xfrm>
           <a:prstGeom prst="rect">
@@ -27843,13 +27235,13 @@
       </p:sp>
       <p:sp>
         <p:nvSpPr>
-          <p:cNvPr id="101" name="Rectangle 100"/>
+          <p:cNvPr id="105" name="Rectangle 104"/>
           <p:cNvSpPr/>
           <p:nvPr/>
         </p:nvSpPr>
         <p:spPr>
           <a:xfrm>
-            <a:off x="612647" y="5440680"/>
+            <a:off x="612647" y="5586984"/>
             <a:ext cx="402336" cy="402336"/>
           </a:xfrm>
           <a:prstGeom prst="rect">
@@ -27887,13 +27279,13 @@
       </p:sp>
       <p:sp>
         <p:nvSpPr>
-          <p:cNvPr id="102" name="Oval 101"/>
+          <p:cNvPr id="106" name="Oval 105"/>
           <p:cNvSpPr/>
           <p:nvPr/>
         </p:nvSpPr>
         <p:spPr>
           <a:xfrm>
-            <a:off x="640080" y="5458968"/>
+            <a:off x="640080" y="5605272"/>
             <a:ext cx="365760" cy="365760"/>
           </a:xfrm>
           <a:prstGeom prst="ellipse">
@@ -27940,13 +27332,13 @@
       </p:sp>
       <p:sp>
         <p:nvSpPr>
-          <p:cNvPr id="103" name="TextBox 102"/>
+          <p:cNvPr id="107" name="TextBox 106"/>
           <p:cNvSpPr txBox="1"/>
           <p:nvPr/>
         </p:nvSpPr>
         <p:spPr>
           <a:xfrm>
-            <a:off x="1188720" y="5440680"/>
+            <a:off x="1188720" y="5586984"/>
             <a:ext cx="2743200" cy="402336"/>
           </a:xfrm>
           <a:prstGeom prst="rect">
@@ -27975,13 +27367,13 @@
       </p:sp>
       <p:sp>
         <p:nvSpPr>
-          <p:cNvPr id="104" name="Rectangle 103"/>
+          <p:cNvPr id="108" name="Rectangle 107"/>
           <p:cNvSpPr/>
           <p:nvPr/>
         </p:nvSpPr>
         <p:spPr>
           <a:xfrm>
-            <a:off x="4206240" y="5440680"/>
+            <a:off x="4206240" y="5586984"/>
             <a:ext cx="3749039" cy="402336"/>
           </a:xfrm>
           <a:prstGeom prst="rect">
@@ -28021,13 +27413,13 @@
       </p:sp>
       <p:sp>
         <p:nvSpPr>
-          <p:cNvPr id="105" name="Rectangle 104"/>
+          <p:cNvPr id="109" name="Rectangle 108"/>
           <p:cNvSpPr/>
           <p:nvPr/>
         </p:nvSpPr>
         <p:spPr>
           <a:xfrm>
-            <a:off x="4544568" y="5440680"/>
+            <a:off x="4544568" y="5586984"/>
             <a:ext cx="402336" cy="402336"/>
           </a:xfrm>
           <a:prstGeom prst="rect">
@@ -28065,13 +27457,13 @@
       </p:sp>
       <p:sp>
         <p:nvSpPr>
-          <p:cNvPr id="106" name="Oval 105"/>
+          <p:cNvPr id="110" name="Oval 109"/>
           <p:cNvSpPr/>
           <p:nvPr/>
         </p:nvSpPr>
         <p:spPr>
           <a:xfrm>
-            <a:off x="4572000" y="5458968"/>
+            <a:off x="4572000" y="5605272"/>
             <a:ext cx="365760" cy="365760"/>
           </a:xfrm>
           <a:prstGeom prst="ellipse">
@@ -28118,13 +27510,13 @@
       </p:sp>
       <p:sp>
         <p:nvSpPr>
-          <p:cNvPr id="107" name="TextBox 106"/>
+          <p:cNvPr id="111" name="TextBox 110"/>
           <p:cNvSpPr txBox="1"/>
           <p:nvPr/>
         </p:nvSpPr>
         <p:spPr>
           <a:xfrm>
-            <a:off x="5120640" y="5440680"/>
+            <a:off x="5120640" y="5586984"/>
             <a:ext cx="2743200" cy="402336"/>
           </a:xfrm>
           <a:prstGeom prst="rect">
@@ -28153,13 +27545,13 @@
       </p:sp>
       <p:sp>
         <p:nvSpPr>
-          <p:cNvPr id="108" name="Rectangle 107"/>
+          <p:cNvPr id="112" name="Rectangle 111"/>
           <p:cNvSpPr/>
           <p:nvPr/>
         </p:nvSpPr>
         <p:spPr>
           <a:xfrm>
-            <a:off x="8138160" y="5440680"/>
+            <a:off x="8138160" y="5586984"/>
             <a:ext cx="3749039" cy="402336"/>
           </a:xfrm>
           <a:prstGeom prst="rect">
@@ -28199,13 +27591,13 @@
       </p:sp>
       <p:sp>
         <p:nvSpPr>
-          <p:cNvPr id="109" name="Rectangle 108"/>
+          <p:cNvPr id="113" name="Rectangle 112"/>
           <p:cNvSpPr/>
           <p:nvPr/>
         </p:nvSpPr>
         <p:spPr>
           <a:xfrm>
-            <a:off x="8476488" y="5440680"/>
+            <a:off x="8476488" y="5586984"/>
             <a:ext cx="402336" cy="402336"/>
           </a:xfrm>
           <a:prstGeom prst="rect">
@@ -28243,13 +27635,13 @@
       </p:sp>
       <p:sp>
         <p:nvSpPr>
-          <p:cNvPr id="110" name="Oval 109"/>
+          <p:cNvPr id="114" name="Oval 113"/>
           <p:cNvSpPr/>
           <p:nvPr/>
         </p:nvSpPr>
         <p:spPr>
           <a:xfrm>
-            <a:off x="8503920" y="5458968"/>
+            <a:off x="8503920" y="5605272"/>
             <a:ext cx="365760" cy="365760"/>
           </a:xfrm>
           <a:prstGeom prst="ellipse">
@@ -28296,13 +27688,13 @@
       </p:sp>
       <p:sp>
         <p:nvSpPr>
-          <p:cNvPr id="111" name="TextBox 110"/>
+          <p:cNvPr id="115" name="TextBox 114"/>
           <p:cNvSpPr txBox="1"/>
           <p:nvPr/>
         </p:nvSpPr>
         <p:spPr>
           <a:xfrm>
-            <a:off x="9052560" y="5440680"/>
+            <a:off x="9052560" y="5586984"/>
             <a:ext cx="2743200" cy="402336"/>
           </a:xfrm>
           <a:prstGeom prst="rect">
@@ -28331,13 +27723,13 @@
       </p:sp>
       <p:sp>
         <p:nvSpPr>
-          <p:cNvPr id="112" name="Rectangle 111"/>
+          <p:cNvPr id="116" name="Rectangle 115"/>
           <p:cNvSpPr/>
           <p:nvPr/>
         </p:nvSpPr>
         <p:spPr>
           <a:xfrm>
-            <a:off x="274320" y="5897880"/>
+            <a:off x="274320" y="6025896"/>
             <a:ext cx="3749039" cy="402336"/>
           </a:xfrm>
           <a:prstGeom prst="rect">
@@ -28377,13 +27769,13 @@
       </p:sp>
       <p:sp>
         <p:nvSpPr>
-          <p:cNvPr id="113" name="Rectangle 112"/>
+          <p:cNvPr id="117" name="Rectangle 116"/>
           <p:cNvSpPr/>
           <p:nvPr/>
         </p:nvSpPr>
         <p:spPr>
           <a:xfrm>
-            <a:off x="612647" y="5897880"/>
+            <a:off x="612647" y="6025896"/>
             <a:ext cx="402336" cy="402336"/>
           </a:xfrm>
           <a:prstGeom prst="rect">
@@ -28421,13 +27813,13 @@
       </p:sp>
       <p:sp>
         <p:nvSpPr>
-          <p:cNvPr id="114" name="Oval 113"/>
+          <p:cNvPr id="118" name="Oval 117"/>
           <p:cNvSpPr/>
           <p:nvPr/>
         </p:nvSpPr>
         <p:spPr>
           <a:xfrm>
-            <a:off x="640080" y="5916168"/>
+            <a:off x="640080" y="6044183"/>
             <a:ext cx="365760" cy="365760"/>
           </a:xfrm>
           <a:prstGeom prst="ellipse">
@@ -28474,13 +27866,13 @@
       </p:sp>
       <p:sp>
         <p:nvSpPr>
-          <p:cNvPr id="115" name="TextBox 114"/>
+          <p:cNvPr id="119" name="TextBox 118"/>
           <p:cNvSpPr txBox="1"/>
           <p:nvPr/>
         </p:nvSpPr>
         <p:spPr>
           <a:xfrm>
-            <a:off x="1188720" y="5897880"/>
+            <a:off x="1188720" y="6025896"/>
             <a:ext cx="2743200" cy="402336"/>
           </a:xfrm>
           <a:prstGeom prst="rect">
@@ -28509,13 +27901,13 @@
       </p:sp>
       <p:sp>
         <p:nvSpPr>
-          <p:cNvPr id="116" name="Rectangle 115"/>
+          <p:cNvPr id="120" name="Rectangle 119"/>
           <p:cNvSpPr/>
           <p:nvPr/>
         </p:nvSpPr>
         <p:spPr>
           <a:xfrm>
-            <a:off x="4206240" y="5897880"/>
+            <a:off x="4206240" y="6025896"/>
             <a:ext cx="3749039" cy="402336"/>
           </a:xfrm>
           <a:prstGeom prst="rect">
@@ -28555,13 +27947,13 @@
       </p:sp>
       <p:sp>
         <p:nvSpPr>
-          <p:cNvPr id="117" name="Rectangle 116"/>
+          <p:cNvPr id="121" name="Rectangle 120"/>
           <p:cNvSpPr/>
           <p:nvPr/>
         </p:nvSpPr>
         <p:spPr>
           <a:xfrm>
-            <a:off x="4544568" y="5897880"/>
+            <a:off x="4544568" y="6025896"/>
             <a:ext cx="402336" cy="402336"/>
           </a:xfrm>
           <a:prstGeom prst="rect">
@@ -28599,13 +27991,13 @@
       </p:sp>
       <p:sp>
         <p:nvSpPr>
-          <p:cNvPr id="118" name="Oval 117"/>
+          <p:cNvPr id="122" name="Oval 121"/>
           <p:cNvSpPr/>
           <p:nvPr/>
         </p:nvSpPr>
         <p:spPr>
           <a:xfrm>
-            <a:off x="4572000" y="5916168"/>
+            <a:off x="4572000" y="6044183"/>
             <a:ext cx="365760" cy="365760"/>
           </a:xfrm>
           <a:prstGeom prst="ellipse">
@@ -28652,13 +28044,13 @@
       </p:sp>
       <p:sp>
         <p:nvSpPr>
-          <p:cNvPr id="119" name="TextBox 118"/>
+          <p:cNvPr id="123" name="TextBox 122"/>
           <p:cNvSpPr txBox="1"/>
           <p:nvPr/>
         </p:nvSpPr>
         <p:spPr>
           <a:xfrm>
-            <a:off x="5120640" y="5897880"/>
+            <a:off x="5120640" y="6025896"/>
             <a:ext cx="2743200" cy="402336"/>
           </a:xfrm>
           <a:prstGeom prst="rect">
@@ -28687,14 +28079,14 @@
       </p:sp>
       <p:sp>
         <p:nvSpPr>
-          <p:cNvPr id="120" name="TextBox 119"/>
+          <p:cNvPr id="124" name="TextBox 123"/>
           <p:cNvSpPr txBox="1"/>
           <p:nvPr/>
         </p:nvSpPr>
         <p:spPr>
           <a:xfrm>
-            <a:off x="274320" y="3520440"/>
-            <a:ext cx="8046720" cy="548640"/>
+            <a:off x="274320" y="3886200"/>
+            <a:ext cx="8046720" cy="457200"/>
           </a:xfrm>
           <a:prstGeom prst="rect">
             <a:avLst/>
@@ -28727,7 +28119,7 @@
                 </a:solidFill>
                 <a:latin typeface="맑은 고딕"/>
               </a:rPr>
-              <a:t>* FR-11~25는 핵심 FR의 세부 기능이며 드라이버로 올리지 않았다.</a:t>
+              <a:t>* 나머지 FR은 핵심 FR의 세부 기능이며 드라이버로 올리지 않았다.</a:t>
             </a:r>
           </a:p>
         </p:txBody>
@@ -29957,7 +29349,7 @@
                 </a:solidFill>
                 <a:latin typeface="맑은 고딕"/>
               </a:rPr>
-              <a:t>기능 요구사항 (핵심 10건, 전체 25건은 다음 장)</a:t>
+              <a:t>기능 요구사항 (핵심 11건, 전체 26건은 다음 장)</a:t>
             </a:r>
           </a:p>
         </p:txBody>
@@ -29971,7 +29363,7 @@
         <p:spPr>
           <a:xfrm>
             <a:off x="265176" y="1051560"/>
-            <a:ext cx="5852160" cy="457200"/>
+            <a:ext cx="5852160" cy="420624"/>
           </a:xfrm>
           <a:prstGeom prst="rect">
             <a:avLst/>
@@ -30017,7 +29409,7 @@
         <p:spPr>
           <a:xfrm>
             <a:off x="603503" y="1051560"/>
-            <a:ext cx="457200" cy="457200"/>
+            <a:ext cx="420624" cy="420624"/>
           </a:xfrm>
           <a:prstGeom prst="rect">
             <a:avLst/>
@@ -30061,7 +29453,7 @@
         <p:spPr>
           <a:xfrm>
             <a:off x="630936" y="1069848"/>
-            <a:ext cx="420624" cy="420624"/>
+            <a:ext cx="384048" cy="384048"/>
           </a:xfrm>
           <a:prstGeom prst="ellipse">
             <a:avLst/>
@@ -30100,7 +29492,7 @@
                 </a:solidFill>
                 <a:latin typeface="맑은 고딕"/>
               </a:rPr>
-              <a:t>FR01</a:t>
+              <a:t>FR26</a:t>
             </a:r>
           </a:p>
         </p:txBody>
@@ -30113,8 +29505,8 @@
         </p:nvSpPr>
         <p:spPr>
           <a:xfrm>
-            <a:off x="1179576" y="1051560"/>
-            <a:ext cx="4846320" cy="457200"/>
+            <a:off x="1143000" y="1051560"/>
+            <a:ext cx="4882896" cy="420624"/>
           </a:xfrm>
           <a:prstGeom prst="rect">
             <a:avLst/>
@@ -30129,13 +29521,13 @@
           <a:p>
             <a:pPr algn="l"/>
             <a:r>
-              <a:rPr sz="1200" b="1" i="0">
+              <a:rPr sz="1100" b="1" i="0">
                 <a:solidFill>
                   <a:srgbClr val="000000"/>
                 </a:solidFill>
                 <a:latin typeface="맑은 고딕"/>
               </a:rPr>
-              <a:t>이기종 메모리 데이터 저장</a:t>
+              <a:t>메모리 배치와 연산의 동적 스케줄링</a:t>
             </a:r>
           </a:p>
         </p:txBody>
@@ -30148,8 +29540,8 @@
         </p:nvSpPr>
         <p:spPr>
           <a:xfrm>
-            <a:off x="265176" y="1581912"/>
-            <a:ext cx="5852160" cy="457200"/>
+            <a:off x="265176" y="1545336"/>
+            <a:ext cx="5852160" cy="420624"/>
           </a:xfrm>
           <a:prstGeom prst="rect">
             <a:avLst/>
@@ -30194,8 +29586,8 @@
         </p:nvSpPr>
         <p:spPr>
           <a:xfrm>
-            <a:off x="603503" y="1581912"/>
-            <a:ext cx="457200" cy="457200"/>
+            <a:off x="603503" y="1545336"/>
+            <a:ext cx="420624" cy="420624"/>
           </a:xfrm>
           <a:prstGeom prst="rect">
             <a:avLst/>
@@ -30238,8 +29630,8 @@
         </p:nvSpPr>
         <p:spPr>
           <a:xfrm>
-            <a:off x="630936" y="1600200"/>
-            <a:ext cx="420624" cy="420624"/>
+            <a:off x="630936" y="1563624"/>
+            <a:ext cx="384048" cy="384048"/>
           </a:xfrm>
           <a:prstGeom prst="ellipse">
             <a:avLst/>
@@ -30278,7 +29670,7 @@
                 </a:solidFill>
                 <a:latin typeface="맑은 고딕"/>
               </a:rPr>
-              <a:t>FR02</a:t>
+              <a:t>FR01</a:t>
             </a:r>
           </a:p>
         </p:txBody>
@@ -30291,8 +29683,8 @@
         </p:nvSpPr>
         <p:spPr>
           <a:xfrm>
-            <a:off x="1179576" y="1581912"/>
-            <a:ext cx="4846320" cy="457200"/>
+            <a:off x="1143000" y="1545336"/>
+            <a:ext cx="4882896" cy="420624"/>
           </a:xfrm>
           <a:prstGeom prst="rect">
             <a:avLst/>
@@ -30307,13 +29699,13 @@
           <a:p>
             <a:pPr algn="l"/>
             <a:r>
-              <a:rPr sz="1200" b="1" i="0">
+              <a:rPr sz="1100" b="1" i="0">
                 <a:solidFill>
                   <a:srgbClr val="000000"/>
                 </a:solidFill>
                 <a:latin typeface="맑은 고딕"/>
               </a:rPr>
-              <a:t>메모리 간 데이터 복사</a:t>
+              <a:t>이기종 메모리 데이터 저장</a:t>
             </a:r>
           </a:p>
         </p:txBody>
@@ -30326,8 +29718,8 @@
         </p:nvSpPr>
         <p:spPr>
           <a:xfrm>
-            <a:off x="265176" y="2112263"/>
-            <a:ext cx="5852160" cy="457200"/>
+            <a:off x="265176" y="2039112"/>
+            <a:ext cx="5852160" cy="420624"/>
           </a:xfrm>
           <a:prstGeom prst="rect">
             <a:avLst/>
@@ -30372,8 +29764,8 @@
         </p:nvSpPr>
         <p:spPr>
           <a:xfrm>
-            <a:off x="603503" y="2112263"/>
-            <a:ext cx="457200" cy="457200"/>
+            <a:off x="603503" y="2039112"/>
+            <a:ext cx="420624" cy="420624"/>
           </a:xfrm>
           <a:prstGeom prst="rect">
             <a:avLst/>
@@ -30416,8 +29808,8 @@
         </p:nvSpPr>
         <p:spPr>
           <a:xfrm>
-            <a:off x="630936" y="2130551"/>
-            <a:ext cx="420624" cy="420624"/>
+            <a:off x="630936" y="2057400"/>
+            <a:ext cx="384048" cy="384048"/>
           </a:xfrm>
           <a:prstGeom prst="ellipse">
             <a:avLst/>
@@ -30456,7 +29848,7 @@
                 </a:solidFill>
                 <a:latin typeface="맑은 고딕"/>
               </a:rPr>
-              <a:t>FR03</a:t>
+              <a:t>FR02</a:t>
             </a:r>
           </a:p>
         </p:txBody>
@@ -30469,8 +29861,8 @@
         </p:nvSpPr>
         <p:spPr>
           <a:xfrm>
-            <a:off x="1179576" y="2112263"/>
-            <a:ext cx="4846320" cy="457200"/>
+            <a:off x="1143000" y="2039112"/>
+            <a:ext cx="4882896" cy="420624"/>
           </a:xfrm>
           <a:prstGeom prst="rect">
             <a:avLst/>
@@ -30485,13 +29877,13 @@
           <a:p>
             <a:pPr algn="l"/>
             <a:r>
-              <a:rPr sz="1200" b="1" i="0">
+              <a:rPr sz="1100" b="1" i="0">
                 <a:solidFill>
                   <a:srgbClr val="000000"/>
                 </a:solidFill>
                 <a:latin typeface="맑은 고딕"/>
               </a:rPr>
-              <a:t>vLLM 연동</a:t>
+              <a:t>메모리 간 데이터 복사</a:t>
             </a:r>
           </a:p>
         </p:txBody>
@@ -30504,8 +29896,8 @@
         </p:nvSpPr>
         <p:spPr>
           <a:xfrm>
-            <a:off x="265176" y="2642615"/>
-            <a:ext cx="5852160" cy="457200"/>
+            <a:off x="265176" y="2532888"/>
+            <a:ext cx="5852160" cy="420624"/>
           </a:xfrm>
           <a:prstGeom prst="rect">
             <a:avLst/>
@@ -30550,8 +29942,8 @@
         </p:nvSpPr>
         <p:spPr>
           <a:xfrm>
-            <a:off x="603503" y="2642615"/>
-            <a:ext cx="457200" cy="457200"/>
+            <a:off x="603503" y="2532888"/>
+            <a:ext cx="420624" cy="420624"/>
           </a:xfrm>
           <a:prstGeom prst="rect">
             <a:avLst/>
@@ -30594,8 +29986,8 @@
         </p:nvSpPr>
         <p:spPr>
           <a:xfrm>
-            <a:off x="630936" y="2660903"/>
-            <a:ext cx="420624" cy="420624"/>
+            <a:off x="630936" y="2551176"/>
+            <a:ext cx="384048" cy="384048"/>
           </a:xfrm>
           <a:prstGeom prst="ellipse">
             <a:avLst/>
@@ -30634,7 +30026,7 @@
                 </a:solidFill>
                 <a:latin typeface="맑은 고딕"/>
               </a:rPr>
-              <a:t>FR04</a:t>
+              <a:t>FR03</a:t>
             </a:r>
           </a:p>
         </p:txBody>
@@ -30647,8 +30039,8 @@
         </p:nvSpPr>
         <p:spPr>
           <a:xfrm>
-            <a:off x="1179576" y="2642615"/>
-            <a:ext cx="4846320" cy="457200"/>
+            <a:off x="1143000" y="2532888"/>
+            <a:ext cx="4882896" cy="420624"/>
           </a:xfrm>
           <a:prstGeom prst="rect">
             <a:avLst/>
@@ -30663,13 +30055,13 @@
           <a:p>
             <a:pPr algn="l"/>
             <a:r>
-              <a:rPr sz="1200" b="1" i="0">
+              <a:rPr sz="1100" b="1" i="0">
                 <a:solidFill>
                   <a:srgbClr val="000000"/>
                 </a:solidFill>
                 <a:latin typeface="맑은 고딕"/>
               </a:rPr>
-              <a:t>KV cache offload와 재사용</a:t>
+              <a:t>vLLM 연동</a:t>
             </a:r>
           </a:p>
         </p:txBody>
@@ -30682,8 +30074,8 @@
         </p:nvSpPr>
         <p:spPr>
           <a:xfrm>
-            <a:off x="265176" y="3172968"/>
-            <a:ext cx="5852160" cy="457200"/>
+            <a:off x="265176" y="3026664"/>
+            <a:ext cx="5852160" cy="420624"/>
           </a:xfrm>
           <a:prstGeom prst="rect">
             <a:avLst/>
@@ -30728,8 +30120,8 @@
         </p:nvSpPr>
         <p:spPr>
           <a:xfrm>
-            <a:off x="603503" y="3172968"/>
-            <a:ext cx="457200" cy="457200"/>
+            <a:off x="603503" y="3026664"/>
+            <a:ext cx="420624" cy="420624"/>
           </a:xfrm>
           <a:prstGeom prst="rect">
             <a:avLst/>
@@ -30772,8 +30164,8 @@
         </p:nvSpPr>
         <p:spPr>
           <a:xfrm>
-            <a:off x="630936" y="3191256"/>
-            <a:ext cx="420624" cy="420624"/>
+            <a:off x="630936" y="3044952"/>
+            <a:ext cx="384048" cy="384048"/>
           </a:xfrm>
           <a:prstGeom prst="ellipse">
             <a:avLst/>
@@ -30812,7 +30204,7 @@
                 </a:solidFill>
                 <a:latin typeface="맑은 고딕"/>
               </a:rPr>
-              <a:t>FR05</a:t>
+              <a:t>FR04</a:t>
             </a:r>
           </a:p>
         </p:txBody>
@@ -30825,8 +30217,8 @@
         </p:nvSpPr>
         <p:spPr>
           <a:xfrm>
-            <a:off x="1179576" y="3172968"/>
-            <a:ext cx="4846320" cy="457200"/>
+            <a:off x="1143000" y="3026664"/>
+            <a:ext cx="4882896" cy="420624"/>
           </a:xfrm>
           <a:prstGeom prst="rect">
             <a:avLst/>
@@ -30841,13 +30233,13 @@
           <a:p>
             <a:pPr algn="l"/>
             <a:r>
-              <a:rPr sz="1200" b="1" i="0">
+              <a:rPr sz="1100" b="1" i="0">
                 <a:solidFill>
                   <a:srgbClr val="000000"/>
                 </a:solidFill>
                 <a:latin typeface="맑은 고딕"/>
               </a:rPr>
-              <a:t>LoRA adapter 서빙</a:t>
+              <a:t>KV cache offload와 재사용</a:t>
             </a:r>
           </a:p>
         </p:txBody>
@@ -30860,8 +30252,8 @@
         </p:nvSpPr>
         <p:spPr>
           <a:xfrm>
-            <a:off x="265176" y="3703320"/>
-            <a:ext cx="5852160" cy="457200"/>
+            <a:off x="265176" y="3520440"/>
+            <a:ext cx="5852160" cy="420624"/>
           </a:xfrm>
           <a:prstGeom prst="rect">
             <a:avLst/>
@@ -30906,8 +30298,8 @@
         </p:nvSpPr>
         <p:spPr>
           <a:xfrm>
-            <a:off x="603503" y="3703320"/>
-            <a:ext cx="457200" cy="457200"/>
+            <a:off x="603503" y="3520440"/>
+            <a:ext cx="420624" cy="420624"/>
           </a:xfrm>
           <a:prstGeom prst="rect">
             <a:avLst/>
@@ -30950,8 +30342,8 @@
         </p:nvSpPr>
         <p:spPr>
           <a:xfrm>
-            <a:off x="630936" y="3721607"/>
-            <a:ext cx="420624" cy="420624"/>
+            <a:off x="630936" y="3538728"/>
+            <a:ext cx="384048" cy="384048"/>
           </a:xfrm>
           <a:prstGeom prst="ellipse">
             <a:avLst/>
@@ -30990,7 +30382,7 @@
                 </a:solidFill>
                 <a:latin typeface="맑은 고딕"/>
               </a:rPr>
-              <a:t>FR06</a:t>
+              <a:t>FR05</a:t>
             </a:r>
           </a:p>
         </p:txBody>
@@ -31003,8 +30395,8 @@
         </p:nvSpPr>
         <p:spPr>
           <a:xfrm>
-            <a:off x="1179576" y="3703320"/>
-            <a:ext cx="4846320" cy="457200"/>
+            <a:off x="1143000" y="3520440"/>
+            <a:ext cx="4882896" cy="420624"/>
           </a:xfrm>
           <a:prstGeom prst="rect">
             <a:avLst/>
@@ -31019,13 +30411,13 @@
           <a:p>
             <a:pPr algn="l"/>
             <a:r>
-              <a:rPr sz="1200" b="1" i="0">
+              <a:rPr sz="1100" b="1" i="0">
                 <a:solidFill>
                   <a:srgbClr val="000000"/>
                 </a:solidFill>
                 <a:latin typeface="맑은 고딕"/>
               </a:rPr>
-              <a:t>RAG 서빙</a:t>
+              <a:t>LoRA adapter 서빙</a:t>
             </a:r>
           </a:p>
         </p:txBody>
@@ -31038,8 +30430,8 @@
         </p:nvSpPr>
         <p:spPr>
           <a:xfrm>
-            <a:off x="265176" y="4233671"/>
-            <a:ext cx="5852160" cy="457200"/>
+            <a:off x="265176" y="4014216"/>
+            <a:ext cx="5852160" cy="420624"/>
           </a:xfrm>
           <a:prstGeom prst="rect">
             <a:avLst/>
@@ -31084,8 +30476,8 @@
         </p:nvSpPr>
         <p:spPr>
           <a:xfrm>
-            <a:off x="603503" y="4233671"/>
-            <a:ext cx="457200" cy="457200"/>
+            <a:off x="603503" y="4014216"/>
+            <a:ext cx="420624" cy="420624"/>
           </a:xfrm>
           <a:prstGeom prst="rect">
             <a:avLst/>
@@ -31128,8 +30520,8 @@
         </p:nvSpPr>
         <p:spPr>
           <a:xfrm>
-            <a:off x="630936" y="4251959"/>
-            <a:ext cx="420624" cy="420624"/>
+            <a:off x="630936" y="4032504"/>
+            <a:ext cx="384048" cy="384048"/>
           </a:xfrm>
           <a:prstGeom prst="ellipse">
             <a:avLst/>
@@ -31168,7 +30560,7 @@
                 </a:solidFill>
                 <a:latin typeface="맑은 고딕"/>
               </a:rPr>
-              <a:t>FR07</a:t>
+              <a:t>FR06</a:t>
             </a:r>
           </a:p>
         </p:txBody>
@@ -31181,8 +30573,8 @@
         </p:nvSpPr>
         <p:spPr>
           <a:xfrm>
-            <a:off x="1179576" y="4233671"/>
-            <a:ext cx="4846320" cy="457200"/>
+            <a:off x="1143000" y="4014216"/>
+            <a:ext cx="4882896" cy="420624"/>
           </a:xfrm>
           <a:prstGeom prst="rect">
             <a:avLst/>
@@ -31197,13 +30589,13 @@
           <a:p>
             <a:pPr algn="l"/>
             <a:r>
-              <a:rPr sz="1200" b="1" i="0">
+              <a:rPr sz="1100" b="1" i="0">
                 <a:solidFill>
                   <a:srgbClr val="000000"/>
                 </a:solidFill>
                 <a:latin typeface="맑은 고딕"/>
               </a:rPr>
-              <a:t>MoE 모델 서빙</a:t>
+              <a:t>RAG 서빙</a:t>
             </a:r>
           </a:p>
         </p:txBody>
@@ -31216,8 +30608,8 @@
         </p:nvSpPr>
         <p:spPr>
           <a:xfrm>
-            <a:off x="265176" y="4764023"/>
-            <a:ext cx="5852160" cy="457200"/>
+            <a:off x="265176" y="4507992"/>
+            <a:ext cx="5852160" cy="420624"/>
           </a:xfrm>
           <a:prstGeom prst="rect">
             <a:avLst/>
@@ -31262,8 +30654,8 @@
         </p:nvSpPr>
         <p:spPr>
           <a:xfrm>
-            <a:off x="603503" y="4764023"/>
-            <a:ext cx="457200" cy="457200"/>
+            <a:off x="603503" y="4507992"/>
+            <a:ext cx="420624" cy="420624"/>
           </a:xfrm>
           <a:prstGeom prst="rect">
             <a:avLst/>
@@ -31306,8 +30698,8 @@
         </p:nvSpPr>
         <p:spPr>
           <a:xfrm>
-            <a:off x="630936" y="4782311"/>
-            <a:ext cx="420624" cy="420624"/>
+            <a:off x="630936" y="4526279"/>
+            <a:ext cx="384048" cy="384048"/>
           </a:xfrm>
           <a:prstGeom prst="ellipse">
             <a:avLst/>
@@ -31346,7 +30738,7 @@
                 </a:solidFill>
                 <a:latin typeface="맑은 고딕"/>
               </a:rPr>
-              <a:t>FR08</a:t>
+              <a:t>FR07</a:t>
             </a:r>
           </a:p>
         </p:txBody>
@@ -31359,8 +30751,8 @@
         </p:nvSpPr>
         <p:spPr>
           <a:xfrm>
-            <a:off x="1179576" y="4764023"/>
-            <a:ext cx="4846320" cy="457200"/>
+            <a:off x="1143000" y="4507992"/>
+            <a:ext cx="4882896" cy="420624"/>
           </a:xfrm>
           <a:prstGeom prst="rect">
             <a:avLst/>
@@ -31375,13 +30767,13 @@
           <a:p>
             <a:pPr algn="l"/>
             <a:r>
-              <a:rPr sz="1200" b="1" i="0">
+              <a:rPr sz="1100" b="1" i="0">
                 <a:solidFill>
                   <a:srgbClr val="000000"/>
                 </a:solidFill>
                 <a:latin typeface="맑은 고딕"/>
               </a:rPr>
-              <a:t>Prefill/Decode disaggregation</a:t>
+              <a:t>MoE 모델 서빙</a:t>
             </a:r>
           </a:p>
         </p:txBody>
@@ -31394,8 +30786,8 @@
         </p:nvSpPr>
         <p:spPr>
           <a:xfrm>
-            <a:off x="265176" y="5294375"/>
-            <a:ext cx="5852160" cy="457200"/>
+            <a:off x="265176" y="5001768"/>
+            <a:ext cx="5852160" cy="420624"/>
           </a:xfrm>
           <a:prstGeom prst="rect">
             <a:avLst/>
@@ -31440,8 +30832,8 @@
         </p:nvSpPr>
         <p:spPr>
           <a:xfrm>
-            <a:off x="603503" y="5294375"/>
-            <a:ext cx="457200" cy="457200"/>
+            <a:off x="603503" y="5001768"/>
+            <a:ext cx="420624" cy="420624"/>
           </a:xfrm>
           <a:prstGeom prst="rect">
             <a:avLst/>
@@ -31484,8 +30876,8 @@
         </p:nvSpPr>
         <p:spPr>
           <a:xfrm>
-            <a:off x="630936" y="5312663"/>
-            <a:ext cx="420624" cy="420624"/>
+            <a:off x="630936" y="5020056"/>
+            <a:ext cx="384048" cy="384048"/>
           </a:xfrm>
           <a:prstGeom prst="ellipse">
             <a:avLst/>
@@ -31524,7 +30916,7 @@
                 </a:solidFill>
                 <a:latin typeface="맑은 고딕"/>
               </a:rPr>
-              <a:t>FR09</a:t>
+              <a:t>FR08</a:t>
             </a:r>
           </a:p>
         </p:txBody>
@@ -31537,8 +30929,8 @@
         </p:nvSpPr>
         <p:spPr>
           <a:xfrm>
-            <a:off x="1179576" y="5294375"/>
-            <a:ext cx="4846320" cy="457200"/>
+            <a:off x="1143000" y="5001768"/>
+            <a:ext cx="4882896" cy="420624"/>
           </a:xfrm>
           <a:prstGeom prst="rect">
             <a:avLst/>
@@ -31553,13 +30945,13 @@
           <a:p>
             <a:pPr algn="l"/>
             <a:r>
-              <a:rPr sz="1200" b="1" i="0">
+              <a:rPr sz="1100" b="1" i="0">
                 <a:solidFill>
                   <a:srgbClr val="000000"/>
                 </a:solidFill>
                 <a:latin typeface="맑은 고딕"/>
               </a:rPr>
-              <a:t>연산 offload와 GPU fallback</a:t>
+              <a:t>Prefill/Decode disaggregation</a:t>
             </a:r>
           </a:p>
         </p:txBody>
@@ -31572,8 +30964,8 @@
         </p:nvSpPr>
         <p:spPr>
           <a:xfrm>
-            <a:off x="265176" y="5824727"/>
-            <a:ext cx="5852160" cy="457200"/>
+            <a:off x="265176" y="5495544"/>
+            <a:ext cx="5852160" cy="420624"/>
           </a:xfrm>
           <a:prstGeom prst="rect">
             <a:avLst/>
@@ -31618,8 +31010,8 @@
         </p:nvSpPr>
         <p:spPr>
           <a:xfrm>
-            <a:off x="603503" y="5824727"/>
-            <a:ext cx="457200" cy="457200"/>
+            <a:off x="603503" y="5495544"/>
+            <a:ext cx="420624" cy="420624"/>
           </a:xfrm>
           <a:prstGeom prst="rect">
             <a:avLst/>
@@ -31662,8 +31054,8 @@
         </p:nvSpPr>
         <p:spPr>
           <a:xfrm>
-            <a:off x="630936" y="5843015"/>
-            <a:ext cx="420624" cy="420624"/>
+            <a:off x="630936" y="5513831"/>
+            <a:ext cx="384048" cy="384048"/>
           </a:xfrm>
           <a:prstGeom prst="ellipse">
             <a:avLst/>
@@ -31702,7 +31094,7 @@
                 </a:solidFill>
                 <a:latin typeface="맑은 고딕"/>
               </a:rPr>
-              <a:t>FR10</a:t>
+              <a:t>FR09</a:t>
             </a:r>
           </a:p>
         </p:txBody>
@@ -31715,8 +31107,8 @@
         </p:nvSpPr>
         <p:spPr>
           <a:xfrm>
-            <a:off x="1179576" y="5824727"/>
-            <a:ext cx="4846320" cy="457200"/>
+            <a:off x="1143000" y="5495544"/>
+            <a:ext cx="4882896" cy="420624"/>
           </a:xfrm>
           <a:prstGeom prst="rect">
             <a:avLst/>
@@ -31731,7 +31123,185 @@
           <a:p>
             <a:pPr algn="l"/>
             <a:r>
-              <a:rPr sz="1200" b="1" i="0">
+              <a:rPr sz="1100" b="1" i="0">
+                <a:solidFill>
+                  <a:srgbClr val="000000"/>
+                </a:solidFill>
+                <a:latin typeface="맑은 고딕"/>
+              </a:rPr>
+              <a:t>연산 offload와 GPU fallback</a:t>
+            </a:r>
+          </a:p>
+        </p:txBody>
+      </p:sp>
+      <p:sp>
+        <p:nvSpPr>
+          <p:cNvPr id="45" name="Rectangle 44"/>
+          <p:cNvSpPr/>
+          <p:nvPr/>
+        </p:nvSpPr>
+        <p:spPr>
+          <a:xfrm>
+            <a:off x="265176" y="5989320"/>
+            <a:ext cx="5852160" cy="420624"/>
+          </a:xfrm>
+          <a:prstGeom prst="rect">
+            <a:avLst/>
+          </a:prstGeom>
+          <a:solidFill>
+            <a:srgbClr val="DEEBF6"/>
+          </a:solidFill>
+          <a:ln w="28575">
+            <a:solidFill>
+              <a:srgbClr val="1E4E79"/>
+            </a:solidFill>
+          </a:ln>
+          <a:effectLst/>
+        </p:spPr>
+        <p:style>
+          <a:lnRef idx="1">
+            <a:schemeClr val="accent1"/>
+          </a:lnRef>
+          <a:fillRef idx="3">
+            <a:schemeClr val="accent1"/>
+          </a:fillRef>
+          <a:effectRef idx="2">
+            <a:schemeClr val="accent1"/>
+          </a:effectRef>
+          <a:fontRef idx="minor">
+            <a:schemeClr val="lt1"/>
+          </a:fontRef>
+        </p:style>
+        <p:txBody>
+          <a:bodyPr rtlCol="0" anchor="ctr"/>
+          <a:lstStyle/>
+          <a:p>
+            <a:pPr algn="ctr"/>
+          </a:p>
+        </p:txBody>
+      </p:sp>
+      <p:sp>
+        <p:nvSpPr>
+          <p:cNvPr id="46" name="Rectangle 45"/>
+          <p:cNvSpPr/>
+          <p:nvPr/>
+        </p:nvSpPr>
+        <p:spPr>
+          <a:xfrm>
+            <a:off x="603503" y="5989320"/>
+            <a:ext cx="420624" cy="420624"/>
+          </a:xfrm>
+          <a:prstGeom prst="rect">
+            <a:avLst/>
+          </a:prstGeom>
+          <a:solidFill>
+            <a:srgbClr val="1E4E79"/>
+          </a:solidFill>
+          <a:ln>
+            <a:noFill/>
+          </a:ln>
+          <a:effectLst/>
+        </p:spPr>
+        <p:style>
+          <a:lnRef idx="1">
+            <a:schemeClr val="accent1"/>
+          </a:lnRef>
+          <a:fillRef idx="3">
+            <a:schemeClr val="accent1"/>
+          </a:fillRef>
+          <a:effectRef idx="2">
+            <a:schemeClr val="accent1"/>
+          </a:effectRef>
+          <a:fontRef idx="minor">
+            <a:schemeClr val="lt1"/>
+          </a:fontRef>
+        </p:style>
+        <p:txBody>
+          <a:bodyPr rtlCol="0" anchor="ctr"/>
+          <a:lstStyle/>
+          <a:p>
+            <a:pPr algn="ctr"/>
+          </a:p>
+        </p:txBody>
+      </p:sp>
+      <p:sp>
+        <p:nvSpPr>
+          <p:cNvPr id="47" name="Oval 46"/>
+          <p:cNvSpPr/>
+          <p:nvPr/>
+        </p:nvSpPr>
+        <p:spPr>
+          <a:xfrm>
+            <a:off x="630936" y="6007608"/>
+            <a:ext cx="384048" cy="384048"/>
+          </a:xfrm>
+          <a:prstGeom prst="ellipse">
+            <a:avLst/>
+          </a:prstGeom>
+          <a:solidFill>
+            <a:srgbClr val="1E4E79"/>
+          </a:solidFill>
+          <a:ln>
+            <a:noFill/>
+          </a:ln>
+          <a:effectLst/>
+        </p:spPr>
+        <p:style>
+          <a:lnRef idx="1">
+            <a:schemeClr val="accent1"/>
+          </a:lnRef>
+          <a:fillRef idx="3">
+            <a:schemeClr val="accent1"/>
+          </a:fillRef>
+          <a:effectRef idx="2">
+            <a:schemeClr val="accent1"/>
+          </a:effectRef>
+          <a:fontRef idx="minor">
+            <a:schemeClr val="lt1"/>
+          </a:fontRef>
+        </p:style>
+        <p:txBody>
+          <a:bodyPr rtlCol="0" anchor="ctr" wrap="none" lIns="0" tIns="0" rIns="0" bIns="0"/>
+          <a:lstStyle/>
+          <a:p>
+            <a:pPr algn="ctr"/>
+            <a:r>
+              <a:rPr sz="900" b="1" i="0">
+                <a:solidFill>
+                  <a:srgbClr val="FFFFFF"/>
+                </a:solidFill>
+                <a:latin typeface="맑은 고딕"/>
+              </a:rPr>
+              <a:t>FR10</a:t>
+            </a:r>
+          </a:p>
+        </p:txBody>
+      </p:sp>
+      <p:sp>
+        <p:nvSpPr>
+          <p:cNvPr id="48" name="TextBox 47"/>
+          <p:cNvSpPr txBox="1"/>
+          <p:nvPr/>
+        </p:nvSpPr>
+        <p:spPr>
+          <a:xfrm>
+            <a:off x="1143000" y="5989320"/>
+            <a:ext cx="4882896" cy="420624"/>
+          </a:xfrm>
+          <a:prstGeom prst="rect">
+            <a:avLst/>
+          </a:prstGeom>
+          <a:noFill/>
+        </p:spPr>
+        <p:txBody>
+          <a:bodyPr wrap="square" lIns="36576" tIns="18288" rIns="36576" bIns="18288" anchor="ctr">
+            <a:spAutoFit/>
+          </a:bodyPr>
+          <a:lstStyle/>
+          <a:p>
+            <a:pPr algn="l"/>
+            <a:r>
+              <a:rPr sz="1100" b="1" i="0">
                 <a:solidFill>
                   <a:srgbClr val="000000"/>
                 </a:solidFill>
@@ -31744,7 +31314,7 @@
       </p:sp>
       <p:sp>
         <p:nvSpPr>
-          <p:cNvPr id="45" name="TextBox 44"/>
+          <p:cNvPr id="49" name="TextBox 48"/>
           <p:cNvSpPr txBox="1"/>
           <p:nvPr/>
         </p:nvSpPr>
@@ -31779,7 +31349,7 @@
       </p:sp>
       <p:sp>
         <p:nvSpPr>
-          <p:cNvPr id="46" name="Rectangle 45"/>
+          <p:cNvPr id="50" name="Rectangle 49"/>
           <p:cNvSpPr/>
           <p:nvPr/>
         </p:nvSpPr>
@@ -31825,7 +31395,7 @@
       </p:sp>
       <p:sp>
         <p:nvSpPr>
-          <p:cNvPr id="47" name="Rectangle 46"/>
+          <p:cNvPr id="51" name="Rectangle 50"/>
           <p:cNvSpPr/>
           <p:nvPr/>
         </p:nvSpPr>
@@ -31869,7 +31439,7 @@
       </p:sp>
       <p:sp>
         <p:nvSpPr>
-          <p:cNvPr id="48" name="Oval 47"/>
+          <p:cNvPr id="52" name="Oval 51"/>
           <p:cNvSpPr/>
           <p:nvPr/>
         </p:nvSpPr>
@@ -31922,7 +31492,7 @@
       </p:sp>
       <p:sp>
         <p:nvSpPr>
-          <p:cNvPr id="49" name="TextBox 48"/>
+          <p:cNvPr id="53" name="TextBox 52"/>
           <p:cNvSpPr txBox="1"/>
           <p:nvPr/>
         </p:nvSpPr>
@@ -31957,7 +31527,7 @@
       </p:sp>
       <p:sp>
         <p:nvSpPr>
-          <p:cNvPr id="50" name="Rectangle 49"/>
+          <p:cNvPr id="54" name="Rectangle 53"/>
           <p:cNvSpPr/>
           <p:nvPr/>
         </p:nvSpPr>
@@ -32003,7 +31573,7 @@
       </p:sp>
       <p:sp>
         <p:nvSpPr>
-          <p:cNvPr id="51" name="Rectangle 50"/>
+          <p:cNvPr id="55" name="Rectangle 54"/>
           <p:cNvSpPr/>
           <p:nvPr/>
         </p:nvSpPr>
@@ -32047,7 +31617,7 @@
       </p:sp>
       <p:sp>
         <p:nvSpPr>
-          <p:cNvPr id="52" name="Oval 51"/>
+          <p:cNvPr id="56" name="Oval 55"/>
           <p:cNvSpPr/>
           <p:nvPr/>
         </p:nvSpPr>
@@ -32100,7 +31670,7 @@
       </p:sp>
       <p:sp>
         <p:nvSpPr>
-          <p:cNvPr id="53" name="TextBox 52"/>
+          <p:cNvPr id="57" name="TextBox 56"/>
           <p:cNvSpPr txBox="1"/>
           <p:nvPr/>
         </p:nvSpPr>
@@ -32135,7 +31705,7 @@
       </p:sp>
       <p:sp>
         <p:nvSpPr>
-          <p:cNvPr id="54" name="Rectangle 53"/>
+          <p:cNvPr id="58" name="Rectangle 57"/>
           <p:cNvSpPr/>
           <p:nvPr/>
         </p:nvSpPr>
@@ -32181,7 +31751,7 @@
       </p:sp>
       <p:sp>
         <p:nvSpPr>
-          <p:cNvPr id="55" name="Rectangle 54"/>
+          <p:cNvPr id="59" name="Rectangle 58"/>
           <p:cNvSpPr/>
           <p:nvPr/>
         </p:nvSpPr>
@@ -32225,7 +31795,7 @@
       </p:sp>
       <p:sp>
         <p:nvSpPr>
-          <p:cNvPr id="56" name="Oval 55"/>
+          <p:cNvPr id="60" name="Oval 59"/>
           <p:cNvSpPr/>
           <p:nvPr/>
         </p:nvSpPr>
@@ -32278,7 +31848,7 @@
       </p:sp>
       <p:sp>
         <p:nvSpPr>
-          <p:cNvPr id="57" name="TextBox 56"/>
+          <p:cNvPr id="61" name="TextBox 60"/>
           <p:cNvSpPr txBox="1"/>
           <p:nvPr/>
         </p:nvSpPr>
@@ -32313,7 +31883,7 @@
       </p:sp>
       <p:sp>
         <p:nvSpPr>
-          <p:cNvPr id="58" name="Rectangle 57"/>
+          <p:cNvPr id="62" name="Rectangle 61"/>
           <p:cNvSpPr/>
           <p:nvPr/>
         </p:nvSpPr>
@@ -32359,7 +31929,7 @@
       </p:sp>
       <p:sp>
         <p:nvSpPr>
-          <p:cNvPr id="59" name="Rectangle 58"/>
+          <p:cNvPr id="63" name="Rectangle 62"/>
           <p:cNvSpPr/>
           <p:nvPr/>
         </p:nvSpPr>
@@ -32403,7 +31973,7 @@
       </p:sp>
       <p:sp>
         <p:nvSpPr>
-          <p:cNvPr id="60" name="Oval 59"/>
+          <p:cNvPr id="64" name="Oval 63"/>
           <p:cNvSpPr/>
           <p:nvPr/>
         </p:nvSpPr>
@@ -32456,7 +32026,7 @@
       </p:sp>
       <p:sp>
         <p:nvSpPr>
-          <p:cNvPr id="61" name="TextBox 60"/>
+          <p:cNvPr id="65" name="TextBox 64"/>
           <p:cNvSpPr txBox="1"/>
           <p:nvPr/>
         </p:nvSpPr>
@@ -32491,7 +32061,7 @@
       </p:sp>
       <p:sp>
         <p:nvSpPr>
-          <p:cNvPr id="62" name="Rectangle 61"/>
+          <p:cNvPr id="66" name="Rectangle 65"/>
           <p:cNvSpPr/>
           <p:nvPr/>
         </p:nvSpPr>
@@ -32537,7 +32107,7 @@
       </p:sp>
       <p:sp>
         <p:nvSpPr>
-          <p:cNvPr id="63" name="Rectangle 62"/>
+          <p:cNvPr id="67" name="Rectangle 66"/>
           <p:cNvSpPr/>
           <p:nvPr/>
         </p:nvSpPr>
@@ -32581,7 +32151,7 @@
       </p:sp>
       <p:sp>
         <p:nvSpPr>
-          <p:cNvPr id="64" name="Oval 63"/>
+          <p:cNvPr id="68" name="Oval 67"/>
           <p:cNvSpPr/>
           <p:nvPr/>
         </p:nvSpPr>
@@ -32634,7 +32204,7 @@
       </p:sp>
       <p:sp>
         <p:nvSpPr>
-          <p:cNvPr id="65" name="TextBox 64"/>
+          <p:cNvPr id="69" name="TextBox 68"/>
           <p:cNvSpPr txBox="1"/>
           <p:nvPr/>
         </p:nvSpPr>
@@ -32669,7 +32239,7 @@
       </p:sp>
       <p:sp>
         <p:nvSpPr>
-          <p:cNvPr id="66" name="Rectangle 65"/>
+          <p:cNvPr id="70" name="Rectangle 69"/>
           <p:cNvSpPr/>
           <p:nvPr/>
         </p:nvSpPr>
@@ -32715,7 +32285,7 @@
       </p:sp>
       <p:sp>
         <p:nvSpPr>
-          <p:cNvPr id="67" name="Rectangle 66"/>
+          <p:cNvPr id="71" name="Rectangle 70"/>
           <p:cNvSpPr/>
           <p:nvPr/>
         </p:nvSpPr>
@@ -32759,7 +32329,7 @@
       </p:sp>
       <p:sp>
         <p:nvSpPr>
-          <p:cNvPr id="68" name="Oval 67"/>
+          <p:cNvPr id="72" name="Oval 71"/>
           <p:cNvSpPr/>
           <p:nvPr/>
         </p:nvSpPr>
@@ -32812,7 +32382,7 @@
       </p:sp>
       <p:sp>
         <p:nvSpPr>
-          <p:cNvPr id="69" name="TextBox 68"/>
+          <p:cNvPr id="73" name="TextBox 72"/>
           <p:cNvSpPr txBox="1"/>
           <p:nvPr/>
         </p:nvSpPr>
@@ -32847,7 +32417,7 @@
       </p:sp>
       <p:sp>
         <p:nvSpPr>
-          <p:cNvPr id="70" name="Rectangle 69"/>
+          <p:cNvPr id="74" name="Rectangle 73"/>
           <p:cNvSpPr/>
           <p:nvPr/>
         </p:nvSpPr>
@@ -32893,7 +32463,7 @@
       </p:sp>
       <p:sp>
         <p:nvSpPr>
-          <p:cNvPr id="71" name="Rectangle 70"/>
+          <p:cNvPr id="75" name="Rectangle 74"/>
           <p:cNvSpPr/>
           <p:nvPr/>
         </p:nvSpPr>
@@ -32937,7 +32507,7 @@
       </p:sp>
       <p:sp>
         <p:nvSpPr>
-          <p:cNvPr id="72" name="Oval 71"/>
+          <p:cNvPr id="76" name="Oval 75"/>
           <p:cNvSpPr/>
           <p:nvPr/>
         </p:nvSpPr>
@@ -32990,7 +32560,7 @@
       </p:sp>
       <p:sp>
         <p:nvSpPr>
-          <p:cNvPr id="73" name="TextBox 72"/>
+          <p:cNvPr id="77" name="TextBox 76"/>
           <p:cNvSpPr txBox="1"/>
           <p:nvPr/>
         </p:nvSpPr>
@@ -33141,7 +32711,7 @@
                 </a:solidFill>
                 <a:latin typeface="맑은 고딕"/>
               </a:rPr>
-              <a:t>정제 요구사항 : 기능 요구사항 25건, 품질 요구사항 11건, 제약사항 7건 (합계 43건)</a:t>
+              <a:t>정제 요구사항 : 기능 요구사항 26건, 품질 요구사항 11건, 제약사항 7건 (합계 44건)</a:t>
             </a:r>
           </a:p>
         </p:txBody>
@@ -35293,7 +34863,7 @@
                 </a:solidFill>
                 <a:latin typeface="맑은 고딕"/>
               </a:rPr>
-              <a:t>정제 요구사항 : 기능 요구사항 25건, 품질 요구사항 11건, 제약사항 7건 (합계 43건)</a:t>
+              <a:t>정제 요구사항 : 기능 요구사항 26건, 품질 요구사항 11건, 제약사항 7건 (합계 44건)</a:t>
             </a:r>
           </a:p>
         </p:txBody>
@@ -35308,7 +34878,7 @@
         </p:nvGraphicFramePr>
         <p:xfrm>
           <a:off x="265176" y="1097280"/>
-          <a:ext cx="11704320" cy="4956048"/>
+          <a:ext cx="11704320" cy="5340096"/>
         </p:xfrm>
         <a:graphic>
           <a:graphicData uri="http://schemas.openxmlformats.org/drawingml/2006/table">
@@ -37146,6 +36716,149 @@
                           <a:latin typeface="맑은 고딕"/>
                         </a:rPr>
                         <a:t>이동·배치 정책을 설정으로 바꾼다</a:t>
+                      </a:r>
+                    </a:p>
+                  </a:txBody>
+                  <a:tcPr marL="45720" marR="45720" marT="22860" marB="22860" anchor="ctr">
+                    <a:lnL w="9525" cap="flat" cmpd="sng" algn="ctr">
+                      <a:solidFill>
+                        <a:srgbClr val="000000"/>
+                      </a:solidFill>
+                      <a:prstDash val="solid"/>
+                    </a:lnL>
+                    <a:lnR w="9525" cap="flat" cmpd="sng" algn="ctr">
+                      <a:solidFill>
+                        <a:srgbClr val="000000"/>
+                      </a:solidFill>
+                      <a:prstDash val="solid"/>
+                    </a:lnR>
+                    <a:lnT w="9525" cap="flat" cmpd="sng" algn="ctr">
+                      <a:solidFill>
+                        <a:srgbClr val="000000"/>
+                      </a:solidFill>
+                      <a:prstDash val="solid"/>
+                    </a:lnT>
+                    <a:lnB w="9525" cap="flat" cmpd="sng" algn="ctr">
+                      <a:solidFill>
+                        <a:srgbClr val="000000"/>
+                      </a:solidFill>
+                      <a:prstDash val="solid"/>
+                    </a:lnB>
+                    <a:solidFill>
+                      <a:srgbClr val="FFFFFF"/>
+                    </a:solidFill>
+                  </a:tcPr>
+                </a:tc>
+              </a:tr>
+              <a:tr h="384048">
+                <a:tc>
+                  <a:txBody>
+                    <a:bodyPr wrap="square"/>
+                    <a:lstStyle/>
+                    <a:p>
+                      <a:pPr algn="ctr"/>
+                      <a:r>
+                        <a:rPr sz="1050" b="0">
+                          <a:solidFill>
+                            <a:srgbClr val="000000"/>
+                          </a:solidFill>
+                          <a:latin typeface="맑은 고딕"/>
+                        </a:rPr>
+                        <a:t>FR-26</a:t>
+                      </a:r>
+                    </a:p>
+                  </a:txBody>
+                  <a:tcPr marL="45720" marR="45720" marT="22860" marB="22860" anchor="ctr">
+                    <a:lnL w="9525" cap="flat" cmpd="sng" algn="ctr">
+                      <a:solidFill>
+                        <a:srgbClr val="000000"/>
+                      </a:solidFill>
+                      <a:prstDash val="solid"/>
+                    </a:lnL>
+                    <a:lnR w="9525" cap="flat" cmpd="sng" algn="ctr">
+                      <a:solidFill>
+                        <a:srgbClr val="000000"/>
+                      </a:solidFill>
+                      <a:prstDash val="solid"/>
+                    </a:lnR>
+                    <a:lnT w="9525" cap="flat" cmpd="sng" algn="ctr">
+                      <a:solidFill>
+                        <a:srgbClr val="000000"/>
+                      </a:solidFill>
+                      <a:prstDash val="solid"/>
+                    </a:lnT>
+                    <a:lnB w="9525" cap="flat" cmpd="sng" algn="ctr">
+                      <a:solidFill>
+                        <a:srgbClr val="000000"/>
+                      </a:solidFill>
+                      <a:prstDash val="solid"/>
+                    </a:lnB>
+                    <a:solidFill>
+                      <a:srgbClr val="FFFFFF"/>
+                    </a:solidFill>
+                  </a:tcPr>
+                </a:tc>
+                <a:tc>
+                  <a:txBody>
+                    <a:bodyPr wrap="square"/>
+                    <a:lstStyle/>
+                    <a:p>
+                      <a:pPr algn="l"/>
+                      <a:r>
+                        <a:rPr sz="1050" b="0">
+                          <a:solidFill>
+                            <a:srgbClr val="000000"/>
+                          </a:solidFill>
+                          <a:latin typeface="맑은 고딕"/>
+                        </a:rPr>
+                        <a:t>메모리 배치와 연산의 동적 스케줄링</a:t>
+                      </a:r>
+                    </a:p>
+                  </a:txBody>
+                  <a:tcPr marL="45720" marR="45720" marT="22860" marB="22860" anchor="ctr">
+                    <a:lnL w="9525" cap="flat" cmpd="sng" algn="ctr">
+                      <a:solidFill>
+                        <a:srgbClr val="000000"/>
+                      </a:solidFill>
+                      <a:prstDash val="solid"/>
+                    </a:lnL>
+                    <a:lnR w="9525" cap="flat" cmpd="sng" algn="ctr">
+                      <a:solidFill>
+                        <a:srgbClr val="000000"/>
+                      </a:solidFill>
+                      <a:prstDash val="solid"/>
+                    </a:lnR>
+                    <a:lnT w="9525" cap="flat" cmpd="sng" algn="ctr">
+                      <a:solidFill>
+                        <a:srgbClr val="000000"/>
+                      </a:solidFill>
+                      <a:prstDash val="solid"/>
+                    </a:lnT>
+                    <a:lnB w="9525" cap="flat" cmpd="sng" algn="ctr">
+                      <a:solidFill>
+                        <a:srgbClr val="000000"/>
+                      </a:solidFill>
+                      <a:prstDash val="solid"/>
+                    </a:lnB>
+                    <a:solidFill>
+                      <a:srgbClr val="FFFFFF"/>
+                    </a:solidFill>
+                  </a:tcPr>
+                </a:tc>
+                <a:tc>
+                  <a:txBody>
+                    <a:bodyPr wrap="square"/>
+                    <a:lstStyle/>
+                    <a:p>
+                      <a:pPr algn="l"/>
+                      <a:r>
+                        <a:rPr sz="1050" b="0">
+                          <a:solidFill>
+                            <a:srgbClr val="000000"/>
+                          </a:solidFill>
+                          <a:latin typeface="맑은 고딕"/>
+                        </a:rPr>
+                        <a:t>서빙 중의 상태(요청 도착, 메모리 사용 현황, 접근 이력)를 보고 데이터를 어느 메모리에 둘지, 연산을 어느 장치에서 수행할지, 이를 언제 어떤 순서로 실행할지를 정해 반영한다</a:t>
                       </a:r>
                     </a:p>
                   </a:txBody>
